--- a/Docs/ForTheBlind/Introducing for the blind.pptx
+++ b/Docs/ForTheBlind/Introducing for the blind.pptx
@@ -5,33 +5,37 @@
     <p:sldMasterId id="2147483660" r:id="rId1"/>
   </p:sldMasterIdLst>
   <p:notesMasterIdLst>
-    <p:notesMasterId r:id="rId23"/>
+    <p:notesMasterId r:id="rId27"/>
   </p:notesMasterIdLst>
   <p:sldIdLst>
     <p:sldId id="411" r:id="rId2"/>
     <p:sldId id="425" r:id="rId3"/>
     <p:sldId id="413" r:id="rId4"/>
-    <p:sldId id="412" r:id="rId5"/>
-    <p:sldId id="414" r:id="rId6"/>
-    <p:sldId id="415" r:id="rId7"/>
-    <p:sldId id="416" r:id="rId8"/>
-    <p:sldId id="417" r:id="rId9"/>
-    <p:sldId id="424" r:id="rId10"/>
-    <p:sldId id="418" r:id="rId11"/>
-    <p:sldId id="419" r:id="rId12"/>
-    <p:sldId id="428" r:id="rId13"/>
-    <p:sldId id="427" r:id="rId14"/>
-    <p:sldId id="429" r:id="rId15"/>
-    <p:sldId id="420" r:id="rId16"/>
-    <p:sldId id="421" r:id="rId17"/>
-    <p:sldId id="422" r:id="rId18"/>
-    <p:sldId id="423" r:id="rId19"/>
-    <p:sldId id="426" r:id="rId20"/>
-    <p:sldId id="442" r:id="rId21"/>
-    <p:sldId id="403" r:id="rId22"/>
+    <p:sldId id="414" r:id="rId5"/>
+    <p:sldId id="415" r:id="rId6"/>
+    <p:sldId id="416" r:id="rId7"/>
+    <p:sldId id="417" r:id="rId8"/>
+    <p:sldId id="424" r:id="rId9"/>
+    <p:sldId id="418" r:id="rId10"/>
+    <p:sldId id="419" r:id="rId11"/>
+    <p:sldId id="428" r:id="rId12"/>
+    <p:sldId id="427" r:id="rId13"/>
+    <p:sldId id="429" r:id="rId14"/>
+    <p:sldId id="420" r:id="rId15"/>
+    <p:sldId id="421" r:id="rId16"/>
+    <p:sldId id="422" r:id="rId17"/>
+    <p:sldId id="423" r:id="rId18"/>
+    <p:sldId id="443" r:id="rId19"/>
+    <p:sldId id="444" r:id="rId20"/>
+    <p:sldId id="445" r:id="rId21"/>
+    <p:sldId id="446" r:id="rId22"/>
+    <p:sldId id="447" r:id="rId23"/>
+    <p:sldId id="448" r:id="rId24"/>
+    <p:sldId id="426" r:id="rId25"/>
+    <p:sldId id="403" r:id="rId26"/>
   </p:sldIdLst>
   <p:sldSz cx="12192000" cy="6858000"/>
-  <p:notesSz cx="6858000" cy="9144000"/>
+  <p:notesSz cx="7102475" cy="9388475"/>
   <p:defaultTextStyle>
     <a:defPPr>
       <a:defRPr lang="en-US"/>
@@ -170,14 +174,14 @@
         <p:spPr>
           <a:xfrm>
             <a:off x="0" y="0"/>
-            <a:ext cx="2971800" cy="458788"/>
+            <a:ext cx="3077739" cy="471054"/>
           </a:xfrm>
           <a:prstGeom prst="rect">
             <a:avLst/>
           </a:prstGeom>
         </p:spPr>
         <p:txBody>
-          <a:bodyPr vert="horz" lIns="91440" tIns="45720" rIns="91440" bIns="45720" rtlCol="0"/>
+          <a:bodyPr vert="horz" lIns="94229" tIns="47114" rIns="94229" bIns="47114" rtlCol="0"/>
           <a:lstStyle>
             <a:lvl1pPr algn="l">
               <a:defRPr sz="1200"/>
@@ -200,15 +204,15 @@
         </p:nvSpPr>
         <p:spPr>
           <a:xfrm>
-            <a:off x="3884613" y="0"/>
-            <a:ext cx="2971800" cy="458788"/>
+            <a:off x="4023092" y="0"/>
+            <a:ext cx="3077739" cy="471054"/>
           </a:xfrm>
           <a:prstGeom prst="rect">
             <a:avLst/>
           </a:prstGeom>
         </p:spPr>
         <p:txBody>
-          <a:bodyPr vert="horz" lIns="91440" tIns="45720" rIns="91440" bIns="45720" rtlCol="0"/>
+          <a:bodyPr vert="horz" lIns="94229" tIns="47114" rIns="94229" bIns="47114" rtlCol="0"/>
           <a:lstStyle>
             <a:lvl1pPr algn="r">
               <a:defRPr sz="1200"/>
@@ -217,7 +221,7 @@
           <a:p>
             <a:fld id="{656D2E9F-587F-4929-A615-D1B22C008AE4}" type="datetimeFigureOut">
               <a:rPr lang="en-US" smtClean="0"/>
-              <a:t>4/16/2024</a:t>
+              <a:t>5/18/2026</a:t>
             </a:fld>
             <a:endParaRPr lang="en-US" dirty="0"/>
           </a:p>
@@ -235,8 +239,8 @@
         </p:nvSpPr>
         <p:spPr>
           <a:xfrm>
-            <a:off x="685800" y="1143000"/>
-            <a:ext cx="5486400" cy="3086100"/>
+            <a:off x="735013" y="1173163"/>
+            <a:ext cx="5632450" cy="3168650"/>
           </a:xfrm>
           <a:prstGeom prst="rect">
             <a:avLst/>
@@ -249,7 +253,7 @@
           </a:ln>
         </p:spPr>
         <p:txBody>
-          <a:bodyPr vert="horz" lIns="91440" tIns="45720" rIns="91440" bIns="45720" rtlCol="0" anchor="ctr"/>
+          <a:bodyPr vert="horz" lIns="94229" tIns="47114" rIns="94229" bIns="47114" rtlCol="0" anchor="ctr"/>
           <a:lstStyle/>
           <a:p>
             <a:endParaRPr lang="en-US" dirty="0"/>
@@ -268,15 +272,15 @@
         </p:nvSpPr>
         <p:spPr>
           <a:xfrm>
-            <a:off x="685800" y="4400550"/>
-            <a:ext cx="5486400" cy="3600450"/>
+            <a:off x="710248" y="4518204"/>
+            <a:ext cx="5681980" cy="3696712"/>
           </a:xfrm>
           <a:prstGeom prst="rect">
             <a:avLst/>
           </a:prstGeom>
         </p:spPr>
         <p:txBody>
-          <a:bodyPr vert="horz" lIns="91440" tIns="45720" rIns="91440" bIns="45720" rtlCol="0"/>
+          <a:bodyPr vert="horz" lIns="94229" tIns="47114" rIns="94229" bIns="47114" rtlCol="0"/>
           <a:lstStyle/>
           <a:p>
             <a:pPr lvl="0"/>
@@ -327,15 +331,15 @@
         </p:nvSpPr>
         <p:spPr>
           <a:xfrm>
-            <a:off x="0" y="8685213"/>
-            <a:ext cx="2971800" cy="458787"/>
+            <a:off x="0" y="8917422"/>
+            <a:ext cx="3077739" cy="471053"/>
           </a:xfrm>
           <a:prstGeom prst="rect">
             <a:avLst/>
           </a:prstGeom>
         </p:spPr>
         <p:txBody>
-          <a:bodyPr vert="horz" lIns="91440" tIns="45720" rIns="91440" bIns="45720" rtlCol="0" anchor="b"/>
+          <a:bodyPr vert="horz" lIns="94229" tIns="47114" rIns="94229" bIns="47114" rtlCol="0" anchor="b"/>
           <a:lstStyle>
             <a:lvl1pPr algn="l">
               <a:defRPr sz="1200"/>
@@ -358,15 +362,15 @@
         </p:nvSpPr>
         <p:spPr>
           <a:xfrm>
-            <a:off x="3884613" y="8685213"/>
-            <a:ext cx="2971800" cy="458787"/>
+            <a:off x="4023092" y="8917422"/>
+            <a:ext cx="3077739" cy="471053"/>
           </a:xfrm>
           <a:prstGeom prst="rect">
             <a:avLst/>
           </a:prstGeom>
         </p:spPr>
         <p:txBody>
-          <a:bodyPr vert="horz" lIns="91440" tIns="45720" rIns="91440" bIns="45720" rtlCol="0" anchor="b"/>
+          <a:bodyPr vert="horz" lIns="94229" tIns="47114" rIns="94229" bIns="47114" rtlCol="0" anchor="b"/>
           <a:lstStyle>
             <a:lvl1pPr algn="r">
               <a:defRPr sz="1200"/>
@@ -512,6 +516,13 @@
           </p:nvPr>
         </p:nvSpPr>
         <p:spPr/>
+        <p:txBody>
+          <a:bodyPr/>
+          <a:lstStyle/>
+          <a:p>
+            <a:endParaRPr lang="en-US" dirty="0"/>
+          </a:p>
+        </p:txBody>
       </p:sp>
       <p:sp>
         <p:nvSpPr>
@@ -547,37 +558,15 @@
           <a:bodyPr/>
           <a:lstStyle/>
           <a:p>
-            <a:pPr marL="0" marR="0" lvl="0" indent="0" algn="l" defTabSz="457200" rtl="0" eaLnBrk="1" fontAlgn="auto" latinLnBrk="0" hangingPunct="1">
-              <a:lnSpc>
-                <a:spcPct val="100000"/>
-              </a:lnSpc>
-              <a:spcBef>
-                <a:spcPts val="0"/>
-              </a:spcBef>
-              <a:spcAft>
-                <a:spcPts val="0"/>
-              </a:spcAft>
-              <a:buClrTx/>
-              <a:buSzTx/>
-              <a:buFontTx/>
-              <a:buNone/>
-              <a:tabLst/>
+            <a:pPr defTabSz="471145">
               <a:defRPr/>
             </a:pPr>
             <a:r>
-              <a:rPr kumimoji="0" lang="en-US" sz="1200" b="0" i="0" u="none" strike="noStrike" kern="1200" cap="none" spc="0" normalizeH="0" baseline="0" noProof="0" dirty="0">
-                <a:ln>
-                  <a:noFill/>
-                </a:ln>
+              <a:rPr lang="en-US" dirty="0">
                 <a:solidFill>
                   <a:prstClr val="black"/>
                 </a:solidFill>
-                <a:effectLst/>
-                <a:uLnTx/>
-                <a:uFillTx/>
                 <a:latin typeface="Calibri" panose="020F0502020204030204"/>
-                <a:ea typeface="+mn-ea"/>
-                <a:cs typeface="+mn-cs"/>
               </a:rPr>
               <a:t>Introduction to Programming using Python</a:t>
             </a:r>
@@ -599,70 +588,26 @@
           <a:bodyPr/>
           <a:lstStyle/>
           <a:p>
-            <a:pPr marL="0" marR="0" lvl="0" indent="0" algn="r" defTabSz="457200" rtl="0" eaLnBrk="1" fontAlgn="auto" latinLnBrk="0" hangingPunct="1">
-              <a:lnSpc>
-                <a:spcPct val="100000"/>
-              </a:lnSpc>
-              <a:spcBef>
-                <a:spcPts val="0"/>
-              </a:spcBef>
-              <a:spcAft>
-                <a:spcPts val="0"/>
-              </a:spcAft>
-              <a:buClrTx/>
-              <a:buSzTx/>
-              <a:buFontTx/>
-              <a:buNone/>
-              <a:tabLst/>
+            <a:pPr defTabSz="471145">
               <a:defRPr/>
             </a:pPr>
             <a:fld id="{A596092B-28C7-44D1-B902-5437B333DFB7}" type="datetime1">
-              <a:rPr kumimoji="0" lang="en-US" sz="1200" b="0" i="0" u="none" strike="noStrike" kern="1200" cap="none" spc="0" normalizeH="0" baseline="0" noProof="0" smtClean="0">
-                <a:ln>
-                  <a:noFill/>
-                </a:ln>
+              <a:rPr lang="en-US">
                 <a:solidFill>
                   <a:prstClr val="black"/>
                 </a:solidFill>
-                <a:effectLst/>
-                <a:uLnTx/>
-                <a:uFillTx/>
                 <a:latin typeface="Calibri" panose="020F0502020204030204"/>
-                <a:ea typeface="+mn-ea"/>
-                <a:cs typeface="+mn-cs"/>
               </a:rPr>
-              <a:pPr marL="0" marR="0" lvl="0" indent="0" algn="r" defTabSz="457200" rtl="0" eaLnBrk="1" fontAlgn="auto" latinLnBrk="0" hangingPunct="1">
-                <a:lnSpc>
-                  <a:spcPct val="100000"/>
-                </a:lnSpc>
-                <a:spcBef>
-                  <a:spcPts val="0"/>
-                </a:spcBef>
-                <a:spcAft>
-                  <a:spcPts val="0"/>
-                </a:spcAft>
-                <a:buClrTx/>
-                <a:buSzTx/>
-                <a:buFontTx/>
-                <a:buNone/>
-                <a:tabLst/>
+              <a:pPr defTabSz="471145">
                 <a:defRPr/>
               </a:pPr>
-              <a:t>4/16/2024</a:t>
+              <a:t>5/18/2026</a:t>
             </a:fld>
-            <a:endParaRPr kumimoji="0" lang="en-US" sz="1200" b="0" i="0" u="none" strike="noStrike" kern="1200" cap="none" spc="0" normalizeH="0" baseline="0" noProof="0" dirty="0">
-              <a:ln>
-                <a:noFill/>
-              </a:ln>
+            <a:endParaRPr lang="en-US" dirty="0">
               <a:solidFill>
                 <a:prstClr val="black"/>
               </a:solidFill>
-              <a:effectLst/>
-              <a:uLnTx/>
-              <a:uFillTx/>
               <a:latin typeface="Calibri" panose="020F0502020204030204"/>
-              <a:ea typeface="+mn-ea"/>
-              <a:cs typeface="+mn-cs"/>
             </a:endParaRPr>
           </a:p>
         </p:txBody>
@@ -682,37 +627,15 @@
           <a:bodyPr/>
           <a:lstStyle/>
           <a:p>
-            <a:pPr marL="0" marR="0" lvl="0" indent="0" algn="l" defTabSz="457200" rtl="0" eaLnBrk="1" fontAlgn="auto" latinLnBrk="0" hangingPunct="1">
-              <a:lnSpc>
-                <a:spcPct val="100000"/>
-              </a:lnSpc>
-              <a:spcBef>
-                <a:spcPts val="0"/>
-              </a:spcBef>
-              <a:spcAft>
-                <a:spcPts val="0"/>
-              </a:spcAft>
-              <a:buClrTx/>
-              <a:buSzTx/>
-              <a:buFontTx/>
-              <a:buNone/>
-              <a:tabLst/>
+            <a:pPr defTabSz="471145">
               <a:defRPr/>
             </a:pPr>
             <a:r>
-              <a:rPr kumimoji="0" lang="en-US" sz="1200" b="0" i="0" u="none" strike="noStrike" kern="1200" cap="none" spc="0" normalizeH="0" baseline="0" noProof="0" dirty="0">
-                <a:ln>
-                  <a:noFill/>
-                </a:ln>
+              <a:rPr lang="en-US" dirty="0">
                 <a:solidFill>
                   <a:prstClr val="black"/>
                 </a:solidFill>
-                <a:effectLst/>
-                <a:uLnTx/>
-                <a:uFillTx/>
                 <a:latin typeface="Calibri" panose="020F0502020204030204"/>
-                <a:ea typeface="+mn-ea"/>
-                <a:cs typeface="+mn-cs"/>
               </a:rPr>
               <a:t>raysmith@alum.mit.edu</a:t>
             </a:r>
@@ -734,70 +657,26 @@
           <a:bodyPr/>
           <a:lstStyle/>
           <a:p>
-            <a:pPr marL="0" marR="0" lvl="0" indent="0" algn="r" defTabSz="457200" rtl="0" eaLnBrk="1" fontAlgn="auto" latinLnBrk="0" hangingPunct="1">
-              <a:lnSpc>
-                <a:spcPct val="100000"/>
-              </a:lnSpc>
-              <a:spcBef>
-                <a:spcPts val="0"/>
-              </a:spcBef>
-              <a:spcAft>
-                <a:spcPts val="0"/>
-              </a:spcAft>
-              <a:buClrTx/>
-              <a:buSzTx/>
-              <a:buFontTx/>
-              <a:buNone/>
-              <a:tabLst/>
+            <a:pPr defTabSz="471145">
               <a:defRPr/>
             </a:pPr>
             <a:fld id="{BA791329-992B-4F83-8435-C33B0EC26DB3}" type="slidenum">
-              <a:rPr kumimoji="0" lang="en-US" sz="1200" b="0" i="0" u="none" strike="noStrike" kern="1200" cap="none" spc="0" normalizeH="0" baseline="0" noProof="0" smtClean="0">
-                <a:ln>
-                  <a:noFill/>
-                </a:ln>
+              <a:rPr lang="en-US">
                 <a:solidFill>
                   <a:prstClr val="black"/>
                 </a:solidFill>
-                <a:effectLst/>
-                <a:uLnTx/>
-                <a:uFillTx/>
                 <a:latin typeface="Calibri" panose="020F0502020204030204"/>
-                <a:ea typeface="+mn-ea"/>
-                <a:cs typeface="+mn-cs"/>
               </a:rPr>
-              <a:pPr marL="0" marR="0" lvl="0" indent="0" algn="r" defTabSz="457200" rtl="0" eaLnBrk="1" fontAlgn="auto" latinLnBrk="0" hangingPunct="1">
-                <a:lnSpc>
-                  <a:spcPct val="100000"/>
-                </a:lnSpc>
-                <a:spcBef>
-                  <a:spcPts val="0"/>
-                </a:spcBef>
-                <a:spcAft>
-                  <a:spcPts val="0"/>
-                </a:spcAft>
-                <a:buClrTx/>
-                <a:buSzTx/>
-                <a:buFontTx/>
-                <a:buNone/>
-                <a:tabLst/>
+              <a:pPr defTabSz="471145">
                 <a:defRPr/>
               </a:pPr>
               <a:t>1</a:t>
             </a:fld>
-            <a:endParaRPr kumimoji="0" lang="en-US" sz="1200" b="0" i="0" u="none" strike="noStrike" kern="1200" cap="none" spc="0" normalizeH="0" baseline="0" noProof="0" dirty="0">
-              <a:ln>
-                <a:noFill/>
-              </a:ln>
+            <a:endParaRPr lang="en-US" dirty="0">
               <a:solidFill>
                 <a:prstClr val="black"/>
               </a:solidFill>
-              <a:effectLst/>
-              <a:uLnTx/>
-              <a:uFillTx/>
               <a:latin typeface="Calibri" panose="020F0502020204030204"/>
-              <a:ea typeface="+mn-ea"/>
-              <a:cs typeface="+mn-cs"/>
             </a:endParaRPr>
           </a:p>
         </p:txBody>
@@ -843,6 +722,13 @@
           </p:nvPr>
         </p:nvSpPr>
         <p:spPr/>
+        <p:txBody>
+          <a:bodyPr/>
+          <a:lstStyle/>
+          <a:p>
+            <a:endParaRPr lang="en-US" dirty="0"/>
+          </a:p>
+        </p:txBody>
       </p:sp>
       <p:sp>
         <p:nvSpPr>
@@ -861,13 +747,13 @@
           <a:p>
             <a:r>
               <a:rPr lang="en-US" dirty="0"/>
-              <a:t>Commas added to keep blank area from being compressed</a:t>
+              <a:t>Started as a guide to the implementor</a:t>
             </a:r>
           </a:p>
           <a:p>
             <a:r>
               <a:rPr lang="en-US" dirty="0"/>
-              <a:t>Figure moved to left and up to reduce effort to find figure</a:t>
+              <a:t>Became an audio based guide</a:t>
             </a:r>
           </a:p>
         </p:txBody>
@@ -889,7 +775,7 @@
           <a:p>
             <a:fld id="{194D4E80-AAF7-4841-B2F0-A647B649A6DE}" type="slidenum">
               <a:rPr lang="en-US" smtClean="0"/>
-              <a:t>11</a:t>
+              <a:t>14</a:t>
             </a:fld>
             <a:endParaRPr lang="en-US" dirty="0"/>
           </a:p>
@@ -898,7 +784,7 @@
     </p:spTree>
     <p:extLst>
       <p:ext uri="{BB962C8B-B14F-4D97-AF65-F5344CB8AC3E}">
-        <p14:creationId xmlns:p14="http://schemas.microsoft.com/office/powerpoint/2010/main" val="1106253144"/>
+        <p14:creationId xmlns:p14="http://schemas.microsoft.com/office/powerpoint/2010/main" val="541454828"/>
       </p:ext>
     </p:extLst>
   </p:cSld>
@@ -936,6 +822,13 @@
           </p:nvPr>
         </p:nvSpPr>
         <p:spPr/>
+        <p:txBody>
+          <a:bodyPr/>
+          <a:lstStyle/>
+          <a:p>
+            <a:endParaRPr lang="en-US" dirty="0"/>
+          </a:p>
+        </p:txBody>
       </p:sp>
       <p:sp>
         <p:nvSpPr>
@@ -952,46 +845,152 @@
           <a:bodyPr/>
           <a:lstStyle/>
           <a:p>
-            <a:r>
-              <a:rPr lang="en-US" dirty="0"/>
-              <a:t>Started as a guide to the implementor</a:t>
-            </a:r>
-          </a:p>
-          <a:p>
-            <a:r>
-              <a:rPr lang="en-US" dirty="0"/>
-              <a:t>Became an audio based guide</a:t>
-            </a:r>
-          </a:p>
-        </p:txBody>
-      </p:sp>
-      <p:sp>
-        <p:nvSpPr>
-          <p:cNvPr id="4" name="Slide Number Placeholder 3"/>
-          <p:cNvSpPr>
-            <a:spLocks noGrp="1"/>
-          </p:cNvSpPr>
-          <p:nvPr>
-            <p:ph type="sldNum" sz="quarter" idx="5"/>
-          </p:nvPr>
-        </p:nvSpPr>
-        <p:spPr/>
-        <p:txBody>
-          <a:bodyPr/>
-          <a:lstStyle/>
-          <a:p>
-            <a:fld id="{194D4E80-AAF7-4841-B2F0-A647B649A6DE}" type="slidenum">
-              <a:rPr lang="en-US" smtClean="0"/>
-              <a:t>15</a:t>
+            <a:endParaRPr lang="en-US" dirty="0"/>
+          </a:p>
+        </p:txBody>
+      </p:sp>
+      <p:sp>
+        <p:nvSpPr>
+          <p:cNvPr id="4" name="Header Placeholder 3"/>
+          <p:cNvSpPr>
+            <a:spLocks noGrp="1"/>
+          </p:cNvSpPr>
+          <p:nvPr>
+            <p:ph type="hdr" sz="quarter" idx="10"/>
+          </p:nvPr>
+        </p:nvSpPr>
+        <p:spPr/>
+        <p:txBody>
+          <a:bodyPr/>
+          <a:lstStyle/>
+          <a:p>
+            <a:pPr defTabSz="471145">
+              <a:defRPr/>
+            </a:pPr>
+            <a:r>
+              <a:rPr lang="en-US" dirty="0">
+                <a:solidFill>
+                  <a:prstClr val="black"/>
+                </a:solidFill>
+                <a:latin typeface="Calibri" panose="020F0502020204030204"/>
+              </a:rPr>
+              <a:t>Introduction to Programming using Python</a:t>
+            </a:r>
+          </a:p>
+        </p:txBody>
+      </p:sp>
+      <p:sp>
+        <p:nvSpPr>
+          <p:cNvPr id="5" name="Date Placeholder 4"/>
+          <p:cNvSpPr>
+            <a:spLocks noGrp="1"/>
+          </p:cNvSpPr>
+          <p:nvPr>
+            <p:ph type="dt" idx="11"/>
+          </p:nvPr>
+        </p:nvSpPr>
+        <p:spPr/>
+        <p:txBody>
+          <a:bodyPr/>
+          <a:lstStyle/>
+          <a:p>
+            <a:pPr defTabSz="471145">
+              <a:defRPr/>
+            </a:pPr>
+            <a:fld id="{A596092B-28C7-44D1-B902-5437B333DFB7}" type="datetime1">
+              <a:rPr lang="en-US">
+                <a:solidFill>
+                  <a:prstClr val="black"/>
+                </a:solidFill>
+                <a:latin typeface="Calibri" panose="020F0502020204030204"/>
+              </a:rPr>
+              <a:pPr defTabSz="471145">
+                <a:defRPr/>
+              </a:pPr>
+              <a:t>5/18/2026</a:t>
             </a:fld>
-            <a:endParaRPr lang="en-US" dirty="0"/>
+            <a:endParaRPr lang="en-US" dirty="0">
+              <a:solidFill>
+                <a:prstClr val="black"/>
+              </a:solidFill>
+              <a:latin typeface="Calibri" panose="020F0502020204030204"/>
+            </a:endParaRPr>
+          </a:p>
+        </p:txBody>
+      </p:sp>
+      <p:sp>
+        <p:nvSpPr>
+          <p:cNvPr id="6" name="Footer Placeholder 5"/>
+          <p:cNvSpPr>
+            <a:spLocks noGrp="1"/>
+          </p:cNvSpPr>
+          <p:nvPr>
+            <p:ph type="ftr" sz="quarter" idx="12"/>
+          </p:nvPr>
+        </p:nvSpPr>
+        <p:spPr/>
+        <p:txBody>
+          <a:bodyPr/>
+          <a:lstStyle/>
+          <a:p>
+            <a:pPr defTabSz="471145">
+              <a:defRPr/>
+            </a:pPr>
+            <a:r>
+              <a:rPr lang="en-US" dirty="0">
+                <a:solidFill>
+                  <a:prstClr val="black"/>
+                </a:solidFill>
+                <a:latin typeface="Calibri" panose="020F0502020204030204"/>
+              </a:rPr>
+              <a:t>raysmith@alum.mit.edu</a:t>
+            </a:r>
+          </a:p>
+        </p:txBody>
+      </p:sp>
+      <p:sp>
+        <p:nvSpPr>
+          <p:cNvPr id="7" name="Slide Number Placeholder 6"/>
+          <p:cNvSpPr>
+            <a:spLocks noGrp="1"/>
+          </p:cNvSpPr>
+          <p:nvPr>
+            <p:ph type="sldNum" sz="quarter" idx="13"/>
+          </p:nvPr>
+        </p:nvSpPr>
+        <p:spPr/>
+        <p:txBody>
+          <a:bodyPr/>
+          <a:lstStyle/>
+          <a:p>
+            <a:pPr defTabSz="471145">
+              <a:defRPr/>
+            </a:pPr>
+            <a:fld id="{BA791329-992B-4F83-8435-C33B0EC26DB3}" type="slidenum">
+              <a:rPr lang="en-US">
+                <a:solidFill>
+                  <a:prstClr val="black"/>
+                </a:solidFill>
+                <a:latin typeface="Calibri" panose="020F0502020204030204"/>
+              </a:rPr>
+              <a:pPr defTabSz="471145">
+                <a:defRPr/>
+              </a:pPr>
+              <a:t>18</a:t>
+            </a:fld>
+            <a:endParaRPr lang="en-US" dirty="0">
+              <a:solidFill>
+                <a:prstClr val="black"/>
+              </a:solidFill>
+              <a:latin typeface="Calibri" panose="020F0502020204030204"/>
+            </a:endParaRPr>
           </a:p>
         </p:txBody>
       </p:sp>
     </p:spTree>
     <p:extLst>
       <p:ext uri="{BB962C8B-B14F-4D97-AF65-F5344CB8AC3E}">
-        <p14:creationId xmlns:p14="http://schemas.microsoft.com/office/powerpoint/2010/main" val="541454828"/>
+        <p14:creationId xmlns:p14="http://schemas.microsoft.com/office/powerpoint/2010/main" val="3273144501"/>
       </p:ext>
     </p:extLst>
   </p:cSld>
@@ -1029,6 +1028,219 @@
           </p:nvPr>
         </p:nvSpPr>
         <p:spPr/>
+        <p:txBody>
+          <a:bodyPr/>
+          <a:lstStyle/>
+          <a:p>
+            <a:endParaRPr lang="en-US" dirty="0"/>
+          </a:p>
+        </p:txBody>
+      </p:sp>
+      <p:sp>
+        <p:nvSpPr>
+          <p:cNvPr id="3" name="Notes Placeholder 2"/>
+          <p:cNvSpPr>
+            <a:spLocks noGrp="1"/>
+          </p:cNvSpPr>
+          <p:nvPr>
+            <p:ph type="body" idx="1"/>
+          </p:nvPr>
+        </p:nvSpPr>
+        <p:spPr/>
+        <p:txBody>
+          <a:bodyPr/>
+          <a:lstStyle/>
+          <a:p>
+            <a:endParaRPr lang="en-US" dirty="0"/>
+          </a:p>
+        </p:txBody>
+      </p:sp>
+      <p:sp>
+        <p:nvSpPr>
+          <p:cNvPr id="4" name="Header Placeholder 3"/>
+          <p:cNvSpPr>
+            <a:spLocks noGrp="1"/>
+          </p:cNvSpPr>
+          <p:nvPr>
+            <p:ph type="hdr" sz="quarter" idx="10"/>
+          </p:nvPr>
+        </p:nvSpPr>
+        <p:spPr/>
+        <p:txBody>
+          <a:bodyPr/>
+          <a:lstStyle/>
+          <a:p>
+            <a:pPr defTabSz="471145">
+              <a:defRPr/>
+            </a:pPr>
+            <a:r>
+              <a:rPr lang="en-US" dirty="0">
+                <a:solidFill>
+                  <a:prstClr val="black"/>
+                </a:solidFill>
+                <a:latin typeface="Calibri" panose="020F0502020204030204"/>
+              </a:rPr>
+              <a:t>Introduction to Programming using Python</a:t>
+            </a:r>
+          </a:p>
+        </p:txBody>
+      </p:sp>
+      <p:sp>
+        <p:nvSpPr>
+          <p:cNvPr id="5" name="Date Placeholder 4"/>
+          <p:cNvSpPr>
+            <a:spLocks noGrp="1"/>
+          </p:cNvSpPr>
+          <p:nvPr>
+            <p:ph type="dt" idx="11"/>
+          </p:nvPr>
+        </p:nvSpPr>
+        <p:spPr/>
+        <p:txBody>
+          <a:bodyPr/>
+          <a:lstStyle/>
+          <a:p>
+            <a:pPr defTabSz="471145">
+              <a:defRPr/>
+            </a:pPr>
+            <a:fld id="{A596092B-28C7-44D1-B902-5437B333DFB7}" type="datetime1">
+              <a:rPr lang="en-US">
+                <a:solidFill>
+                  <a:prstClr val="black"/>
+                </a:solidFill>
+                <a:latin typeface="Calibri" panose="020F0502020204030204"/>
+              </a:rPr>
+              <a:pPr defTabSz="471145">
+                <a:defRPr/>
+              </a:pPr>
+              <a:t>5/18/2026</a:t>
+            </a:fld>
+            <a:endParaRPr lang="en-US" dirty="0">
+              <a:solidFill>
+                <a:prstClr val="black"/>
+              </a:solidFill>
+              <a:latin typeface="Calibri" panose="020F0502020204030204"/>
+            </a:endParaRPr>
+          </a:p>
+        </p:txBody>
+      </p:sp>
+      <p:sp>
+        <p:nvSpPr>
+          <p:cNvPr id="6" name="Footer Placeholder 5"/>
+          <p:cNvSpPr>
+            <a:spLocks noGrp="1"/>
+          </p:cNvSpPr>
+          <p:nvPr>
+            <p:ph type="ftr" sz="quarter" idx="12"/>
+          </p:nvPr>
+        </p:nvSpPr>
+        <p:spPr/>
+        <p:txBody>
+          <a:bodyPr/>
+          <a:lstStyle/>
+          <a:p>
+            <a:pPr defTabSz="471145">
+              <a:defRPr/>
+            </a:pPr>
+            <a:r>
+              <a:rPr lang="en-US" dirty="0">
+                <a:solidFill>
+                  <a:prstClr val="black"/>
+                </a:solidFill>
+                <a:latin typeface="Calibri" panose="020F0502020204030204"/>
+              </a:rPr>
+              <a:t>raysmith@alum.mit.edu</a:t>
+            </a:r>
+          </a:p>
+        </p:txBody>
+      </p:sp>
+      <p:sp>
+        <p:nvSpPr>
+          <p:cNvPr id="7" name="Slide Number Placeholder 6"/>
+          <p:cNvSpPr>
+            <a:spLocks noGrp="1"/>
+          </p:cNvSpPr>
+          <p:nvPr>
+            <p:ph type="sldNum" sz="quarter" idx="13"/>
+          </p:nvPr>
+        </p:nvSpPr>
+        <p:spPr/>
+        <p:txBody>
+          <a:bodyPr/>
+          <a:lstStyle/>
+          <a:p>
+            <a:pPr defTabSz="471145">
+              <a:defRPr/>
+            </a:pPr>
+            <a:fld id="{BA791329-992B-4F83-8435-C33B0EC26DB3}" type="slidenum">
+              <a:rPr lang="en-US">
+                <a:solidFill>
+                  <a:prstClr val="black"/>
+                </a:solidFill>
+                <a:latin typeface="Calibri" panose="020F0502020204030204"/>
+              </a:rPr>
+              <a:pPr defTabSz="471145">
+                <a:defRPr/>
+              </a:pPr>
+              <a:t>19</a:t>
+            </a:fld>
+            <a:endParaRPr lang="en-US" dirty="0">
+              <a:solidFill>
+                <a:prstClr val="black"/>
+              </a:solidFill>
+              <a:latin typeface="Calibri" panose="020F0502020204030204"/>
+            </a:endParaRPr>
+          </a:p>
+        </p:txBody>
+      </p:sp>
+    </p:spTree>
+    <p:extLst>
+      <p:ext uri="{BB962C8B-B14F-4D97-AF65-F5344CB8AC3E}">
+        <p14:creationId xmlns:p14="http://schemas.microsoft.com/office/powerpoint/2010/main" val="4190077128"/>
+      </p:ext>
+    </p:extLst>
+  </p:cSld>
+  <p:clrMapOvr>
+    <a:masterClrMapping/>
+  </p:clrMapOvr>
+</p:notes>
+</file>
+
+<file path=ppt/notesSlides/notesSlide13.xml><?xml version="1.0" encoding="utf-8"?>
+<p:notes xmlns:a="http://schemas.openxmlformats.org/drawingml/2006/main" xmlns:r="http://schemas.openxmlformats.org/officeDocument/2006/relationships" xmlns:p="http://schemas.openxmlformats.org/presentationml/2006/main">
+  <p:cSld>
+    <p:spTree>
+      <p:nvGrpSpPr>
+        <p:cNvPr id="1" name=""/>
+        <p:cNvGrpSpPr/>
+        <p:nvPr/>
+      </p:nvGrpSpPr>
+      <p:grpSpPr>
+        <a:xfrm>
+          <a:off x="0" y="0"/>
+          <a:ext cx="0" cy="0"/>
+          <a:chOff x="0" y="0"/>
+          <a:chExt cx="0" cy="0"/>
+        </a:xfrm>
+      </p:grpSpPr>
+      <p:sp>
+        <p:nvSpPr>
+          <p:cNvPr id="2" name="Slide Image Placeholder 1"/>
+          <p:cNvSpPr>
+            <a:spLocks noGrp="1" noRot="1" noChangeAspect="1"/>
+          </p:cNvSpPr>
+          <p:nvPr>
+            <p:ph type="sldImg"/>
+          </p:nvPr>
+        </p:nvSpPr>
+        <p:spPr/>
+        <p:txBody>
+          <a:bodyPr/>
+          <a:lstStyle/>
+          <a:p>
+            <a:endParaRPr lang="en-US" dirty="0"/>
+          </a:p>
+        </p:txBody>
       </p:sp>
       <p:sp>
         <p:nvSpPr>
@@ -1088,7 +1300,7 @@
           <a:p>
             <a:fld id="{A596092B-28C7-44D1-B902-5437B333DFB7}" type="datetime1">
               <a:rPr lang="en-US" smtClean="0"/>
-              <a:t>4/16/2024</a:t>
+              <a:t>5/18/2026</a:t>
             </a:fld>
             <a:endParaRPr lang="en-US" dirty="0"/>
           </a:p>
@@ -1133,7 +1345,7 @@
           <a:p>
             <a:fld id="{BA791329-992B-4F83-8435-C33B0EC26DB3}" type="slidenum">
               <a:rPr lang="en-US" smtClean="0"/>
-              <a:t>21</a:t>
+              <a:t>25</a:t>
             </a:fld>
             <a:endParaRPr lang="en-US" dirty="0"/>
           </a:p>
@@ -1180,6 +1392,13 @@
           </p:nvPr>
         </p:nvSpPr>
         <p:spPr/>
+        <p:txBody>
+          <a:bodyPr/>
+          <a:lstStyle/>
+          <a:p>
+            <a:endParaRPr lang="en-US" dirty="0"/>
+          </a:p>
+        </p:txBody>
       </p:sp>
       <p:sp>
         <p:nvSpPr>
@@ -1215,37 +1434,15 @@
           <a:bodyPr/>
           <a:lstStyle/>
           <a:p>
-            <a:pPr marL="0" marR="0" lvl="0" indent="0" algn="l" defTabSz="457200" rtl="0" eaLnBrk="1" fontAlgn="auto" latinLnBrk="0" hangingPunct="1">
-              <a:lnSpc>
-                <a:spcPct val="100000"/>
-              </a:lnSpc>
-              <a:spcBef>
-                <a:spcPts val="0"/>
-              </a:spcBef>
-              <a:spcAft>
-                <a:spcPts val="0"/>
-              </a:spcAft>
-              <a:buClrTx/>
-              <a:buSzTx/>
-              <a:buFontTx/>
-              <a:buNone/>
-              <a:tabLst/>
+            <a:pPr defTabSz="471145">
               <a:defRPr/>
             </a:pPr>
             <a:r>
-              <a:rPr kumimoji="0" lang="en-US" sz="1200" b="0" i="0" u="none" strike="noStrike" kern="1200" cap="none" spc="0" normalizeH="0" baseline="0" noProof="0" dirty="0">
-                <a:ln>
-                  <a:noFill/>
-                </a:ln>
+              <a:rPr lang="en-US" dirty="0">
                 <a:solidFill>
                   <a:prstClr val="black"/>
                 </a:solidFill>
-                <a:effectLst/>
-                <a:uLnTx/>
-                <a:uFillTx/>
                 <a:latin typeface="Calibri" panose="020F0502020204030204"/>
-                <a:ea typeface="+mn-ea"/>
-                <a:cs typeface="+mn-cs"/>
               </a:rPr>
               <a:t>Introduction to Programming using Python</a:t>
             </a:r>
@@ -1267,70 +1464,26 @@
           <a:bodyPr/>
           <a:lstStyle/>
           <a:p>
-            <a:pPr marL="0" marR="0" lvl="0" indent="0" algn="r" defTabSz="457200" rtl="0" eaLnBrk="1" fontAlgn="auto" latinLnBrk="0" hangingPunct="1">
-              <a:lnSpc>
-                <a:spcPct val="100000"/>
-              </a:lnSpc>
-              <a:spcBef>
-                <a:spcPts val="0"/>
-              </a:spcBef>
-              <a:spcAft>
-                <a:spcPts val="0"/>
-              </a:spcAft>
-              <a:buClrTx/>
-              <a:buSzTx/>
-              <a:buFontTx/>
-              <a:buNone/>
-              <a:tabLst/>
+            <a:pPr defTabSz="471145">
               <a:defRPr/>
             </a:pPr>
             <a:fld id="{A596092B-28C7-44D1-B902-5437B333DFB7}" type="datetime1">
-              <a:rPr kumimoji="0" lang="en-US" sz="1200" b="0" i="0" u="none" strike="noStrike" kern="1200" cap="none" spc="0" normalizeH="0" baseline="0" noProof="0" smtClean="0">
-                <a:ln>
-                  <a:noFill/>
-                </a:ln>
+              <a:rPr lang="en-US">
                 <a:solidFill>
                   <a:prstClr val="black"/>
                 </a:solidFill>
-                <a:effectLst/>
-                <a:uLnTx/>
-                <a:uFillTx/>
                 <a:latin typeface="Calibri" panose="020F0502020204030204"/>
-                <a:ea typeface="+mn-ea"/>
-                <a:cs typeface="+mn-cs"/>
               </a:rPr>
-              <a:pPr marL="0" marR="0" lvl="0" indent="0" algn="r" defTabSz="457200" rtl="0" eaLnBrk="1" fontAlgn="auto" latinLnBrk="0" hangingPunct="1">
-                <a:lnSpc>
-                  <a:spcPct val="100000"/>
-                </a:lnSpc>
-                <a:spcBef>
-                  <a:spcPts val="0"/>
-                </a:spcBef>
-                <a:spcAft>
-                  <a:spcPts val="0"/>
-                </a:spcAft>
-                <a:buClrTx/>
-                <a:buSzTx/>
-                <a:buFontTx/>
-                <a:buNone/>
-                <a:tabLst/>
+              <a:pPr defTabSz="471145">
                 <a:defRPr/>
               </a:pPr>
-              <a:t>4/16/2024</a:t>
+              <a:t>5/18/2026</a:t>
             </a:fld>
-            <a:endParaRPr kumimoji="0" lang="en-US" sz="1200" b="0" i="0" u="none" strike="noStrike" kern="1200" cap="none" spc="0" normalizeH="0" baseline="0" noProof="0" dirty="0">
-              <a:ln>
-                <a:noFill/>
-              </a:ln>
+            <a:endParaRPr lang="en-US" dirty="0">
               <a:solidFill>
                 <a:prstClr val="black"/>
               </a:solidFill>
-              <a:effectLst/>
-              <a:uLnTx/>
-              <a:uFillTx/>
               <a:latin typeface="Calibri" panose="020F0502020204030204"/>
-              <a:ea typeface="+mn-ea"/>
-              <a:cs typeface="+mn-cs"/>
             </a:endParaRPr>
           </a:p>
         </p:txBody>
@@ -1350,37 +1503,15 @@
           <a:bodyPr/>
           <a:lstStyle/>
           <a:p>
-            <a:pPr marL="0" marR="0" lvl="0" indent="0" algn="l" defTabSz="457200" rtl="0" eaLnBrk="1" fontAlgn="auto" latinLnBrk="0" hangingPunct="1">
-              <a:lnSpc>
-                <a:spcPct val="100000"/>
-              </a:lnSpc>
-              <a:spcBef>
-                <a:spcPts val="0"/>
-              </a:spcBef>
-              <a:spcAft>
-                <a:spcPts val="0"/>
-              </a:spcAft>
-              <a:buClrTx/>
-              <a:buSzTx/>
-              <a:buFontTx/>
-              <a:buNone/>
-              <a:tabLst/>
+            <a:pPr defTabSz="471145">
               <a:defRPr/>
             </a:pPr>
             <a:r>
-              <a:rPr kumimoji="0" lang="en-US" sz="1200" b="0" i="0" u="none" strike="noStrike" kern="1200" cap="none" spc="0" normalizeH="0" baseline="0" noProof="0" dirty="0">
-                <a:ln>
-                  <a:noFill/>
-                </a:ln>
+              <a:rPr lang="en-US" dirty="0">
                 <a:solidFill>
                   <a:prstClr val="black"/>
                 </a:solidFill>
-                <a:effectLst/>
-                <a:uLnTx/>
-                <a:uFillTx/>
                 <a:latin typeface="Calibri" panose="020F0502020204030204"/>
-                <a:ea typeface="+mn-ea"/>
-                <a:cs typeface="+mn-cs"/>
               </a:rPr>
               <a:t>raysmith@alum.mit.edu</a:t>
             </a:r>
@@ -1402,70 +1533,26 @@
           <a:bodyPr/>
           <a:lstStyle/>
           <a:p>
-            <a:pPr marL="0" marR="0" lvl="0" indent="0" algn="r" defTabSz="457200" rtl="0" eaLnBrk="1" fontAlgn="auto" latinLnBrk="0" hangingPunct="1">
-              <a:lnSpc>
-                <a:spcPct val="100000"/>
-              </a:lnSpc>
-              <a:spcBef>
-                <a:spcPts val="0"/>
-              </a:spcBef>
-              <a:spcAft>
-                <a:spcPts val="0"/>
-              </a:spcAft>
-              <a:buClrTx/>
-              <a:buSzTx/>
-              <a:buFontTx/>
-              <a:buNone/>
-              <a:tabLst/>
+            <a:pPr defTabSz="471145">
               <a:defRPr/>
             </a:pPr>
             <a:fld id="{BA791329-992B-4F83-8435-C33B0EC26DB3}" type="slidenum">
-              <a:rPr kumimoji="0" lang="en-US" sz="1200" b="0" i="0" u="none" strike="noStrike" kern="1200" cap="none" spc="0" normalizeH="0" baseline="0" noProof="0" smtClean="0">
-                <a:ln>
-                  <a:noFill/>
-                </a:ln>
+              <a:rPr lang="en-US">
                 <a:solidFill>
                   <a:prstClr val="black"/>
                 </a:solidFill>
-                <a:effectLst/>
-                <a:uLnTx/>
-                <a:uFillTx/>
                 <a:latin typeface="Calibri" panose="020F0502020204030204"/>
-                <a:ea typeface="+mn-ea"/>
-                <a:cs typeface="+mn-cs"/>
               </a:rPr>
-              <a:pPr marL="0" marR="0" lvl="0" indent="0" algn="r" defTabSz="457200" rtl="0" eaLnBrk="1" fontAlgn="auto" latinLnBrk="0" hangingPunct="1">
-                <a:lnSpc>
-                  <a:spcPct val="100000"/>
-                </a:lnSpc>
-                <a:spcBef>
-                  <a:spcPts val="0"/>
-                </a:spcBef>
-                <a:spcAft>
-                  <a:spcPts val="0"/>
-                </a:spcAft>
-                <a:buClrTx/>
-                <a:buSzTx/>
-                <a:buFontTx/>
-                <a:buNone/>
-                <a:tabLst/>
+              <a:pPr defTabSz="471145">
                 <a:defRPr/>
               </a:pPr>
               <a:t>2</a:t>
             </a:fld>
-            <a:endParaRPr kumimoji="0" lang="en-US" sz="1200" b="0" i="0" u="none" strike="noStrike" kern="1200" cap="none" spc="0" normalizeH="0" baseline="0" noProof="0" dirty="0">
-              <a:ln>
-                <a:noFill/>
-              </a:ln>
+            <a:endParaRPr lang="en-US" dirty="0">
               <a:solidFill>
                 <a:prstClr val="black"/>
               </a:solidFill>
-              <a:effectLst/>
-              <a:uLnTx/>
-              <a:uFillTx/>
               <a:latin typeface="Calibri" panose="020F0502020204030204"/>
-              <a:ea typeface="+mn-ea"/>
-              <a:cs typeface="+mn-cs"/>
             </a:endParaRPr>
           </a:p>
         </p:txBody>
@@ -1511,6 +1598,13 @@
           </p:nvPr>
         </p:nvSpPr>
         <p:spPr/>
+        <p:txBody>
+          <a:bodyPr/>
+          <a:lstStyle/>
+          <a:p>
+            <a:endParaRPr lang="en-US" dirty="0"/>
+          </a:p>
+        </p:txBody>
       </p:sp>
       <p:sp>
         <p:nvSpPr>
@@ -1546,37 +1640,15 @@
           <a:bodyPr/>
           <a:lstStyle/>
           <a:p>
-            <a:pPr marL="0" marR="0" lvl="0" indent="0" algn="l" defTabSz="457200" rtl="0" eaLnBrk="1" fontAlgn="auto" latinLnBrk="0" hangingPunct="1">
-              <a:lnSpc>
-                <a:spcPct val="100000"/>
-              </a:lnSpc>
-              <a:spcBef>
-                <a:spcPts val="0"/>
-              </a:spcBef>
-              <a:spcAft>
-                <a:spcPts val="0"/>
-              </a:spcAft>
-              <a:buClrTx/>
-              <a:buSzTx/>
-              <a:buFontTx/>
-              <a:buNone/>
-              <a:tabLst/>
+            <a:pPr defTabSz="471145">
               <a:defRPr/>
             </a:pPr>
             <a:r>
-              <a:rPr kumimoji="0" lang="en-US" sz="1200" b="0" i="0" u="none" strike="noStrike" kern="1200" cap="none" spc="0" normalizeH="0" baseline="0" noProof="0" dirty="0">
-                <a:ln>
-                  <a:noFill/>
-                </a:ln>
+              <a:rPr lang="en-US" dirty="0">
                 <a:solidFill>
                   <a:prstClr val="black"/>
                 </a:solidFill>
-                <a:effectLst/>
-                <a:uLnTx/>
-                <a:uFillTx/>
                 <a:latin typeface="Calibri" panose="020F0502020204030204"/>
-                <a:ea typeface="+mn-ea"/>
-                <a:cs typeface="+mn-cs"/>
               </a:rPr>
               <a:t>Introduction to Programming using Python</a:t>
             </a:r>
@@ -1598,70 +1670,26 @@
           <a:bodyPr/>
           <a:lstStyle/>
           <a:p>
-            <a:pPr marL="0" marR="0" lvl="0" indent="0" algn="r" defTabSz="457200" rtl="0" eaLnBrk="1" fontAlgn="auto" latinLnBrk="0" hangingPunct="1">
-              <a:lnSpc>
-                <a:spcPct val="100000"/>
-              </a:lnSpc>
-              <a:spcBef>
-                <a:spcPts val="0"/>
-              </a:spcBef>
-              <a:spcAft>
-                <a:spcPts val="0"/>
-              </a:spcAft>
-              <a:buClrTx/>
-              <a:buSzTx/>
-              <a:buFontTx/>
-              <a:buNone/>
-              <a:tabLst/>
+            <a:pPr defTabSz="471145">
               <a:defRPr/>
             </a:pPr>
             <a:fld id="{A596092B-28C7-44D1-B902-5437B333DFB7}" type="datetime1">
-              <a:rPr kumimoji="0" lang="en-US" sz="1200" b="0" i="0" u="none" strike="noStrike" kern="1200" cap="none" spc="0" normalizeH="0" baseline="0" noProof="0" smtClean="0">
-                <a:ln>
-                  <a:noFill/>
-                </a:ln>
+              <a:rPr lang="en-US">
                 <a:solidFill>
                   <a:prstClr val="black"/>
                 </a:solidFill>
-                <a:effectLst/>
-                <a:uLnTx/>
-                <a:uFillTx/>
                 <a:latin typeface="Calibri" panose="020F0502020204030204"/>
-                <a:ea typeface="+mn-ea"/>
-                <a:cs typeface="+mn-cs"/>
               </a:rPr>
-              <a:pPr marL="0" marR="0" lvl="0" indent="0" algn="r" defTabSz="457200" rtl="0" eaLnBrk="1" fontAlgn="auto" latinLnBrk="0" hangingPunct="1">
-                <a:lnSpc>
-                  <a:spcPct val="100000"/>
-                </a:lnSpc>
-                <a:spcBef>
-                  <a:spcPts val="0"/>
-                </a:spcBef>
-                <a:spcAft>
-                  <a:spcPts val="0"/>
-                </a:spcAft>
-                <a:buClrTx/>
-                <a:buSzTx/>
-                <a:buFontTx/>
-                <a:buNone/>
-                <a:tabLst/>
+              <a:pPr defTabSz="471145">
                 <a:defRPr/>
               </a:pPr>
-              <a:t>4/16/2024</a:t>
+              <a:t>5/18/2026</a:t>
             </a:fld>
-            <a:endParaRPr kumimoji="0" lang="en-US" sz="1200" b="0" i="0" u="none" strike="noStrike" kern="1200" cap="none" spc="0" normalizeH="0" baseline="0" noProof="0" dirty="0">
-              <a:ln>
-                <a:noFill/>
-              </a:ln>
+            <a:endParaRPr lang="en-US" dirty="0">
               <a:solidFill>
                 <a:prstClr val="black"/>
               </a:solidFill>
-              <a:effectLst/>
-              <a:uLnTx/>
-              <a:uFillTx/>
               <a:latin typeface="Calibri" panose="020F0502020204030204"/>
-              <a:ea typeface="+mn-ea"/>
-              <a:cs typeface="+mn-cs"/>
             </a:endParaRPr>
           </a:p>
         </p:txBody>
@@ -1681,37 +1709,15 @@
           <a:bodyPr/>
           <a:lstStyle/>
           <a:p>
-            <a:pPr marL="0" marR="0" lvl="0" indent="0" algn="l" defTabSz="457200" rtl="0" eaLnBrk="1" fontAlgn="auto" latinLnBrk="0" hangingPunct="1">
-              <a:lnSpc>
-                <a:spcPct val="100000"/>
-              </a:lnSpc>
-              <a:spcBef>
-                <a:spcPts val="0"/>
-              </a:spcBef>
-              <a:spcAft>
-                <a:spcPts val="0"/>
-              </a:spcAft>
-              <a:buClrTx/>
-              <a:buSzTx/>
-              <a:buFontTx/>
-              <a:buNone/>
-              <a:tabLst/>
+            <a:pPr defTabSz="471145">
               <a:defRPr/>
             </a:pPr>
             <a:r>
-              <a:rPr kumimoji="0" lang="en-US" sz="1200" b="0" i="0" u="none" strike="noStrike" kern="1200" cap="none" spc="0" normalizeH="0" baseline="0" noProof="0" dirty="0">
-                <a:ln>
-                  <a:noFill/>
-                </a:ln>
+              <a:rPr lang="en-US" dirty="0">
                 <a:solidFill>
                   <a:prstClr val="black"/>
                 </a:solidFill>
-                <a:effectLst/>
-                <a:uLnTx/>
-                <a:uFillTx/>
                 <a:latin typeface="Calibri" panose="020F0502020204030204"/>
-                <a:ea typeface="+mn-ea"/>
-                <a:cs typeface="+mn-cs"/>
               </a:rPr>
               <a:t>raysmith@alum.mit.edu</a:t>
             </a:r>
@@ -1733,70 +1739,26 @@
           <a:bodyPr/>
           <a:lstStyle/>
           <a:p>
-            <a:pPr marL="0" marR="0" lvl="0" indent="0" algn="r" defTabSz="457200" rtl="0" eaLnBrk="1" fontAlgn="auto" latinLnBrk="0" hangingPunct="1">
-              <a:lnSpc>
-                <a:spcPct val="100000"/>
-              </a:lnSpc>
-              <a:spcBef>
-                <a:spcPts val="0"/>
-              </a:spcBef>
-              <a:spcAft>
-                <a:spcPts val="0"/>
-              </a:spcAft>
-              <a:buClrTx/>
-              <a:buSzTx/>
-              <a:buFontTx/>
-              <a:buNone/>
-              <a:tabLst/>
+            <a:pPr defTabSz="471145">
               <a:defRPr/>
             </a:pPr>
             <a:fld id="{BA791329-992B-4F83-8435-C33B0EC26DB3}" type="slidenum">
-              <a:rPr kumimoji="0" lang="en-US" sz="1200" b="0" i="0" u="none" strike="noStrike" kern="1200" cap="none" spc="0" normalizeH="0" baseline="0" noProof="0" smtClean="0">
-                <a:ln>
-                  <a:noFill/>
-                </a:ln>
+              <a:rPr lang="en-US">
                 <a:solidFill>
                   <a:prstClr val="black"/>
                 </a:solidFill>
-                <a:effectLst/>
-                <a:uLnTx/>
-                <a:uFillTx/>
                 <a:latin typeface="Calibri" panose="020F0502020204030204"/>
-                <a:ea typeface="+mn-ea"/>
-                <a:cs typeface="+mn-cs"/>
               </a:rPr>
-              <a:pPr marL="0" marR="0" lvl="0" indent="0" algn="r" defTabSz="457200" rtl="0" eaLnBrk="1" fontAlgn="auto" latinLnBrk="0" hangingPunct="1">
-                <a:lnSpc>
-                  <a:spcPct val="100000"/>
-                </a:lnSpc>
-                <a:spcBef>
-                  <a:spcPts val="0"/>
-                </a:spcBef>
-                <a:spcAft>
-                  <a:spcPts val="0"/>
-                </a:spcAft>
-                <a:buClrTx/>
-                <a:buSzTx/>
-                <a:buFontTx/>
-                <a:buNone/>
-                <a:tabLst/>
+              <a:pPr defTabSz="471145">
                 <a:defRPr/>
               </a:pPr>
               <a:t>3</a:t>
             </a:fld>
-            <a:endParaRPr kumimoji="0" lang="en-US" sz="1200" b="0" i="0" u="none" strike="noStrike" kern="1200" cap="none" spc="0" normalizeH="0" baseline="0" noProof="0" dirty="0">
-              <a:ln>
-                <a:noFill/>
-              </a:ln>
+            <a:endParaRPr lang="en-US" dirty="0">
               <a:solidFill>
                 <a:prstClr val="black"/>
               </a:solidFill>
-              <a:effectLst/>
-              <a:uLnTx/>
-              <a:uFillTx/>
               <a:latin typeface="Calibri" panose="020F0502020204030204"/>
-              <a:ea typeface="+mn-ea"/>
-              <a:cs typeface="+mn-cs"/>
             </a:endParaRPr>
           </a:p>
         </p:txBody>
@@ -1842,6 +1804,13 @@
           </p:nvPr>
         </p:nvSpPr>
         <p:spPr/>
+        <p:txBody>
+          <a:bodyPr/>
+          <a:lstStyle/>
+          <a:p>
+            <a:endParaRPr lang="en-US" dirty="0"/>
+          </a:p>
+        </p:txBody>
       </p:sp>
       <p:sp>
         <p:nvSpPr>
@@ -1877,37 +1846,15 @@
           <a:bodyPr/>
           <a:lstStyle/>
           <a:p>
-            <a:pPr marL="0" marR="0" lvl="0" indent="0" algn="l" defTabSz="457200" rtl="0" eaLnBrk="1" fontAlgn="auto" latinLnBrk="0" hangingPunct="1">
-              <a:lnSpc>
-                <a:spcPct val="100000"/>
-              </a:lnSpc>
-              <a:spcBef>
-                <a:spcPts val="0"/>
-              </a:spcBef>
-              <a:spcAft>
-                <a:spcPts val="0"/>
-              </a:spcAft>
-              <a:buClrTx/>
-              <a:buSzTx/>
-              <a:buFontTx/>
-              <a:buNone/>
-              <a:tabLst/>
+            <a:pPr defTabSz="471145">
               <a:defRPr/>
             </a:pPr>
             <a:r>
-              <a:rPr kumimoji="0" lang="en-US" sz="1200" b="0" i="0" u="none" strike="noStrike" kern="1200" cap="none" spc="0" normalizeH="0" baseline="0" noProof="0" dirty="0">
-                <a:ln>
-                  <a:noFill/>
-                </a:ln>
+              <a:rPr lang="en-US" dirty="0">
                 <a:solidFill>
                   <a:prstClr val="black"/>
                 </a:solidFill>
-                <a:effectLst/>
-                <a:uLnTx/>
-                <a:uFillTx/>
                 <a:latin typeface="Calibri" panose="020F0502020204030204"/>
-                <a:ea typeface="+mn-ea"/>
-                <a:cs typeface="+mn-cs"/>
               </a:rPr>
               <a:t>Introduction to Programming using Python</a:t>
             </a:r>
@@ -1929,70 +1876,26 @@
           <a:bodyPr/>
           <a:lstStyle/>
           <a:p>
-            <a:pPr marL="0" marR="0" lvl="0" indent="0" algn="r" defTabSz="457200" rtl="0" eaLnBrk="1" fontAlgn="auto" latinLnBrk="0" hangingPunct="1">
-              <a:lnSpc>
-                <a:spcPct val="100000"/>
-              </a:lnSpc>
-              <a:spcBef>
-                <a:spcPts val="0"/>
-              </a:spcBef>
-              <a:spcAft>
-                <a:spcPts val="0"/>
-              </a:spcAft>
-              <a:buClrTx/>
-              <a:buSzTx/>
-              <a:buFontTx/>
-              <a:buNone/>
-              <a:tabLst/>
+            <a:pPr defTabSz="471145">
               <a:defRPr/>
             </a:pPr>
             <a:fld id="{A596092B-28C7-44D1-B902-5437B333DFB7}" type="datetime1">
-              <a:rPr kumimoji="0" lang="en-US" sz="1200" b="0" i="0" u="none" strike="noStrike" kern="1200" cap="none" spc="0" normalizeH="0" baseline="0" noProof="0" smtClean="0">
-                <a:ln>
-                  <a:noFill/>
-                </a:ln>
+              <a:rPr lang="en-US">
                 <a:solidFill>
                   <a:prstClr val="black"/>
                 </a:solidFill>
-                <a:effectLst/>
-                <a:uLnTx/>
-                <a:uFillTx/>
                 <a:latin typeface="Calibri" panose="020F0502020204030204"/>
-                <a:ea typeface="+mn-ea"/>
-                <a:cs typeface="+mn-cs"/>
               </a:rPr>
-              <a:pPr marL="0" marR="0" lvl="0" indent="0" algn="r" defTabSz="457200" rtl="0" eaLnBrk="1" fontAlgn="auto" latinLnBrk="0" hangingPunct="1">
-                <a:lnSpc>
-                  <a:spcPct val="100000"/>
-                </a:lnSpc>
-                <a:spcBef>
-                  <a:spcPts val="0"/>
-                </a:spcBef>
-                <a:spcAft>
-                  <a:spcPts val="0"/>
-                </a:spcAft>
-                <a:buClrTx/>
-                <a:buSzTx/>
-                <a:buFontTx/>
-                <a:buNone/>
-                <a:tabLst/>
+              <a:pPr defTabSz="471145">
                 <a:defRPr/>
               </a:pPr>
-              <a:t>4/16/2024</a:t>
+              <a:t>5/18/2026</a:t>
             </a:fld>
-            <a:endParaRPr kumimoji="0" lang="en-US" sz="1200" b="0" i="0" u="none" strike="noStrike" kern="1200" cap="none" spc="0" normalizeH="0" baseline="0" noProof="0" dirty="0">
-              <a:ln>
-                <a:noFill/>
-              </a:ln>
+            <a:endParaRPr lang="en-US" dirty="0">
               <a:solidFill>
                 <a:prstClr val="black"/>
               </a:solidFill>
-              <a:effectLst/>
-              <a:uLnTx/>
-              <a:uFillTx/>
               <a:latin typeface="Calibri" panose="020F0502020204030204"/>
-              <a:ea typeface="+mn-ea"/>
-              <a:cs typeface="+mn-cs"/>
             </a:endParaRPr>
           </a:p>
         </p:txBody>
@@ -2012,37 +1915,15 @@
           <a:bodyPr/>
           <a:lstStyle/>
           <a:p>
-            <a:pPr marL="0" marR="0" lvl="0" indent="0" algn="l" defTabSz="457200" rtl="0" eaLnBrk="1" fontAlgn="auto" latinLnBrk="0" hangingPunct="1">
-              <a:lnSpc>
-                <a:spcPct val="100000"/>
-              </a:lnSpc>
-              <a:spcBef>
-                <a:spcPts val="0"/>
-              </a:spcBef>
-              <a:spcAft>
-                <a:spcPts val="0"/>
-              </a:spcAft>
-              <a:buClrTx/>
-              <a:buSzTx/>
-              <a:buFontTx/>
-              <a:buNone/>
-              <a:tabLst/>
+            <a:pPr defTabSz="471145">
               <a:defRPr/>
             </a:pPr>
             <a:r>
-              <a:rPr kumimoji="0" lang="en-US" sz="1200" b="0" i="0" u="none" strike="noStrike" kern="1200" cap="none" spc="0" normalizeH="0" baseline="0" noProof="0" dirty="0">
-                <a:ln>
-                  <a:noFill/>
-                </a:ln>
+              <a:rPr lang="en-US" dirty="0">
                 <a:solidFill>
                   <a:prstClr val="black"/>
                 </a:solidFill>
-                <a:effectLst/>
-                <a:uLnTx/>
-                <a:uFillTx/>
                 <a:latin typeface="Calibri" panose="020F0502020204030204"/>
-                <a:ea typeface="+mn-ea"/>
-                <a:cs typeface="+mn-cs"/>
               </a:rPr>
               <a:t>raysmith@alum.mit.edu</a:t>
             </a:r>
@@ -2064,70 +1945,26 @@
           <a:bodyPr/>
           <a:lstStyle/>
           <a:p>
-            <a:pPr marL="0" marR="0" lvl="0" indent="0" algn="r" defTabSz="457200" rtl="0" eaLnBrk="1" fontAlgn="auto" latinLnBrk="0" hangingPunct="1">
-              <a:lnSpc>
-                <a:spcPct val="100000"/>
-              </a:lnSpc>
-              <a:spcBef>
-                <a:spcPts val="0"/>
-              </a:spcBef>
-              <a:spcAft>
-                <a:spcPts val="0"/>
-              </a:spcAft>
-              <a:buClrTx/>
-              <a:buSzTx/>
-              <a:buFontTx/>
-              <a:buNone/>
-              <a:tabLst/>
+            <a:pPr defTabSz="471145">
               <a:defRPr/>
             </a:pPr>
             <a:fld id="{BA791329-992B-4F83-8435-C33B0EC26DB3}" type="slidenum">
-              <a:rPr kumimoji="0" lang="en-US" sz="1200" b="0" i="0" u="none" strike="noStrike" kern="1200" cap="none" spc="0" normalizeH="0" baseline="0" noProof="0" smtClean="0">
-                <a:ln>
-                  <a:noFill/>
-                </a:ln>
+              <a:rPr lang="en-US">
                 <a:solidFill>
                   <a:prstClr val="black"/>
                 </a:solidFill>
-                <a:effectLst/>
-                <a:uLnTx/>
-                <a:uFillTx/>
                 <a:latin typeface="Calibri" panose="020F0502020204030204"/>
-                <a:ea typeface="+mn-ea"/>
-                <a:cs typeface="+mn-cs"/>
               </a:rPr>
-              <a:pPr marL="0" marR="0" lvl="0" indent="0" algn="r" defTabSz="457200" rtl="0" eaLnBrk="1" fontAlgn="auto" latinLnBrk="0" hangingPunct="1">
-                <a:lnSpc>
-                  <a:spcPct val="100000"/>
-                </a:lnSpc>
-                <a:spcBef>
-                  <a:spcPts val="0"/>
-                </a:spcBef>
-                <a:spcAft>
-                  <a:spcPts val="0"/>
-                </a:spcAft>
-                <a:buClrTx/>
-                <a:buSzTx/>
-                <a:buFontTx/>
-                <a:buNone/>
-                <a:tabLst/>
+              <a:pPr defTabSz="471145">
                 <a:defRPr/>
               </a:pPr>
               <a:t>4</a:t>
             </a:fld>
-            <a:endParaRPr kumimoji="0" lang="en-US" sz="1200" b="0" i="0" u="none" strike="noStrike" kern="1200" cap="none" spc="0" normalizeH="0" baseline="0" noProof="0" dirty="0">
-              <a:ln>
-                <a:noFill/>
-              </a:ln>
+            <a:endParaRPr lang="en-US" dirty="0">
               <a:solidFill>
                 <a:prstClr val="black"/>
               </a:solidFill>
-              <a:effectLst/>
-              <a:uLnTx/>
-              <a:uFillTx/>
               <a:latin typeface="Calibri" panose="020F0502020204030204"/>
-              <a:ea typeface="+mn-ea"/>
-              <a:cs typeface="+mn-cs"/>
             </a:endParaRPr>
           </a:p>
         </p:txBody>
@@ -2135,7 +1972,7 @@
     </p:spTree>
     <p:extLst>
       <p:ext uri="{BB962C8B-B14F-4D97-AF65-F5344CB8AC3E}">
-        <p14:creationId xmlns:p14="http://schemas.microsoft.com/office/powerpoint/2010/main" val="2476741679"/>
+        <p14:creationId xmlns:p14="http://schemas.microsoft.com/office/powerpoint/2010/main" val="4262969112"/>
       </p:ext>
     </p:extLst>
   </p:cSld>
@@ -2173,6 +2010,13 @@
           </p:nvPr>
         </p:nvSpPr>
         <p:spPr/>
+        <p:txBody>
+          <a:bodyPr/>
+          <a:lstStyle/>
+          <a:p>
+            <a:endParaRPr lang="en-US" dirty="0"/>
+          </a:p>
+        </p:txBody>
       </p:sp>
       <p:sp>
         <p:nvSpPr>
@@ -2189,7 +2033,10 @@
           <a:bodyPr/>
           <a:lstStyle/>
           <a:p>
-            <a:endParaRPr lang="en-US" dirty="0"/>
+            <a:r>
+              <a:rPr lang="en-US" dirty="0"/>
+              <a:t>Compromises: Lower resolution, Few colors</a:t>
+            </a:r>
           </a:p>
         </p:txBody>
       </p:sp>
@@ -2208,37 +2055,15 @@
           <a:bodyPr/>
           <a:lstStyle/>
           <a:p>
-            <a:pPr marL="0" marR="0" lvl="0" indent="0" algn="l" defTabSz="457200" rtl="0" eaLnBrk="1" fontAlgn="auto" latinLnBrk="0" hangingPunct="1">
-              <a:lnSpc>
-                <a:spcPct val="100000"/>
-              </a:lnSpc>
-              <a:spcBef>
-                <a:spcPts val="0"/>
-              </a:spcBef>
-              <a:spcAft>
-                <a:spcPts val="0"/>
-              </a:spcAft>
-              <a:buClrTx/>
-              <a:buSzTx/>
-              <a:buFontTx/>
-              <a:buNone/>
-              <a:tabLst/>
+            <a:pPr defTabSz="471145">
               <a:defRPr/>
             </a:pPr>
             <a:r>
-              <a:rPr kumimoji="0" lang="en-US" sz="1200" b="0" i="0" u="none" strike="noStrike" kern="1200" cap="none" spc="0" normalizeH="0" baseline="0" noProof="0" dirty="0">
-                <a:ln>
-                  <a:noFill/>
-                </a:ln>
+              <a:rPr lang="en-US" dirty="0">
                 <a:solidFill>
                   <a:prstClr val="black"/>
                 </a:solidFill>
-                <a:effectLst/>
-                <a:uLnTx/>
-                <a:uFillTx/>
                 <a:latin typeface="Calibri" panose="020F0502020204030204"/>
-                <a:ea typeface="+mn-ea"/>
-                <a:cs typeface="+mn-cs"/>
               </a:rPr>
               <a:t>Introduction to Programming using Python</a:t>
             </a:r>
@@ -2260,70 +2085,26 @@
           <a:bodyPr/>
           <a:lstStyle/>
           <a:p>
-            <a:pPr marL="0" marR="0" lvl="0" indent="0" algn="r" defTabSz="457200" rtl="0" eaLnBrk="1" fontAlgn="auto" latinLnBrk="0" hangingPunct="1">
-              <a:lnSpc>
-                <a:spcPct val="100000"/>
-              </a:lnSpc>
-              <a:spcBef>
-                <a:spcPts val="0"/>
-              </a:spcBef>
-              <a:spcAft>
-                <a:spcPts val="0"/>
-              </a:spcAft>
-              <a:buClrTx/>
-              <a:buSzTx/>
-              <a:buFontTx/>
-              <a:buNone/>
-              <a:tabLst/>
+            <a:pPr defTabSz="471145">
               <a:defRPr/>
             </a:pPr>
             <a:fld id="{A596092B-28C7-44D1-B902-5437B333DFB7}" type="datetime1">
-              <a:rPr kumimoji="0" lang="en-US" sz="1200" b="0" i="0" u="none" strike="noStrike" kern="1200" cap="none" spc="0" normalizeH="0" baseline="0" noProof="0" smtClean="0">
-                <a:ln>
-                  <a:noFill/>
-                </a:ln>
+              <a:rPr lang="en-US">
                 <a:solidFill>
                   <a:prstClr val="black"/>
                 </a:solidFill>
-                <a:effectLst/>
-                <a:uLnTx/>
-                <a:uFillTx/>
                 <a:latin typeface="Calibri" panose="020F0502020204030204"/>
-                <a:ea typeface="+mn-ea"/>
-                <a:cs typeface="+mn-cs"/>
               </a:rPr>
-              <a:pPr marL="0" marR="0" lvl="0" indent="0" algn="r" defTabSz="457200" rtl="0" eaLnBrk="1" fontAlgn="auto" latinLnBrk="0" hangingPunct="1">
-                <a:lnSpc>
-                  <a:spcPct val="100000"/>
-                </a:lnSpc>
-                <a:spcBef>
-                  <a:spcPts val="0"/>
-                </a:spcBef>
-                <a:spcAft>
-                  <a:spcPts val="0"/>
-                </a:spcAft>
-                <a:buClrTx/>
-                <a:buSzTx/>
-                <a:buFontTx/>
-                <a:buNone/>
-                <a:tabLst/>
+              <a:pPr defTabSz="471145">
                 <a:defRPr/>
               </a:pPr>
-              <a:t>4/16/2024</a:t>
+              <a:t>5/18/2026</a:t>
             </a:fld>
-            <a:endParaRPr kumimoji="0" lang="en-US" sz="1200" b="0" i="0" u="none" strike="noStrike" kern="1200" cap="none" spc="0" normalizeH="0" baseline="0" noProof="0" dirty="0">
-              <a:ln>
-                <a:noFill/>
-              </a:ln>
+            <a:endParaRPr lang="en-US" dirty="0">
               <a:solidFill>
                 <a:prstClr val="black"/>
               </a:solidFill>
-              <a:effectLst/>
-              <a:uLnTx/>
-              <a:uFillTx/>
               <a:latin typeface="Calibri" panose="020F0502020204030204"/>
-              <a:ea typeface="+mn-ea"/>
-              <a:cs typeface="+mn-cs"/>
             </a:endParaRPr>
           </a:p>
         </p:txBody>
@@ -2343,37 +2124,15 @@
           <a:bodyPr/>
           <a:lstStyle/>
           <a:p>
-            <a:pPr marL="0" marR="0" lvl="0" indent="0" algn="l" defTabSz="457200" rtl="0" eaLnBrk="1" fontAlgn="auto" latinLnBrk="0" hangingPunct="1">
-              <a:lnSpc>
-                <a:spcPct val="100000"/>
-              </a:lnSpc>
-              <a:spcBef>
-                <a:spcPts val="0"/>
-              </a:spcBef>
-              <a:spcAft>
-                <a:spcPts val="0"/>
-              </a:spcAft>
-              <a:buClrTx/>
-              <a:buSzTx/>
-              <a:buFontTx/>
-              <a:buNone/>
-              <a:tabLst/>
+            <a:pPr defTabSz="471145">
               <a:defRPr/>
             </a:pPr>
             <a:r>
-              <a:rPr kumimoji="0" lang="en-US" sz="1200" b="0" i="0" u="none" strike="noStrike" kern="1200" cap="none" spc="0" normalizeH="0" baseline="0" noProof="0" dirty="0">
-                <a:ln>
-                  <a:noFill/>
-                </a:ln>
+              <a:rPr lang="en-US" dirty="0">
                 <a:solidFill>
                   <a:prstClr val="black"/>
                 </a:solidFill>
-                <a:effectLst/>
-                <a:uLnTx/>
-                <a:uFillTx/>
                 <a:latin typeface="Calibri" panose="020F0502020204030204"/>
-                <a:ea typeface="+mn-ea"/>
-                <a:cs typeface="+mn-cs"/>
               </a:rPr>
               <a:t>raysmith@alum.mit.edu</a:t>
             </a:r>
@@ -2395,70 +2154,26 @@
           <a:bodyPr/>
           <a:lstStyle/>
           <a:p>
-            <a:pPr marL="0" marR="0" lvl="0" indent="0" algn="r" defTabSz="457200" rtl="0" eaLnBrk="1" fontAlgn="auto" latinLnBrk="0" hangingPunct="1">
-              <a:lnSpc>
-                <a:spcPct val="100000"/>
-              </a:lnSpc>
-              <a:spcBef>
-                <a:spcPts val="0"/>
-              </a:spcBef>
-              <a:spcAft>
-                <a:spcPts val="0"/>
-              </a:spcAft>
-              <a:buClrTx/>
-              <a:buSzTx/>
-              <a:buFontTx/>
-              <a:buNone/>
-              <a:tabLst/>
+            <a:pPr defTabSz="471145">
               <a:defRPr/>
             </a:pPr>
             <a:fld id="{BA791329-992B-4F83-8435-C33B0EC26DB3}" type="slidenum">
-              <a:rPr kumimoji="0" lang="en-US" sz="1200" b="0" i="0" u="none" strike="noStrike" kern="1200" cap="none" spc="0" normalizeH="0" baseline="0" noProof="0" smtClean="0">
-                <a:ln>
-                  <a:noFill/>
-                </a:ln>
+              <a:rPr lang="en-US">
                 <a:solidFill>
                   <a:prstClr val="black"/>
                 </a:solidFill>
-                <a:effectLst/>
-                <a:uLnTx/>
-                <a:uFillTx/>
                 <a:latin typeface="Calibri" panose="020F0502020204030204"/>
-                <a:ea typeface="+mn-ea"/>
-                <a:cs typeface="+mn-cs"/>
               </a:rPr>
-              <a:pPr marL="0" marR="0" lvl="0" indent="0" algn="r" defTabSz="457200" rtl="0" eaLnBrk="1" fontAlgn="auto" latinLnBrk="0" hangingPunct="1">
-                <a:lnSpc>
-                  <a:spcPct val="100000"/>
-                </a:lnSpc>
-                <a:spcBef>
-                  <a:spcPts val="0"/>
-                </a:spcBef>
-                <a:spcAft>
-                  <a:spcPts val="0"/>
-                </a:spcAft>
-                <a:buClrTx/>
-                <a:buSzTx/>
-                <a:buFontTx/>
-                <a:buNone/>
-                <a:tabLst/>
+              <a:pPr defTabSz="471145">
                 <a:defRPr/>
               </a:pPr>
               <a:t>5</a:t>
             </a:fld>
-            <a:endParaRPr kumimoji="0" lang="en-US" sz="1200" b="0" i="0" u="none" strike="noStrike" kern="1200" cap="none" spc="0" normalizeH="0" baseline="0" noProof="0" dirty="0">
-              <a:ln>
-                <a:noFill/>
-              </a:ln>
+            <a:endParaRPr lang="en-US" dirty="0">
               <a:solidFill>
                 <a:prstClr val="black"/>
               </a:solidFill>
-              <a:effectLst/>
-              <a:uLnTx/>
-              <a:uFillTx/>
               <a:latin typeface="Calibri" panose="020F0502020204030204"/>
-              <a:ea typeface="+mn-ea"/>
-              <a:cs typeface="+mn-cs"/>
             </a:endParaRPr>
           </a:p>
         </p:txBody>
@@ -2466,7 +2181,7 @@
     </p:spTree>
     <p:extLst>
       <p:ext uri="{BB962C8B-B14F-4D97-AF65-F5344CB8AC3E}">
-        <p14:creationId xmlns:p14="http://schemas.microsoft.com/office/powerpoint/2010/main" val="4262969112"/>
+        <p14:creationId xmlns:p14="http://schemas.microsoft.com/office/powerpoint/2010/main" val="2679583817"/>
       </p:ext>
     </p:extLst>
   </p:cSld>
@@ -2504,6 +2219,13 @@
           </p:nvPr>
         </p:nvSpPr>
         <p:spPr/>
+        <p:txBody>
+          <a:bodyPr/>
+          <a:lstStyle/>
+          <a:p>
+            <a:endParaRPr lang="en-US" dirty="0"/>
+          </a:p>
+        </p:txBody>
       </p:sp>
       <p:sp>
         <p:nvSpPr>
@@ -2520,10 +2242,7 @@
           <a:bodyPr/>
           <a:lstStyle/>
           <a:p>
-            <a:r>
-              <a:rPr lang="en-US" dirty="0"/>
-              <a:t>Compromises: Lower resolution, Few colors</a:t>
-            </a:r>
+            <a:endParaRPr lang="en-US" dirty="0"/>
           </a:p>
         </p:txBody>
       </p:sp>
@@ -2542,37 +2261,15 @@
           <a:bodyPr/>
           <a:lstStyle/>
           <a:p>
-            <a:pPr marL="0" marR="0" lvl="0" indent="0" algn="l" defTabSz="457200" rtl="0" eaLnBrk="1" fontAlgn="auto" latinLnBrk="0" hangingPunct="1">
-              <a:lnSpc>
-                <a:spcPct val="100000"/>
-              </a:lnSpc>
-              <a:spcBef>
-                <a:spcPts val="0"/>
-              </a:spcBef>
-              <a:spcAft>
-                <a:spcPts val="0"/>
-              </a:spcAft>
-              <a:buClrTx/>
-              <a:buSzTx/>
-              <a:buFontTx/>
-              <a:buNone/>
-              <a:tabLst/>
+            <a:pPr defTabSz="471145">
               <a:defRPr/>
             </a:pPr>
             <a:r>
-              <a:rPr kumimoji="0" lang="en-US" sz="1200" b="0" i="0" u="none" strike="noStrike" kern="1200" cap="none" spc="0" normalizeH="0" baseline="0" noProof="0" dirty="0">
-                <a:ln>
-                  <a:noFill/>
-                </a:ln>
+              <a:rPr lang="en-US" dirty="0">
                 <a:solidFill>
                   <a:prstClr val="black"/>
                 </a:solidFill>
-                <a:effectLst/>
-                <a:uLnTx/>
-                <a:uFillTx/>
                 <a:latin typeface="Calibri" panose="020F0502020204030204"/>
-                <a:ea typeface="+mn-ea"/>
-                <a:cs typeface="+mn-cs"/>
               </a:rPr>
               <a:t>Introduction to Programming using Python</a:t>
             </a:r>
@@ -2594,70 +2291,26 @@
           <a:bodyPr/>
           <a:lstStyle/>
           <a:p>
-            <a:pPr marL="0" marR="0" lvl="0" indent="0" algn="r" defTabSz="457200" rtl="0" eaLnBrk="1" fontAlgn="auto" latinLnBrk="0" hangingPunct="1">
-              <a:lnSpc>
-                <a:spcPct val="100000"/>
-              </a:lnSpc>
-              <a:spcBef>
-                <a:spcPts val="0"/>
-              </a:spcBef>
-              <a:spcAft>
-                <a:spcPts val="0"/>
-              </a:spcAft>
-              <a:buClrTx/>
-              <a:buSzTx/>
-              <a:buFontTx/>
-              <a:buNone/>
-              <a:tabLst/>
+            <a:pPr defTabSz="471145">
               <a:defRPr/>
             </a:pPr>
             <a:fld id="{A596092B-28C7-44D1-B902-5437B333DFB7}" type="datetime1">
-              <a:rPr kumimoji="0" lang="en-US" sz="1200" b="0" i="0" u="none" strike="noStrike" kern="1200" cap="none" spc="0" normalizeH="0" baseline="0" noProof="0" smtClean="0">
-                <a:ln>
-                  <a:noFill/>
-                </a:ln>
+              <a:rPr lang="en-US">
                 <a:solidFill>
                   <a:prstClr val="black"/>
                 </a:solidFill>
-                <a:effectLst/>
-                <a:uLnTx/>
-                <a:uFillTx/>
                 <a:latin typeface="Calibri" panose="020F0502020204030204"/>
-                <a:ea typeface="+mn-ea"/>
-                <a:cs typeface="+mn-cs"/>
               </a:rPr>
-              <a:pPr marL="0" marR="0" lvl="0" indent="0" algn="r" defTabSz="457200" rtl="0" eaLnBrk="1" fontAlgn="auto" latinLnBrk="0" hangingPunct="1">
-                <a:lnSpc>
-                  <a:spcPct val="100000"/>
-                </a:lnSpc>
-                <a:spcBef>
-                  <a:spcPts val="0"/>
-                </a:spcBef>
-                <a:spcAft>
-                  <a:spcPts val="0"/>
-                </a:spcAft>
-                <a:buClrTx/>
-                <a:buSzTx/>
-                <a:buFontTx/>
-                <a:buNone/>
-                <a:tabLst/>
+              <a:pPr defTabSz="471145">
                 <a:defRPr/>
               </a:pPr>
-              <a:t>4/16/2024</a:t>
+              <a:t>5/18/2026</a:t>
             </a:fld>
-            <a:endParaRPr kumimoji="0" lang="en-US" sz="1200" b="0" i="0" u="none" strike="noStrike" kern="1200" cap="none" spc="0" normalizeH="0" baseline="0" noProof="0" dirty="0">
-              <a:ln>
-                <a:noFill/>
-              </a:ln>
+            <a:endParaRPr lang="en-US" dirty="0">
               <a:solidFill>
                 <a:prstClr val="black"/>
               </a:solidFill>
-              <a:effectLst/>
-              <a:uLnTx/>
-              <a:uFillTx/>
               <a:latin typeface="Calibri" panose="020F0502020204030204"/>
-              <a:ea typeface="+mn-ea"/>
-              <a:cs typeface="+mn-cs"/>
             </a:endParaRPr>
           </a:p>
         </p:txBody>
@@ -2677,37 +2330,15 @@
           <a:bodyPr/>
           <a:lstStyle/>
           <a:p>
-            <a:pPr marL="0" marR="0" lvl="0" indent="0" algn="l" defTabSz="457200" rtl="0" eaLnBrk="1" fontAlgn="auto" latinLnBrk="0" hangingPunct="1">
-              <a:lnSpc>
-                <a:spcPct val="100000"/>
-              </a:lnSpc>
-              <a:spcBef>
-                <a:spcPts val="0"/>
-              </a:spcBef>
-              <a:spcAft>
-                <a:spcPts val="0"/>
-              </a:spcAft>
-              <a:buClrTx/>
-              <a:buSzTx/>
-              <a:buFontTx/>
-              <a:buNone/>
-              <a:tabLst/>
+            <a:pPr defTabSz="471145">
               <a:defRPr/>
             </a:pPr>
             <a:r>
-              <a:rPr kumimoji="0" lang="en-US" sz="1200" b="0" i="0" u="none" strike="noStrike" kern="1200" cap="none" spc="0" normalizeH="0" baseline="0" noProof="0" dirty="0">
-                <a:ln>
-                  <a:noFill/>
-                </a:ln>
+              <a:rPr lang="en-US" dirty="0">
                 <a:solidFill>
                   <a:prstClr val="black"/>
                 </a:solidFill>
-                <a:effectLst/>
-                <a:uLnTx/>
-                <a:uFillTx/>
                 <a:latin typeface="Calibri" panose="020F0502020204030204"/>
-                <a:ea typeface="+mn-ea"/>
-                <a:cs typeface="+mn-cs"/>
               </a:rPr>
               <a:t>raysmith@alum.mit.edu</a:t>
             </a:r>
@@ -2729,70 +2360,26 @@
           <a:bodyPr/>
           <a:lstStyle/>
           <a:p>
-            <a:pPr marL="0" marR="0" lvl="0" indent="0" algn="r" defTabSz="457200" rtl="0" eaLnBrk="1" fontAlgn="auto" latinLnBrk="0" hangingPunct="1">
-              <a:lnSpc>
-                <a:spcPct val="100000"/>
-              </a:lnSpc>
-              <a:spcBef>
-                <a:spcPts val="0"/>
-              </a:spcBef>
-              <a:spcAft>
-                <a:spcPts val="0"/>
-              </a:spcAft>
-              <a:buClrTx/>
-              <a:buSzTx/>
-              <a:buFontTx/>
-              <a:buNone/>
-              <a:tabLst/>
+            <a:pPr defTabSz="471145">
               <a:defRPr/>
             </a:pPr>
             <a:fld id="{BA791329-992B-4F83-8435-C33B0EC26DB3}" type="slidenum">
-              <a:rPr kumimoji="0" lang="en-US" sz="1200" b="0" i="0" u="none" strike="noStrike" kern="1200" cap="none" spc="0" normalizeH="0" baseline="0" noProof="0" smtClean="0">
-                <a:ln>
-                  <a:noFill/>
-                </a:ln>
+              <a:rPr lang="en-US">
                 <a:solidFill>
                   <a:prstClr val="black"/>
                 </a:solidFill>
-                <a:effectLst/>
-                <a:uLnTx/>
-                <a:uFillTx/>
                 <a:latin typeface="Calibri" panose="020F0502020204030204"/>
-                <a:ea typeface="+mn-ea"/>
-                <a:cs typeface="+mn-cs"/>
               </a:rPr>
-              <a:pPr marL="0" marR="0" lvl="0" indent="0" algn="r" defTabSz="457200" rtl="0" eaLnBrk="1" fontAlgn="auto" latinLnBrk="0" hangingPunct="1">
-                <a:lnSpc>
-                  <a:spcPct val="100000"/>
-                </a:lnSpc>
-                <a:spcBef>
-                  <a:spcPts val="0"/>
-                </a:spcBef>
-                <a:spcAft>
-                  <a:spcPts val="0"/>
-                </a:spcAft>
-                <a:buClrTx/>
-                <a:buSzTx/>
-                <a:buFontTx/>
-                <a:buNone/>
-                <a:tabLst/>
+              <a:pPr defTabSz="471145">
                 <a:defRPr/>
               </a:pPr>
               <a:t>6</a:t>
             </a:fld>
-            <a:endParaRPr kumimoji="0" lang="en-US" sz="1200" b="0" i="0" u="none" strike="noStrike" kern="1200" cap="none" spc="0" normalizeH="0" baseline="0" noProof="0" dirty="0">
-              <a:ln>
-                <a:noFill/>
-              </a:ln>
+            <a:endParaRPr lang="en-US" dirty="0">
               <a:solidFill>
                 <a:prstClr val="black"/>
               </a:solidFill>
-              <a:effectLst/>
-              <a:uLnTx/>
-              <a:uFillTx/>
               <a:latin typeface="Calibri" panose="020F0502020204030204"/>
-              <a:ea typeface="+mn-ea"/>
-              <a:cs typeface="+mn-cs"/>
             </a:endParaRPr>
           </a:p>
         </p:txBody>
@@ -2800,7 +2387,7 @@
     </p:spTree>
     <p:extLst>
       <p:ext uri="{BB962C8B-B14F-4D97-AF65-F5344CB8AC3E}">
-        <p14:creationId xmlns:p14="http://schemas.microsoft.com/office/powerpoint/2010/main" val="2679583817"/>
+        <p14:creationId xmlns:p14="http://schemas.microsoft.com/office/powerpoint/2010/main" val="232451191"/>
       </p:ext>
     </p:extLst>
   </p:cSld>
@@ -2838,6 +2425,13 @@
           </p:nvPr>
         </p:nvSpPr>
         <p:spPr/>
+        <p:txBody>
+          <a:bodyPr/>
+          <a:lstStyle/>
+          <a:p>
+            <a:endParaRPr lang="en-US" dirty="0"/>
+          </a:p>
+        </p:txBody>
       </p:sp>
       <p:sp>
         <p:nvSpPr>
@@ -2873,37 +2467,15 @@
           <a:bodyPr/>
           <a:lstStyle/>
           <a:p>
-            <a:pPr marL="0" marR="0" lvl="0" indent="0" algn="l" defTabSz="457200" rtl="0" eaLnBrk="1" fontAlgn="auto" latinLnBrk="0" hangingPunct="1">
-              <a:lnSpc>
-                <a:spcPct val="100000"/>
-              </a:lnSpc>
-              <a:spcBef>
-                <a:spcPts val="0"/>
-              </a:spcBef>
-              <a:spcAft>
-                <a:spcPts val="0"/>
-              </a:spcAft>
-              <a:buClrTx/>
-              <a:buSzTx/>
-              <a:buFontTx/>
-              <a:buNone/>
-              <a:tabLst/>
+            <a:pPr defTabSz="471145">
               <a:defRPr/>
             </a:pPr>
             <a:r>
-              <a:rPr kumimoji="0" lang="en-US" sz="1200" b="0" i="0" u="none" strike="noStrike" kern="1200" cap="none" spc="0" normalizeH="0" baseline="0" noProof="0" dirty="0">
-                <a:ln>
-                  <a:noFill/>
-                </a:ln>
+              <a:rPr lang="en-US" dirty="0">
                 <a:solidFill>
                   <a:prstClr val="black"/>
                 </a:solidFill>
-                <a:effectLst/>
-                <a:uLnTx/>
-                <a:uFillTx/>
                 <a:latin typeface="Calibri" panose="020F0502020204030204"/>
-                <a:ea typeface="+mn-ea"/>
-                <a:cs typeface="+mn-cs"/>
               </a:rPr>
               <a:t>Introduction to Programming using Python</a:t>
             </a:r>
@@ -2925,70 +2497,26 @@
           <a:bodyPr/>
           <a:lstStyle/>
           <a:p>
-            <a:pPr marL="0" marR="0" lvl="0" indent="0" algn="r" defTabSz="457200" rtl="0" eaLnBrk="1" fontAlgn="auto" latinLnBrk="0" hangingPunct="1">
-              <a:lnSpc>
-                <a:spcPct val="100000"/>
-              </a:lnSpc>
-              <a:spcBef>
-                <a:spcPts val="0"/>
-              </a:spcBef>
-              <a:spcAft>
-                <a:spcPts val="0"/>
-              </a:spcAft>
-              <a:buClrTx/>
-              <a:buSzTx/>
-              <a:buFontTx/>
-              <a:buNone/>
-              <a:tabLst/>
+            <a:pPr defTabSz="471145">
               <a:defRPr/>
             </a:pPr>
             <a:fld id="{A596092B-28C7-44D1-B902-5437B333DFB7}" type="datetime1">
-              <a:rPr kumimoji="0" lang="en-US" sz="1200" b="0" i="0" u="none" strike="noStrike" kern="1200" cap="none" spc="0" normalizeH="0" baseline="0" noProof="0" smtClean="0">
-                <a:ln>
-                  <a:noFill/>
-                </a:ln>
+              <a:rPr lang="en-US">
                 <a:solidFill>
                   <a:prstClr val="black"/>
                 </a:solidFill>
-                <a:effectLst/>
-                <a:uLnTx/>
-                <a:uFillTx/>
                 <a:latin typeface="Calibri" panose="020F0502020204030204"/>
-                <a:ea typeface="+mn-ea"/>
-                <a:cs typeface="+mn-cs"/>
               </a:rPr>
-              <a:pPr marL="0" marR="0" lvl="0" indent="0" algn="r" defTabSz="457200" rtl="0" eaLnBrk="1" fontAlgn="auto" latinLnBrk="0" hangingPunct="1">
-                <a:lnSpc>
-                  <a:spcPct val="100000"/>
-                </a:lnSpc>
-                <a:spcBef>
-                  <a:spcPts val="0"/>
-                </a:spcBef>
-                <a:spcAft>
-                  <a:spcPts val="0"/>
-                </a:spcAft>
-                <a:buClrTx/>
-                <a:buSzTx/>
-                <a:buFontTx/>
-                <a:buNone/>
-                <a:tabLst/>
+              <a:pPr defTabSz="471145">
                 <a:defRPr/>
               </a:pPr>
-              <a:t>4/16/2024</a:t>
+              <a:t>5/18/2026</a:t>
             </a:fld>
-            <a:endParaRPr kumimoji="0" lang="en-US" sz="1200" b="0" i="0" u="none" strike="noStrike" kern="1200" cap="none" spc="0" normalizeH="0" baseline="0" noProof="0" dirty="0">
-              <a:ln>
-                <a:noFill/>
-              </a:ln>
+            <a:endParaRPr lang="en-US" dirty="0">
               <a:solidFill>
                 <a:prstClr val="black"/>
               </a:solidFill>
-              <a:effectLst/>
-              <a:uLnTx/>
-              <a:uFillTx/>
               <a:latin typeface="Calibri" panose="020F0502020204030204"/>
-              <a:ea typeface="+mn-ea"/>
-              <a:cs typeface="+mn-cs"/>
             </a:endParaRPr>
           </a:p>
         </p:txBody>
@@ -3008,37 +2536,15 @@
           <a:bodyPr/>
           <a:lstStyle/>
           <a:p>
-            <a:pPr marL="0" marR="0" lvl="0" indent="0" algn="l" defTabSz="457200" rtl="0" eaLnBrk="1" fontAlgn="auto" latinLnBrk="0" hangingPunct="1">
-              <a:lnSpc>
-                <a:spcPct val="100000"/>
-              </a:lnSpc>
-              <a:spcBef>
-                <a:spcPts val="0"/>
-              </a:spcBef>
-              <a:spcAft>
-                <a:spcPts val="0"/>
-              </a:spcAft>
-              <a:buClrTx/>
-              <a:buSzTx/>
-              <a:buFontTx/>
-              <a:buNone/>
-              <a:tabLst/>
+            <a:pPr defTabSz="471145">
               <a:defRPr/>
             </a:pPr>
             <a:r>
-              <a:rPr kumimoji="0" lang="en-US" sz="1200" b="0" i="0" u="none" strike="noStrike" kern="1200" cap="none" spc="0" normalizeH="0" baseline="0" noProof="0" dirty="0">
-                <a:ln>
-                  <a:noFill/>
-                </a:ln>
+              <a:rPr lang="en-US" dirty="0">
                 <a:solidFill>
                   <a:prstClr val="black"/>
                 </a:solidFill>
-                <a:effectLst/>
-                <a:uLnTx/>
-                <a:uFillTx/>
                 <a:latin typeface="Calibri" panose="020F0502020204030204"/>
-                <a:ea typeface="+mn-ea"/>
-                <a:cs typeface="+mn-cs"/>
               </a:rPr>
               <a:t>raysmith@alum.mit.edu</a:t>
             </a:r>
@@ -3060,70 +2566,26 @@
           <a:bodyPr/>
           <a:lstStyle/>
           <a:p>
-            <a:pPr marL="0" marR="0" lvl="0" indent="0" algn="r" defTabSz="457200" rtl="0" eaLnBrk="1" fontAlgn="auto" latinLnBrk="0" hangingPunct="1">
-              <a:lnSpc>
-                <a:spcPct val="100000"/>
-              </a:lnSpc>
-              <a:spcBef>
-                <a:spcPts val="0"/>
-              </a:spcBef>
-              <a:spcAft>
-                <a:spcPts val="0"/>
-              </a:spcAft>
-              <a:buClrTx/>
-              <a:buSzTx/>
-              <a:buFontTx/>
-              <a:buNone/>
-              <a:tabLst/>
+            <a:pPr defTabSz="471145">
               <a:defRPr/>
             </a:pPr>
             <a:fld id="{BA791329-992B-4F83-8435-C33B0EC26DB3}" type="slidenum">
-              <a:rPr kumimoji="0" lang="en-US" sz="1200" b="0" i="0" u="none" strike="noStrike" kern="1200" cap="none" spc="0" normalizeH="0" baseline="0" noProof="0" smtClean="0">
-                <a:ln>
-                  <a:noFill/>
-                </a:ln>
+              <a:rPr lang="en-US">
                 <a:solidFill>
                   <a:prstClr val="black"/>
                 </a:solidFill>
-                <a:effectLst/>
-                <a:uLnTx/>
-                <a:uFillTx/>
                 <a:latin typeface="Calibri" panose="020F0502020204030204"/>
-                <a:ea typeface="+mn-ea"/>
-                <a:cs typeface="+mn-cs"/>
               </a:rPr>
-              <a:pPr marL="0" marR="0" lvl="0" indent="0" algn="r" defTabSz="457200" rtl="0" eaLnBrk="1" fontAlgn="auto" latinLnBrk="0" hangingPunct="1">
-                <a:lnSpc>
-                  <a:spcPct val="100000"/>
-                </a:lnSpc>
-                <a:spcBef>
-                  <a:spcPts val="0"/>
-                </a:spcBef>
-                <a:spcAft>
-                  <a:spcPts val="0"/>
-                </a:spcAft>
-                <a:buClrTx/>
-                <a:buSzTx/>
-                <a:buFontTx/>
-                <a:buNone/>
-                <a:tabLst/>
+              <a:pPr defTabSz="471145">
                 <a:defRPr/>
               </a:pPr>
               <a:t>7</a:t>
             </a:fld>
-            <a:endParaRPr kumimoji="0" lang="en-US" sz="1200" b="0" i="0" u="none" strike="noStrike" kern="1200" cap="none" spc="0" normalizeH="0" baseline="0" noProof="0" dirty="0">
-              <a:ln>
-                <a:noFill/>
-              </a:ln>
+            <a:endParaRPr lang="en-US" dirty="0">
               <a:solidFill>
                 <a:prstClr val="black"/>
               </a:solidFill>
-              <a:effectLst/>
-              <a:uLnTx/>
-              <a:uFillTx/>
               <a:latin typeface="Calibri" panose="020F0502020204030204"/>
-              <a:ea typeface="+mn-ea"/>
-              <a:cs typeface="+mn-cs"/>
             </a:endParaRPr>
           </a:p>
         </p:txBody>
@@ -3131,7 +2593,7 @@
     </p:spTree>
     <p:extLst>
       <p:ext uri="{BB962C8B-B14F-4D97-AF65-F5344CB8AC3E}">
-        <p14:creationId xmlns:p14="http://schemas.microsoft.com/office/powerpoint/2010/main" val="232451191"/>
+        <p14:creationId xmlns:p14="http://schemas.microsoft.com/office/powerpoint/2010/main" val="717346773"/>
       </p:ext>
     </p:extLst>
   </p:cSld>
@@ -3169,6 +2631,13 @@
           </p:nvPr>
         </p:nvSpPr>
         <p:spPr/>
+        <p:txBody>
+          <a:bodyPr/>
+          <a:lstStyle/>
+          <a:p>
+            <a:endParaRPr lang="en-US" dirty="0"/>
+          </a:p>
+        </p:txBody>
       </p:sp>
       <p:sp>
         <p:nvSpPr>
@@ -3185,284 +2654,49 @@
           <a:bodyPr/>
           <a:lstStyle/>
           <a:p>
+            <a:r>
+              <a:rPr lang="en-US" dirty="0"/>
+              <a:t>Students copy files to Desktop\braille_2023\</a:t>
+            </a:r>
+          </a:p>
+          <a:p>
+            <a:r>
+              <a:rPr lang="en-US" dirty="0"/>
+              <a:t>Simplest graphics square.py, square_loop.py</a:t>
+            </a:r>
+          </a:p>
+          <a:p>
             <a:endParaRPr lang="en-US" dirty="0"/>
           </a:p>
         </p:txBody>
       </p:sp>
       <p:sp>
         <p:nvSpPr>
-          <p:cNvPr id="4" name="Header Placeholder 3"/>
-          <p:cNvSpPr>
-            <a:spLocks noGrp="1"/>
-          </p:cNvSpPr>
-          <p:nvPr>
-            <p:ph type="hdr" sz="quarter" idx="10"/>
-          </p:nvPr>
-        </p:nvSpPr>
-        <p:spPr/>
-        <p:txBody>
-          <a:bodyPr/>
-          <a:lstStyle/>
-          <a:p>
-            <a:pPr marL="0" marR="0" lvl="0" indent="0" algn="l" defTabSz="457200" rtl="0" eaLnBrk="1" fontAlgn="auto" latinLnBrk="0" hangingPunct="1">
-              <a:lnSpc>
-                <a:spcPct val="100000"/>
-              </a:lnSpc>
-              <a:spcBef>
-                <a:spcPts val="0"/>
-              </a:spcBef>
-              <a:spcAft>
-                <a:spcPts val="0"/>
-              </a:spcAft>
-              <a:buClrTx/>
-              <a:buSzTx/>
-              <a:buFontTx/>
-              <a:buNone/>
-              <a:tabLst/>
-              <a:defRPr/>
-            </a:pPr>
-            <a:r>
-              <a:rPr kumimoji="0" lang="en-US" sz="1200" b="0" i="0" u="none" strike="noStrike" kern="1200" cap="none" spc="0" normalizeH="0" baseline="0" noProof="0" dirty="0">
-                <a:ln>
-                  <a:noFill/>
-                </a:ln>
-                <a:solidFill>
-                  <a:prstClr val="black"/>
-                </a:solidFill>
-                <a:effectLst/>
-                <a:uLnTx/>
-                <a:uFillTx/>
-                <a:latin typeface="Calibri" panose="020F0502020204030204"/>
-                <a:ea typeface="+mn-ea"/>
-                <a:cs typeface="+mn-cs"/>
-              </a:rPr>
-              <a:t>Introduction to Programming using Python</a:t>
-            </a:r>
-          </a:p>
-        </p:txBody>
-      </p:sp>
-      <p:sp>
-        <p:nvSpPr>
-          <p:cNvPr id="5" name="Date Placeholder 4"/>
-          <p:cNvSpPr>
-            <a:spLocks noGrp="1"/>
-          </p:cNvSpPr>
-          <p:nvPr>
-            <p:ph type="dt" idx="11"/>
-          </p:nvPr>
-        </p:nvSpPr>
-        <p:spPr/>
-        <p:txBody>
-          <a:bodyPr/>
-          <a:lstStyle/>
-          <a:p>
-            <a:pPr marL="0" marR="0" lvl="0" indent="0" algn="r" defTabSz="457200" rtl="0" eaLnBrk="1" fontAlgn="auto" latinLnBrk="0" hangingPunct="1">
-              <a:lnSpc>
-                <a:spcPct val="100000"/>
-              </a:lnSpc>
-              <a:spcBef>
-                <a:spcPts val="0"/>
-              </a:spcBef>
-              <a:spcAft>
-                <a:spcPts val="0"/>
-              </a:spcAft>
-              <a:buClrTx/>
-              <a:buSzTx/>
-              <a:buFontTx/>
-              <a:buNone/>
-              <a:tabLst/>
-              <a:defRPr/>
-            </a:pPr>
-            <a:fld id="{A596092B-28C7-44D1-B902-5437B333DFB7}" type="datetime1">
-              <a:rPr kumimoji="0" lang="en-US" sz="1200" b="0" i="0" u="none" strike="noStrike" kern="1200" cap="none" spc="0" normalizeH="0" baseline="0" noProof="0" smtClean="0">
-                <a:ln>
-                  <a:noFill/>
-                </a:ln>
-                <a:solidFill>
-                  <a:prstClr val="black"/>
-                </a:solidFill>
-                <a:effectLst/>
-                <a:uLnTx/>
-                <a:uFillTx/>
-                <a:latin typeface="Calibri" panose="020F0502020204030204"/>
-                <a:ea typeface="+mn-ea"/>
-                <a:cs typeface="+mn-cs"/>
-              </a:rPr>
-              <a:pPr marL="0" marR="0" lvl="0" indent="0" algn="r" defTabSz="457200" rtl="0" eaLnBrk="1" fontAlgn="auto" latinLnBrk="0" hangingPunct="1">
-                <a:lnSpc>
-                  <a:spcPct val="100000"/>
-                </a:lnSpc>
-                <a:spcBef>
-                  <a:spcPts val="0"/>
-                </a:spcBef>
-                <a:spcAft>
-                  <a:spcPts val="0"/>
-                </a:spcAft>
-                <a:buClrTx/>
-                <a:buSzTx/>
-                <a:buFontTx/>
-                <a:buNone/>
-                <a:tabLst/>
-                <a:defRPr/>
-              </a:pPr>
-              <a:t>4/16/2024</a:t>
-            </a:fld>
-            <a:endParaRPr kumimoji="0" lang="en-US" sz="1200" b="0" i="0" u="none" strike="noStrike" kern="1200" cap="none" spc="0" normalizeH="0" baseline="0" noProof="0" dirty="0">
-              <a:ln>
-                <a:noFill/>
-              </a:ln>
-              <a:solidFill>
-                <a:prstClr val="black"/>
-              </a:solidFill>
-              <a:effectLst/>
-              <a:uLnTx/>
-              <a:uFillTx/>
-              <a:latin typeface="Calibri" panose="020F0502020204030204"/>
-              <a:ea typeface="+mn-ea"/>
-              <a:cs typeface="+mn-cs"/>
-            </a:endParaRPr>
-          </a:p>
-        </p:txBody>
-      </p:sp>
-      <p:sp>
-        <p:nvSpPr>
-          <p:cNvPr id="6" name="Footer Placeholder 5"/>
-          <p:cNvSpPr>
-            <a:spLocks noGrp="1"/>
-          </p:cNvSpPr>
-          <p:nvPr>
-            <p:ph type="ftr" sz="quarter" idx="12"/>
-          </p:nvPr>
-        </p:nvSpPr>
-        <p:spPr/>
-        <p:txBody>
-          <a:bodyPr/>
-          <a:lstStyle/>
-          <a:p>
-            <a:pPr marL="0" marR="0" lvl="0" indent="0" algn="l" defTabSz="457200" rtl="0" eaLnBrk="1" fontAlgn="auto" latinLnBrk="0" hangingPunct="1">
-              <a:lnSpc>
-                <a:spcPct val="100000"/>
-              </a:lnSpc>
-              <a:spcBef>
-                <a:spcPts val="0"/>
-              </a:spcBef>
-              <a:spcAft>
-                <a:spcPts val="0"/>
-              </a:spcAft>
-              <a:buClrTx/>
-              <a:buSzTx/>
-              <a:buFontTx/>
-              <a:buNone/>
-              <a:tabLst/>
-              <a:defRPr/>
-            </a:pPr>
-            <a:r>
-              <a:rPr kumimoji="0" lang="en-US" sz="1200" b="0" i="0" u="none" strike="noStrike" kern="1200" cap="none" spc="0" normalizeH="0" baseline="0" noProof="0" dirty="0">
-                <a:ln>
-                  <a:noFill/>
-                </a:ln>
-                <a:solidFill>
-                  <a:prstClr val="black"/>
-                </a:solidFill>
-                <a:effectLst/>
-                <a:uLnTx/>
-                <a:uFillTx/>
-                <a:latin typeface="Calibri" panose="020F0502020204030204"/>
-                <a:ea typeface="+mn-ea"/>
-                <a:cs typeface="+mn-cs"/>
-              </a:rPr>
-              <a:t>raysmith@alum.mit.edu</a:t>
-            </a:r>
-          </a:p>
-        </p:txBody>
-      </p:sp>
-      <p:sp>
-        <p:nvSpPr>
-          <p:cNvPr id="7" name="Slide Number Placeholder 6"/>
-          <p:cNvSpPr>
-            <a:spLocks noGrp="1"/>
-          </p:cNvSpPr>
-          <p:nvPr>
-            <p:ph type="sldNum" sz="quarter" idx="13"/>
-          </p:nvPr>
-        </p:nvSpPr>
-        <p:spPr/>
-        <p:txBody>
-          <a:bodyPr/>
-          <a:lstStyle/>
-          <a:p>
-            <a:pPr marL="0" marR="0" lvl="0" indent="0" algn="r" defTabSz="457200" rtl="0" eaLnBrk="1" fontAlgn="auto" latinLnBrk="0" hangingPunct="1">
-              <a:lnSpc>
-                <a:spcPct val="100000"/>
-              </a:lnSpc>
-              <a:spcBef>
-                <a:spcPts val="0"/>
-              </a:spcBef>
-              <a:spcAft>
-                <a:spcPts val="0"/>
-              </a:spcAft>
-              <a:buClrTx/>
-              <a:buSzTx/>
-              <a:buFontTx/>
-              <a:buNone/>
-              <a:tabLst/>
-              <a:defRPr/>
-            </a:pPr>
-            <a:fld id="{BA791329-992B-4F83-8435-C33B0EC26DB3}" type="slidenum">
-              <a:rPr kumimoji="0" lang="en-US" sz="1200" b="0" i="0" u="none" strike="noStrike" kern="1200" cap="none" spc="0" normalizeH="0" baseline="0" noProof="0" smtClean="0">
-                <a:ln>
-                  <a:noFill/>
-                </a:ln>
-                <a:solidFill>
-                  <a:prstClr val="black"/>
-                </a:solidFill>
-                <a:effectLst/>
-                <a:uLnTx/>
-                <a:uFillTx/>
-                <a:latin typeface="Calibri" panose="020F0502020204030204"/>
-                <a:ea typeface="+mn-ea"/>
-                <a:cs typeface="+mn-cs"/>
-              </a:rPr>
-              <a:pPr marL="0" marR="0" lvl="0" indent="0" algn="r" defTabSz="457200" rtl="0" eaLnBrk="1" fontAlgn="auto" latinLnBrk="0" hangingPunct="1">
-                <a:lnSpc>
-                  <a:spcPct val="100000"/>
-                </a:lnSpc>
-                <a:spcBef>
-                  <a:spcPts val="0"/>
-                </a:spcBef>
-                <a:spcAft>
-                  <a:spcPts val="0"/>
-                </a:spcAft>
-                <a:buClrTx/>
-                <a:buSzTx/>
-                <a:buFontTx/>
-                <a:buNone/>
-                <a:tabLst/>
-                <a:defRPr/>
-              </a:pPr>
+          <p:cNvPr id="4" name="Slide Number Placeholder 3"/>
+          <p:cNvSpPr>
+            <a:spLocks noGrp="1"/>
+          </p:cNvSpPr>
+          <p:nvPr>
+            <p:ph type="sldNum" sz="quarter" idx="5"/>
+          </p:nvPr>
+        </p:nvSpPr>
+        <p:spPr/>
+        <p:txBody>
+          <a:bodyPr/>
+          <a:lstStyle/>
+          <a:p>
+            <a:fld id="{194D4E80-AAF7-4841-B2F0-A647B649A6DE}" type="slidenum">
+              <a:rPr lang="en-US" smtClean="0"/>
               <a:t>8</a:t>
             </a:fld>
-            <a:endParaRPr kumimoji="0" lang="en-US" sz="1200" b="0" i="0" u="none" strike="noStrike" kern="1200" cap="none" spc="0" normalizeH="0" baseline="0" noProof="0" dirty="0">
-              <a:ln>
-                <a:noFill/>
-              </a:ln>
-              <a:solidFill>
-                <a:prstClr val="black"/>
-              </a:solidFill>
-              <a:effectLst/>
-              <a:uLnTx/>
-              <a:uFillTx/>
-              <a:latin typeface="Calibri" panose="020F0502020204030204"/>
-              <a:ea typeface="+mn-ea"/>
-              <a:cs typeface="+mn-cs"/>
-            </a:endParaRPr>
+            <a:endParaRPr lang="en-US" dirty="0"/>
           </a:p>
         </p:txBody>
       </p:sp>
     </p:spTree>
     <p:extLst>
       <p:ext uri="{BB962C8B-B14F-4D97-AF65-F5344CB8AC3E}">
-        <p14:creationId xmlns:p14="http://schemas.microsoft.com/office/powerpoint/2010/main" val="717346773"/>
+        <p14:creationId xmlns:p14="http://schemas.microsoft.com/office/powerpoint/2010/main" val="918770174"/>
       </p:ext>
     </p:extLst>
   </p:cSld>
@@ -3500,6 +2734,13 @@
           </p:nvPr>
         </p:nvSpPr>
         <p:spPr/>
+        <p:txBody>
+          <a:bodyPr/>
+          <a:lstStyle/>
+          <a:p>
+            <a:endParaRPr lang="en-US" dirty="0"/>
+          </a:p>
+        </p:txBody>
       </p:sp>
       <p:sp>
         <p:nvSpPr>
@@ -3518,17 +2759,14 @@
           <a:p>
             <a:r>
               <a:rPr lang="en-US" dirty="0"/>
-              <a:t>Students copy files to Desktop\braille_2023\</a:t>
+              <a:t>Commas added to keep blank area from being compressed</a:t>
             </a:r>
           </a:p>
           <a:p>
             <a:r>
               <a:rPr lang="en-US" dirty="0"/>
-              <a:t>Simplest graphics square.py, square_loop.py</a:t>
-            </a:r>
-          </a:p>
-          <a:p>
-            <a:endParaRPr lang="en-US" dirty="0"/>
+              <a:t>Figure moved to left and up to reduce effort to find figure</a:t>
+            </a:r>
           </a:p>
         </p:txBody>
       </p:sp>
@@ -3549,7 +2787,7 @@
           <a:p>
             <a:fld id="{194D4E80-AAF7-4841-B2F0-A647B649A6DE}" type="slidenum">
               <a:rPr lang="en-US" smtClean="0"/>
-              <a:t>9</a:t>
+              <a:t>10</a:t>
             </a:fld>
             <a:endParaRPr lang="en-US" dirty="0"/>
           </a:p>
@@ -3558,7 +2796,7 @@
     </p:spTree>
     <p:extLst>
       <p:ext uri="{BB962C8B-B14F-4D97-AF65-F5344CB8AC3E}">
-        <p14:creationId xmlns:p14="http://schemas.microsoft.com/office/powerpoint/2010/main" val="918770174"/>
+        <p14:creationId xmlns:p14="http://schemas.microsoft.com/office/powerpoint/2010/main" val="1106253144"/>
       </p:ext>
     </p:extLst>
   </p:cSld>
@@ -3735,6 +2973,13 @@
               <a:schemeClr val="lt1"/>
             </a:fontRef>
           </p:style>
+          <p:txBody>
+            <a:bodyPr/>
+            <a:lstStyle/>
+            <a:p>
+              <a:endParaRPr lang="en-US" dirty="0"/>
+            </a:p>
+          </p:txBody>
         </p:sp>
         <p:sp>
           <p:nvSpPr>
@@ -3798,6 +3043,13 @@
               <a:schemeClr val="lt1"/>
             </a:fontRef>
           </p:style>
+          <p:txBody>
+            <a:bodyPr/>
+            <a:lstStyle/>
+            <a:p>
+              <a:endParaRPr lang="en-US" dirty="0"/>
+            </a:p>
+          </p:txBody>
         </p:sp>
         <p:sp>
           <p:nvSpPr>
@@ -3839,6 +3091,13 @@
               <a:schemeClr val="lt1"/>
             </a:fontRef>
           </p:style>
+          <p:txBody>
+            <a:bodyPr/>
+            <a:lstStyle/>
+            <a:p>
+              <a:endParaRPr lang="en-US" dirty="0"/>
+            </a:p>
+          </p:txBody>
         </p:sp>
         <p:sp>
           <p:nvSpPr>
@@ -3903,6 +3162,13 @@
               <a:schemeClr val="lt1"/>
             </a:fontRef>
           </p:style>
+          <p:txBody>
+            <a:bodyPr/>
+            <a:lstStyle/>
+            <a:p>
+              <a:endParaRPr lang="en-US" dirty="0"/>
+            </a:p>
+          </p:txBody>
         </p:sp>
         <p:sp>
           <p:nvSpPr>
@@ -3968,6 +3234,13 @@
               <a:schemeClr val="lt1"/>
             </a:fontRef>
           </p:style>
+          <p:txBody>
+            <a:bodyPr/>
+            <a:lstStyle/>
+            <a:p>
+              <a:endParaRPr lang="en-US" dirty="0"/>
+            </a:p>
+          </p:txBody>
         </p:sp>
         <p:sp>
           <p:nvSpPr>
@@ -4031,6 +3304,13 @@
               <a:schemeClr val="lt1"/>
             </a:fontRef>
           </p:style>
+          <p:txBody>
+            <a:bodyPr/>
+            <a:lstStyle/>
+            <a:p>
+              <a:endParaRPr lang="en-US" dirty="0"/>
+            </a:p>
+          </p:txBody>
         </p:sp>
         <p:sp>
           <p:nvSpPr>
@@ -4072,6 +3352,13 @@
               <a:schemeClr val="lt1"/>
             </a:fontRef>
           </p:style>
+          <p:txBody>
+            <a:bodyPr/>
+            <a:lstStyle/>
+            <a:p>
+              <a:endParaRPr lang="en-US" dirty="0"/>
+            </a:p>
+          </p:txBody>
         </p:sp>
         <p:sp>
           <p:nvSpPr>
@@ -4113,6 +3400,13 @@
               <a:schemeClr val="lt1"/>
             </a:fontRef>
           </p:style>
+          <p:txBody>
+            <a:bodyPr/>
+            <a:lstStyle/>
+            <a:p>
+              <a:endParaRPr lang="en-US" dirty="0"/>
+            </a:p>
+          </p:txBody>
         </p:sp>
       </p:grpSp>
       <p:sp>
@@ -4290,7 +3584,7 @@
           <a:p>
             <a:fld id="{B1DF5501-EE91-4443-9D3B-24E6F28D34E2}" type="datetime1">
               <a:rPr lang="en-US" smtClean="0"/>
-              <a:t>4/16/2024</a:t>
+              <a:t>5/18/2026</a:t>
             </a:fld>
             <a:endParaRPr lang="en-US" dirty="0"/>
           </a:p>
@@ -4556,7 +3850,7 @@
           <a:p>
             <a:fld id="{E954E1E9-8456-43AD-BA28-861520D256B9}" type="datetime1">
               <a:rPr lang="en-US" smtClean="0"/>
-              <a:t>4/16/2024</a:t>
+              <a:t>5/18/2026</a:t>
             </a:fld>
             <a:endParaRPr lang="en-US" dirty="0"/>
           </a:p>
@@ -4874,7 +4168,7 @@
           <a:p>
             <a:fld id="{FAF31E0C-AAFD-4E63-B3AE-16CD757951F4}" type="datetime1">
               <a:rPr lang="en-US" smtClean="0"/>
-              <a:t>4/16/2024</a:t>
+              <a:t>5/18/2026</a:t>
             </a:fld>
             <a:endParaRPr lang="en-US" dirty="0"/>
           </a:p>
@@ -5219,7 +4513,7 @@
           <a:p>
             <a:fld id="{000084FF-4715-4B6E-BD22-453621E5873F}" type="datetime1">
               <a:rPr lang="en-US" smtClean="0"/>
-              <a:t>4/16/2024</a:t>
+              <a:t>5/18/2026</a:t>
             </a:fld>
             <a:endParaRPr lang="en-US" dirty="0"/>
           </a:p>
@@ -5537,7 +4831,7 @@
           <a:p>
             <a:fld id="{6AC37F8D-4DF5-4AB6-A766-5A84B3D74A3B}" type="datetime1">
               <a:rPr lang="en-US" smtClean="0"/>
-              <a:t>4/16/2024</a:t>
+              <a:t>5/18/2026</a:t>
             </a:fld>
             <a:endParaRPr lang="en-US" dirty="0"/>
           </a:p>
@@ -5934,7 +5228,7 @@
           <a:p>
             <a:fld id="{1BF3CD1A-162D-40B2-9B22-9056F77C27F2}" type="datetime1">
               <a:rPr lang="en-US" smtClean="0"/>
-              <a:t>4/16/2024</a:t>
+              <a:t>5/18/2026</a:t>
             </a:fld>
             <a:endParaRPr lang="en-US" dirty="0"/>
           </a:p>
@@ -6108,7 +5402,7 @@
           <a:p>
             <a:fld id="{D42E4200-B1E5-4E39-8279-05DD69810A37}" type="datetime1">
               <a:rPr lang="en-US" smtClean="0"/>
-              <a:t>4/16/2024</a:t>
+              <a:t>5/18/2026</a:t>
             </a:fld>
             <a:endParaRPr lang="en-US" dirty="0"/>
           </a:p>
@@ -6291,7 +5585,7 @@
           <a:p>
             <a:fld id="{47CF7895-00AC-42E5-9790-7B0E3CE09DF2}" type="datetime1">
               <a:rPr lang="en-US" smtClean="0"/>
-              <a:t>4/16/2024</a:t>
+              <a:t>5/18/2026</a:t>
             </a:fld>
             <a:endParaRPr lang="en-US" dirty="0"/>
           </a:p>
@@ -6470,7 +5764,7 @@
           <a:p>
             <a:fld id="{A7119916-CD40-456D-ABE3-55F8822671F7}" type="datetime1">
               <a:rPr lang="en-US" smtClean="0"/>
-              <a:t>4/16/2024</a:t>
+              <a:t>5/18/2026</a:t>
             </a:fld>
             <a:endParaRPr lang="en-US" dirty="0"/>
           </a:p>
@@ -6720,7 +6014,7 @@
           <a:p>
             <a:fld id="{3F9A13D6-B8C2-463B-B3F7-C62E098B328E}" type="datetime1">
               <a:rPr lang="en-US" smtClean="0"/>
-              <a:t>4/16/2024</a:t>
+              <a:t>5/18/2026</a:t>
             </a:fld>
             <a:endParaRPr lang="en-US" dirty="0"/>
           </a:p>
@@ -6955,7 +6249,7 @@
           <a:p>
             <a:fld id="{D2B63420-31EE-4E4B-911C-2601B14D9FDD}" type="datetime1">
               <a:rPr lang="en-US" smtClean="0"/>
-              <a:t>4/16/2024</a:t>
+              <a:t>5/18/2026</a:t>
             </a:fld>
             <a:endParaRPr lang="en-US" dirty="0"/>
           </a:p>
@@ -7332,7 +6626,7 @@
           <a:p>
             <a:fld id="{2DD8986D-86F8-41E6-8CFF-8C91AEF92622}" type="datetime1">
               <a:rPr lang="en-US" smtClean="0"/>
-              <a:t>4/16/2024</a:t>
+              <a:t>5/18/2026</a:t>
             </a:fld>
             <a:endParaRPr lang="en-US" dirty="0"/>
           </a:p>
@@ -7458,7 +6752,7 @@
           <a:p>
             <a:fld id="{BA885161-032E-4C6A-8EDA-39D168DF18E4}" type="datetime1">
               <a:rPr lang="en-US" smtClean="0"/>
-              <a:t>4/16/2024</a:t>
+              <a:t>5/18/2026</a:t>
             </a:fld>
             <a:endParaRPr lang="en-US" dirty="0"/>
           </a:p>
@@ -7556,7 +6850,7 @@
           <a:p>
             <a:fld id="{958E6740-E523-48D9-9C4E-6F218E87BAF3}" type="datetime1">
               <a:rPr lang="en-US" smtClean="0"/>
-              <a:t>4/16/2024</a:t>
+              <a:t>5/18/2026</a:t>
             </a:fld>
             <a:endParaRPr lang="en-US" dirty="0"/>
           </a:p>
@@ -7814,7 +7108,7 @@
           <a:p>
             <a:fld id="{6121D4CA-FF09-4CB8-8D51-2613D19A0F2E}" type="datetime1">
               <a:rPr lang="en-US" smtClean="0"/>
-              <a:t>4/16/2024</a:t>
+              <a:t>5/18/2026</a:t>
             </a:fld>
             <a:endParaRPr lang="en-US" dirty="0"/>
           </a:p>
@@ -8079,7 +7373,7 @@
           <a:p>
             <a:fld id="{8C4779EA-AEA7-43B3-9B65-A77E9A890421}" type="datetime1">
               <a:rPr lang="en-US" smtClean="0"/>
-              <a:t>4/16/2024</a:t>
+              <a:t>5/18/2026</a:t>
             </a:fld>
             <a:endParaRPr lang="en-US" dirty="0"/>
           </a:p>
@@ -8315,6 +7609,13 @@
               <a:schemeClr val="lt1"/>
             </a:fontRef>
           </p:style>
+          <p:txBody>
+            <a:bodyPr/>
+            <a:lstStyle/>
+            <a:p>
+              <a:endParaRPr lang="en-US" dirty="0"/>
+            </a:p>
+          </p:txBody>
         </p:sp>
         <p:sp>
           <p:nvSpPr>
@@ -8378,6 +7679,13 @@
               <a:schemeClr val="lt1"/>
             </a:fontRef>
           </p:style>
+          <p:txBody>
+            <a:bodyPr/>
+            <a:lstStyle/>
+            <a:p>
+              <a:endParaRPr lang="en-US" dirty="0"/>
+            </a:p>
+          </p:txBody>
         </p:sp>
         <p:sp>
           <p:nvSpPr>
@@ -8419,6 +7727,13 @@
               <a:schemeClr val="lt1"/>
             </a:fontRef>
           </p:style>
+          <p:txBody>
+            <a:bodyPr/>
+            <a:lstStyle/>
+            <a:p>
+              <a:endParaRPr lang="en-US" dirty="0"/>
+            </a:p>
+          </p:txBody>
         </p:sp>
         <p:sp>
           <p:nvSpPr>
@@ -8483,6 +7798,13 @@
               <a:schemeClr val="lt1"/>
             </a:fontRef>
           </p:style>
+          <p:txBody>
+            <a:bodyPr/>
+            <a:lstStyle/>
+            <a:p>
+              <a:endParaRPr lang="en-US" dirty="0"/>
+            </a:p>
+          </p:txBody>
         </p:sp>
         <p:sp>
           <p:nvSpPr>
@@ -8548,6 +7870,13 @@
               <a:schemeClr val="lt1"/>
             </a:fontRef>
           </p:style>
+          <p:txBody>
+            <a:bodyPr/>
+            <a:lstStyle/>
+            <a:p>
+              <a:endParaRPr lang="en-US" dirty="0"/>
+            </a:p>
+          </p:txBody>
         </p:sp>
         <p:sp>
           <p:nvSpPr>
@@ -8611,6 +7940,13 @@
               <a:schemeClr val="lt1"/>
             </a:fontRef>
           </p:style>
+          <p:txBody>
+            <a:bodyPr/>
+            <a:lstStyle/>
+            <a:p>
+              <a:endParaRPr lang="en-US" dirty="0"/>
+            </a:p>
+          </p:txBody>
         </p:sp>
         <p:sp>
           <p:nvSpPr>
@@ -8652,6 +7988,13 @@
               <a:schemeClr val="lt1"/>
             </a:fontRef>
           </p:style>
+          <p:txBody>
+            <a:bodyPr/>
+            <a:lstStyle/>
+            <a:p>
+              <a:endParaRPr lang="en-US" dirty="0"/>
+            </a:p>
+          </p:txBody>
         </p:sp>
         <p:sp>
           <p:nvSpPr>
@@ -8693,6 +8036,13 @@
               <a:schemeClr val="lt1"/>
             </a:fontRef>
           </p:style>
+          <p:txBody>
+            <a:bodyPr/>
+            <a:lstStyle/>
+            <a:p>
+              <a:endParaRPr lang="en-US" dirty="0"/>
+            </a:p>
+          </p:txBody>
         </p:sp>
       </p:grpSp>
       <p:sp>
@@ -8825,7 +8175,7 @@
           <a:p>
             <a:fld id="{059A67F1-3EA0-4026-BE6A-31EE4E1B1DB5}" type="datetime1">
               <a:rPr lang="en-US" smtClean="0"/>
-              <a:t>4/16/2024</a:t>
+              <a:t>5/18/2026</a:t>
             </a:fld>
             <a:endParaRPr lang="en-US" dirty="0"/>
           </a:p>
@@ -9449,7 +8799,7 @@
                 <a:ea typeface="Times New Roman" panose="02020603050405020304" pitchFamily="18" charset="0"/>
                 <a:cs typeface="Times New Roman" panose="02020603050405020304" pitchFamily="18" charset="0"/>
               </a:rPr>
-              <a:t> to the Visually Impaired</a:t>
+              <a:t> to the Blind</a:t>
             </a:r>
             <a:br>
               <a:rPr lang="en-US" sz="6000" kern="1400" spc="-50" dirty="0">
@@ -9579,7 +8929,7 @@
                 <a:tabLst/>
                 <a:defRPr/>
               </a:pPr>
-              <a:t>4/16/2024</a:t>
+              <a:t>5/18/2026</a:t>
             </a:fld>
             <a:endParaRPr kumimoji="0" lang="en-US" sz="900" b="0" i="0" u="none" strike="noStrike" kern="1200" cap="none" spc="0" normalizeH="0" baseline="0" noProof="0" dirty="0">
               <a:ln>
@@ -9784,7 +9134,7 @@
           <p:cNvPr id="2" name="Title 1">
             <a:extLst>
               <a:ext uri="{FF2B5EF4-FFF2-40B4-BE49-F238E27FC236}">
-                <a16:creationId xmlns:a16="http://schemas.microsoft.com/office/drawing/2014/main" id="{FC423A4E-F16B-EA79-5B13-E9A4FF68619C}"/>
+                <a16:creationId xmlns:a16="http://schemas.microsoft.com/office/drawing/2014/main" id="{483BDD31-DFE4-531C-9AC2-9E43B6DB1A9A}"/>
               </a:ext>
             </a:extLst>
           </p:cNvPr>
@@ -9795,15 +9145,190 @@
             <p:ph type="title"/>
           </p:nvPr>
         </p:nvSpPr>
-        <p:spPr/>
+        <p:spPr>
+          <a:xfrm>
+            <a:off x="677334" y="609600"/>
+            <a:ext cx="8596668" cy="1113945"/>
+          </a:xfrm>
+        </p:spPr>
         <p:txBody>
           <a:bodyPr/>
           <a:lstStyle/>
           <a:p>
             <a:r>
               <a:rPr lang="en-US" dirty="0"/>
-              <a:t>Standard turtle graphical output</a:t>
-            </a:r>
+              <a:t>Text output – send  to Braille embosser</a:t>
+            </a:r>
+          </a:p>
+        </p:txBody>
+      </p:sp>
+      <p:sp>
+        <p:nvSpPr>
+          <p:cNvPr id="3" name="Content Placeholder 2">
+            <a:extLst>
+              <a:ext uri="{FF2B5EF4-FFF2-40B4-BE49-F238E27FC236}">
+                <a16:creationId xmlns:a16="http://schemas.microsoft.com/office/drawing/2014/main" id="{FB648362-6E44-7494-163C-3DA3DD6B0D57}"/>
+              </a:ext>
+            </a:extLst>
+          </p:cNvPr>
+          <p:cNvSpPr>
+            <a:spLocks noGrp="1"/>
+          </p:cNvSpPr>
+          <p:nvPr>
+            <p:ph idx="1"/>
+          </p:nvPr>
+        </p:nvSpPr>
+        <p:spPr>
+          <a:xfrm>
+            <a:off x="677334" y="1273629"/>
+            <a:ext cx="9070823" cy="4974771"/>
+          </a:xfrm>
+        </p:spPr>
+        <p:txBody>
+          <a:bodyPr>
+            <a:normAutofit fontScale="62500" lnSpcReduction="20000"/>
+          </a:bodyPr>
+          <a:lstStyle/>
+          <a:p>
+            <a:pPr marL="0" indent="0">
+              <a:buNone/>
+            </a:pPr>
+            <a:r>
+              <a:rPr lang="en-US" sz="3600" dirty="0">
+                <a:latin typeface="Courier New" panose="02070309020205020404" pitchFamily="49" charset="0"/>
+                <a:cs typeface="Courier New" panose="02070309020205020404" pitchFamily="49" charset="0"/>
+              </a:rPr>
+              <a:t>File:show_square_loop_colors_braille.py__Date:2026-05-14_21:21__User:Owner</a:t>
+            </a:r>
+          </a:p>
+          <a:p>
+            <a:pPr marL="0" indent="0">
+              <a:buNone/>
+            </a:pPr>
+            <a:r>
+              <a:rPr lang="en-US" sz="3600" dirty="0">
+                <a:latin typeface="Courier New" panose="02070309020205020404" pitchFamily="49" charset="0"/>
+                <a:cs typeface="Courier New" panose="02070309020205020404" pitchFamily="49" charset="0"/>
+              </a:rPr>
+              <a:t>,,,ggrrrrrrrrooo</a:t>
+            </a:r>
+          </a:p>
+          <a:p>
+            <a:pPr marL="0" indent="0">
+              <a:buNone/>
+            </a:pPr>
+            <a:r>
+              <a:rPr lang="en-US" sz="3600" dirty="0">
+                <a:latin typeface="Courier New" panose="02070309020205020404" pitchFamily="49" charset="0"/>
+                <a:cs typeface="Courier New" panose="02070309020205020404" pitchFamily="49" charset="0"/>
+              </a:rPr>
+              <a:t>,,ggggrrrrrrrooo</a:t>
+            </a:r>
+          </a:p>
+          <a:p>
+            <a:pPr marL="0" indent="0">
+              <a:buNone/>
+            </a:pPr>
+            <a:r>
+              <a:rPr lang="en-US" sz="3600" dirty="0">
+                <a:latin typeface="Courier New" panose="02070309020205020404" pitchFamily="49" charset="0"/>
+                <a:cs typeface="Courier New" panose="02070309020205020404" pitchFamily="49" charset="0"/>
+              </a:rPr>
+              <a:t>,,ggggrrrrrrrooo</a:t>
+            </a:r>
+          </a:p>
+          <a:p>
+            <a:pPr marL="0" indent="0">
+              <a:buNone/>
+            </a:pPr>
+            <a:r>
+              <a:rPr lang="en-US" sz="3600" dirty="0">
+                <a:latin typeface="Courier New" panose="02070309020205020404" pitchFamily="49" charset="0"/>
+                <a:cs typeface="Courier New" panose="02070309020205020404" pitchFamily="49" charset="0"/>
+              </a:rPr>
+              <a:t>,,gggg,,,,,,,ooo</a:t>
+            </a:r>
+          </a:p>
+          <a:p>
+            <a:pPr marL="0" indent="0">
+              <a:buNone/>
+            </a:pPr>
+            <a:r>
+              <a:rPr lang="en-US" sz="3600" dirty="0">
+                <a:latin typeface="Courier New" panose="02070309020205020404" pitchFamily="49" charset="0"/>
+                <a:cs typeface="Courier New" panose="02070309020205020404" pitchFamily="49" charset="0"/>
+              </a:rPr>
+              <a:t>,,gggg,,,,,,,ooo</a:t>
+            </a:r>
+          </a:p>
+          <a:p>
+            <a:pPr marL="0" indent="0">
+              <a:buNone/>
+            </a:pPr>
+            <a:r>
+              <a:rPr lang="en-US" sz="3600" dirty="0">
+                <a:latin typeface="Courier New" panose="02070309020205020404" pitchFamily="49" charset="0"/>
+                <a:cs typeface="Courier New" panose="02070309020205020404" pitchFamily="49" charset="0"/>
+              </a:rPr>
+              <a:t>,,gggg,,,,,,,ooo</a:t>
+            </a:r>
+          </a:p>
+          <a:p>
+            <a:pPr marL="0" indent="0">
+              <a:buNone/>
+            </a:pPr>
+            <a:r>
+              <a:rPr lang="en-US" sz="3600" dirty="0">
+                <a:latin typeface="Courier New" panose="02070309020205020404" pitchFamily="49" charset="0"/>
+                <a:cs typeface="Courier New" panose="02070309020205020404" pitchFamily="49" charset="0"/>
+              </a:rPr>
+              <a:t>,,gggg,,,,,,,ooo</a:t>
+            </a:r>
+          </a:p>
+          <a:p>
+            <a:pPr marL="0" indent="0">
+              <a:buNone/>
+            </a:pPr>
+            <a:r>
+              <a:rPr lang="en-US" sz="3600" dirty="0">
+                <a:latin typeface="Courier New" panose="02070309020205020404" pitchFamily="49" charset="0"/>
+                <a:cs typeface="Courier New" panose="02070309020205020404" pitchFamily="49" charset="0"/>
+              </a:rPr>
+              <a:t>,,gggg,,,,,,,ooo</a:t>
+            </a:r>
+          </a:p>
+          <a:p>
+            <a:pPr marL="0" indent="0">
+              <a:buNone/>
+            </a:pPr>
+            <a:r>
+              <a:rPr lang="en-US" sz="3600" dirty="0">
+                <a:latin typeface="Courier New" panose="02070309020205020404" pitchFamily="49" charset="0"/>
+                <a:cs typeface="Courier New" panose="02070309020205020404" pitchFamily="49" charset="0"/>
+              </a:rPr>
+              <a:t>,,ggggyyyyyyyyyy</a:t>
+            </a:r>
+          </a:p>
+          <a:p>
+            <a:pPr marL="0" indent="0">
+              <a:buNone/>
+            </a:pPr>
+            <a:r>
+              <a:rPr lang="en-US" sz="3600" dirty="0">
+                <a:latin typeface="Courier New" panose="02070309020205020404" pitchFamily="49" charset="0"/>
+                <a:cs typeface="Courier New" panose="02070309020205020404" pitchFamily="49" charset="0"/>
+              </a:rPr>
+              <a:t>,,ggggyyyyyyyyyy</a:t>
+            </a:r>
+          </a:p>
+          <a:p>
+            <a:pPr marL="0" indent="0">
+              <a:buNone/>
+            </a:pPr>
+            <a:endParaRPr lang="en-US" dirty="0">
+              <a:latin typeface="Courier New" panose="02070309020205020404" pitchFamily="49" charset="0"/>
+              <a:cs typeface="Courier New" panose="02070309020205020404" pitchFamily="49" charset="0"/>
+            </a:endParaRPr>
           </a:p>
         </p:txBody>
       </p:sp>
@@ -9812,7 +9337,7 @@
           <p:cNvPr id="4" name="Date Placeholder 3">
             <a:extLst>
               <a:ext uri="{FF2B5EF4-FFF2-40B4-BE49-F238E27FC236}">
-                <a16:creationId xmlns:a16="http://schemas.microsoft.com/office/drawing/2014/main" id="{6ECDE496-13D9-1842-3FA3-4BA241CA6373}"/>
+                <a16:creationId xmlns:a16="http://schemas.microsoft.com/office/drawing/2014/main" id="{5E6CFB7D-3600-5E75-1A79-97F525CDB963}"/>
               </a:ext>
             </a:extLst>
           </p:cNvPr>
@@ -9830,7 +9355,7 @@
           <a:p>
             <a:fld id="{A7119916-CD40-456D-ABE3-55F8822671F7}" type="datetime1">
               <a:rPr lang="en-US" smtClean="0"/>
-              <a:t>4/16/2024</a:t>
+              <a:t>5/18/2026</a:t>
             </a:fld>
             <a:endParaRPr lang="en-US" dirty="0"/>
           </a:p>
@@ -9841,7 +9366,7 @@
           <p:cNvPr id="5" name="Footer Placeholder 4">
             <a:extLst>
               <a:ext uri="{FF2B5EF4-FFF2-40B4-BE49-F238E27FC236}">
-                <a16:creationId xmlns:a16="http://schemas.microsoft.com/office/drawing/2014/main" id="{FEA64794-899A-6AA3-482D-A65536BC6F6B}"/>
+                <a16:creationId xmlns:a16="http://schemas.microsoft.com/office/drawing/2014/main" id="{B1EA2737-4636-4ECC-29AA-33510D43F2D2}"/>
               </a:ext>
             </a:extLst>
           </p:cNvPr>
@@ -9869,7 +9394,7 @@
           <p:cNvPr id="6" name="Slide Number Placeholder 5">
             <a:extLst>
               <a:ext uri="{FF2B5EF4-FFF2-40B4-BE49-F238E27FC236}">
-                <a16:creationId xmlns:a16="http://schemas.microsoft.com/office/drawing/2014/main" id="{E0F2AE74-CBEA-82D2-3DA2-56AF7339BFBC}"/>
+                <a16:creationId xmlns:a16="http://schemas.microsoft.com/office/drawing/2014/main" id="{B1688104-97B6-3D88-8357-50AF1CC1DEBB}"/>
               </a:ext>
             </a:extLst>
           </p:cNvPr>
@@ -9893,39 +9418,10 @@
           </a:p>
         </p:txBody>
       </p:sp>
-      <p:pic>
-        <p:nvPicPr>
-          <p:cNvPr id="11" name="Content Placeholder 10">
-            <a:extLst>
-              <a:ext uri="{FF2B5EF4-FFF2-40B4-BE49-F238E27FC236}">
-                <a16:creationId xmlns:a16="http://schemas.microsoft.com/office/drawing/2014/main" id="{8289762F-9E75-5F5A-8C81-51BC327309F9}"/>
-              </a:ext>
-            </a:extLst>
-          </p:cNvPr>
-          <p:cNvPicPr>
-            <a:picLocks noGrp="1" noChangeAspect="1"/>
-          </p:cNvPicPr>
-          <p:nvPr>
-            <p:ph idx="1"/>
-          </p:nvPr>
-        </p:nvPicPr>
-        <p:blipFill>
-          <a:blip r:embed="rId2"/>
-          <a:stretch>
-            <a:fillRect/>
-          </a:stretch>
-        </p:blipFill>
-        <p:spPr>
-          <a:xfrm>
-            <a:off x="1862705" y="1399430"/>
-            <a:ext cx="5349561" cy="4642595"/>
-          </a:xfrm>
-        </p:spPr>
-      </p:pic>
     </p:spTree>
     <p:extLst>
       <p:ext uri="{BB962C8B-B14F-4D97-AF65-F5344CB8AC3E}">
-        <p14:creationId xmlns:p14="http://schemas.microsoft.com/office/powerpoint/2010/main" val="1432343688"/>
+        <p14:creationId xmlns:p14="http://schemas.microsoft.com/office/powerpoint/2010/main" val="3842367921"/>
       </p:ext>
     </p:extLst>
   </p:cSld>
@@ -9957,277 +9453,6 @@
           <p:cNvPr id="2" name="Title 1">
             <a:extLst>
               <a:ext uri="{FF2B5EF4-FFF2-40B4-BE49-F238E27FC236}">
-                <a16:creationId xmlns:a16="http://schemas.microsoft.com/office/drawing/2014/main" id="{483BDD31-DFE4-531C-9AC2-9E43B6DB1A9A}"/>
-              </a:ext>
-            </a:extLst>
-          </p:cNvPr>
-          <p:cNvSpPr>
-            <a:spLocks noGrp="1"/>
-          </p:cNvSpPr>
-          <p:nvPr>
-            <p:ph type="title"/>
-          </p:nvPr>
-        </p:nvSpPr>
-        <p:spPr>
-          <a:xfrm>
-            <a:off x="677334" y="609600"/>
-            <a:ext cx="8596668" cy="1113945"/>
-          </a:xfrm>
-        </p:spPr>
-        <p:txBody>
-          <a:bodyPr/>
-          <a:lstStyle/>
-          <a:p>
-            <a:r>
-              <a:rPr lang="en-US" dirty="0"/>
-              <a:t>Text output – send  to Braille embosser</a:t>
-            </a:r>
-          </a:p>
-        </p:txBody>
-      </p:sp>
-      <p:sp>
-        <p:nvSpPr>
-          <p:cNvPr id="3" name="Content Placeholder 2">
-            <a:extLst>
-              <a:ext uri="{FF2B5EF4-FFF2-40B4-BE49-F238E27FC236}">
-                <a16:creationId xmlns:a16="http://schemas.microsoft.com/office/drawing/2014/main" id="{FB648362-6E44-7494-163C-3DA3DD6B0D57}"/>
-              </a:ext>
-            </a:extLst>
-          </p:cNvPr>
-          <p:cNvSpPr>
-            <a:spLocks noGrp="1"/>
-          </p:cNvSpPr>
-          <p:nvPr>
-            <p:ph idx="1"/>
-          </p:nvPr>
-        </p:nvSpPr>
-        <p:spPr>
-          <a:xfrm>
-            <a:off x="677334" y="1590261"/>
-            <a:ext cx="8596668" cy="4508389"/>
-          </a:xfrm>
-        </p:spPr>
-        <p:txBody>
-          <a:bodyPr>
-            <a:normAutofit lnSpcReduction="10000"/>
-          </a:bodyPr>
-          <a:lstStyle/>
-          <a:p>
-            <a:pPr marL="0" indent="0">
-              <a:buNone/>
-            </a:pPr>
-            <a:r>
-              <a:rPr lang="en-US" sz="3600" dirty="0">
-                <a:latin typeface="Courier New" panose="02070309020205020404" pitchFamily="49" charset="0"/>
-                <a:cs typeface="Courier New" panose="02070309020205020404" pitchFamily="49" charset="0"/>
-              </a:rPr>
-              <a:t>,,gggggggggggg</a:t>
-            </a:r>
-          </a:p>
-          <a:p>
-            <a:pPr marL="0" indent="0">
-              <a:buNone/>
-            </a:pPr>
-            <a:r>
-              <a:rPr lang="en-US" sz="3600" dirty="0">
-                <a:latin typeface="Courier New" panose="02070309020205020404" pitchFamily="49" charset="0"/>
-                <a:cs typeface="Courier New" panose="02070309020205020404" pitchFamily="49" charset="0"/>
-              </a:rPr>
-              <a:t>,,,g,,,,,,,,gg</a:t>
-            </a:r>
-          </a:p>
-          <a:p>
-            <a:pPr marL="0" indent="0">
-              <a:buNone/>
-            </a:pPr>
-            <a:r>
-              <a:rPr lang="en-US" sz="3600" dirty="0">
-                <a:latin typeface="Courier New" panose="02070309020205020404" pitchFamily="49" charset="0"/>
-                <a:cs typeface="Courier New" panose="02070309020205020404" pitchFamily="49" charset="0"/>
-              </a:rPr>
-              <a:t>,,,g,,,,,,,,gg</a:t>
-            </a:r>
-          </a:p>
-          <a:p>
-            <a:pPr marL="0" indent="0">
-              <a:buNone/>
-            </a:pPr>
-            <a:r>
-              <a:rPr lang="en-US" sz="3600" dirty="0">
-                <a:latin typeface="Courier New" panose="02070309020205020404" pitchFamily="49" charset="0"/>
-                <a:cs typeface="Courier New" panose="02070309020205020404" pitchFamily="49" charset="0"/>
-              </a:rPr>
-              <a:t>,,,g,,,,,,,,gg</a:t>
-            </a:r>
-          </a:p>
-          <a:p>
-            <a:pPr marL="0" indent="0">
-              <a:buNone/>
-            </a:pPr>
-            <a:r>
-              <a:rPr lang="en-US" sz="3600" dirty="0">
-                <a:latin typeface="Courier New" panose="02070309020205020404" pitchFamily="49" charset="0"/>
-                <a:cs typeface="Courier New" panose="02070309020205020404" pitchFamily="49" charset="0"/>
-              </a:rPr>
-              <a:t>,,,g,,,,,,,,gg</a:t>
-            </a:r>
-          </a:p>
-          <a:p>
-            <a:pPr marL="0" indent="0">
-              <a:buNone/>
-            </a:pPr>
-            <a:r>
-              <a:rPr lang="en-US" sz="3600" dirty="0">
-                <a:latin typeface="Courier New" panose="02070309020205020404" pitchFamily="49" charset="0"/>
-                <a:cs typeface="Courier New" panose="02070309020205020404" pitchFamily="49" charset="0"/>
-              </a:rPr>
-              <a:t>,,,g,,,,,,,,gg</a:t>
-            </a:r>
-          </a:p>
-          <a:p>
-            <a:pPr marL="0" indent="0">
-              <a:buNone/>
-            </a:pPr>
-            <a:r>
-              <a:rPr lang="en-US" sz="3600" dirty="0">
-                <a:latin typeface="Courier New" panose="02070309020205020404" pitchFamily="49" charset="0"/>
-                <a:cs typeface="Courier New" panose="02070309020205020404" pitchFamily="49" charset="0"/>
-              </a:rPr>
-              <a:t>,,gggggggggggg</a:t>
-            </a:r>
-          </a:p>
-          <a:p>
-            <a:pPr marL="0" indent="0">
-              <a:buNone/>
-            </a:pPr>
-            <a:endParaRPr lang="en-US" dirty="0">
-              <a:latin typeface="Courier New" panose="02070309020205020404" pitchFamily="49" charset="0"/>
-              <a:cs typeface="Courier New" panose="02070309020205020404" pitchFamily="49" charset="0"/>
-            </a:endParaRPr>
-          </a:p>
-        </p:txBody>
-      </p:sp>
-      <p:sp>
-        <p:nvSpPr>
-          <p:cNvPr id="4" name="Date Placeholder 3">
-            <a:extLst>
-              <a:ext uri="{FF2B5EF4-FFF2-40B4-BE49-F238E27FC236}">
-                <a16:creationId xmlns:a16="http://schemas.microsoft.com/office/drawing/2014/main" id="{5E6CFB7D-3600-5E75-1A79-97F525CDB963}"/>
-              </a:ext>
-            </a:extLst>
-          </p:cNvPr>
-          <p:cNvSpPr>
-            <a:spLocks noGrp="1"/>
-          </p:cNvSpPr>
-          <p:nvPr>
-            <p:ph type="dt" sz="half" idx="10"/>
-          </p:nvPr>
-        </p:nvSpPr>
-        <p:spPr/>
-        <p:txBody>
-          <a:bodyPr/>
-          <a:lstStyle/>
-          <a:p>
-            <a:fld id="{A7119916-CD40-456D-ABE3-55F8822671F7}" type="datetime1">
-              <a:rPr lang="en-US" smtClean="0"/>
-              <a:t>4/16/2024</a:t>
-            </a:fld>
-            <a:endParaRPr lang="en-US" dirty="0"/>
-          </a:p>
-        </p:txBody>
-      </p:sp>
-      <p:sp>
-        <p:nvSpPr>
-          <p:cNvPr id="5" name="Footer Placeholder 4">
-            <a:extLst>
-              <a:ext uri="{FF2B5EF4-FFF2-40B4-BE49-F238E27FC236}">
-                <a16:creationId xmlns:a16="http://schemas.microsoft.com/office/drawing/2014/main" id="{B1EA2737-4636-4ECC-29AA-33510D43F2D2}"/>
-              </a:ext>
-            </a:extLst>
-          </p:cNvPr>
-          <p:cNvSpPr>
-            <a:spLocks noGrp="1"/>
-          </p:cNvSpPr>
-          <p:nvPr>
-            <p:ph type="ftr" sz="quarter" idx="11"/>
-          </p:nvPr>
-        </p:nvSpPr>
-        <p:spPr/>
-        <p:txBody>
-          <a:bodyPr/>
-          <a:lstStyle/>
-          <a:p>
-            <a:r>
-              <a:rPr lang="en-US" dirty="0"/>
-              <a:t>raysmith@alum.mit.edu</a:t>
-            </a:r>
-          </a:p>
-        </p:txBody>
-      </p:sp>
-      <p:sp>
-        <p:nvSpPr>
-          <p:cNvPr id="6" name="Slide Number Placeholder 5">
-            <a:extLst>
-              <a:ext uri="{FF2B5EF4-FFF2-40B4-BE49-F238E27FC236}">
-                <a16:creationId xmlns:a16="http://schemas.microsoft.com/office/drawing/2014/main" id="{B1688104-97B6-3D88-8357-50AF1CC1DEBB}"/>
-              </a:ext>
-            </a:extLst>
-          </p:cNvPr>
-          <p:cNvSpPr>
-            <a:spLocks noGrp="1"/>
-          </p:cNvSpPr>
-          <p:nvPr>
-            <p:ph type="sldNum" sz="quarter" idx="12"/>
-          </p:nvPr>
-        </p:nvSpPr>
-        <p:spPr/>
-        <p:txBody>
-          <a:bodyPr/>
-          <a:lstStyle/>
-          <a:p>
-            <a:fld id="{6D22F896-40B5-4ADD-8801-0D06FADFA095}" type="slidenum">
-              <a:rPr lang="en-US" smtClean="0"/>
-              <a:t>11</a:t>
-            </a:fld>
-            <a:endParaRPr lang="en-US" dirty="0"/>
-          </a:p>
-        </p:txBody>
-      </p:sp>
-    </p:spTree>
-    <p:extLst>
-      <p:ext uri="{BB962C8B-B14F-4D97-AF65-F5344CB8AC3E}">
-        <p14:creationId xmlns:p14="http://schemas.microsoft.com/office/powerpoint/2010/main" val="3842367921"/>
-      </p:ext>
-    </p:extLst>
-  </p:cSld>
-  <p:clrMapOvr>
-    <a:masterClrMapping/>
-  </p:clrMapOvr>
-</p:sld>
-</file>
-
-<file path=ppt/slides/slide12.xml><?xml version="1.0" encoding="utf-8"?>
-<p:sld xmlns:a="http://schemas.openxmlformats.org/drawingml/2006/main" xmlns:r="http://schemas.openxmlformats.org/officeDocument/2006/relationships" xmlns:p="http://schemas.openxmlformats.org/presentationml/2006/main">
-  <p:cSld>
-    <p:spTree>
-      <p:nvGrpSpPr>
-        <p:cNvPr id="1" name=""/>
-        <p:cNvGrpSpPr/>
-        <p:nvPr/>
-      </p:nvGrpSpPr>
-      <p:grpSpPr>
-        <a:xfrm>
-          <a:off x="0" y="0"/>
-          <a:ext cx="0" cy="0"/>
-          <a:chOff x="0" y="0"/>
-          <a:chExt cx="0" cy="0"/>
-        </a:xfrm>
-      </p:grpSpPr>
-      <p:sp>
-        <p:nvSpPr>
-          <p:cNvPr id="2" name="Title 1">
-            <a:extLst>
-              <a:ext uri="{FF2B5EF4-FFF2-40B4-BE49-F238E27FC236}">
                 <a16:creationId xmlns:a16="http://schemas.microsoft.com/office/drawing/2014/main" id="{4C738398-DAA7-2BCE-76F4-AF36E34176F5}"/>
               </a:ext>
             </a:extLst>
@@ -10356,7 +9581,7 @@
           <a:p>
             <a:fld id="{A7119916-CD40-456D-ABE3-55F8822671F7}" type="datetime1">
               <a:rPr lang="en-US" smtClean="0"/>
-              <a:t>4/16/2024</a:t>
+              <a:t>5/18/2026</a:t>
             </a:fld>
             <a:endParaRPr lang="en-US" dirty="0"/>
           </a:p>
@@ -10384,10 +9609,9 @@
           <a:lstStyle/>
           <a:p>
             <a:r>
-              <a:rPr lang="en-US"/>
+              <a:rPr lang="en-US" dirty="0"/>
               <a:t>raysmith@alum.mit.edu</a:t>
             </a:r>
-            <a:endParaRPr lang="en-US" dirty="0"/>
           </a:p>
         </p:txBody>
       </p:sp>
@@ -10414,7 +9638,7 @@
           <a:p>
             <a:fld id="{6D22F896-40B5-4ADD-8801-0D06FADFA095}" type="slidenum">
               <a:rPr lang="en-US" smtClean="0"/>
-              <a:t>12</a:t>
+              <a:t>11</a:t>
             </a:fld>
             <a:endParaRPr lang="en-US" dirty="0"/>
           </a:p>
@@ -10527,6 +9751,231 @@
 </p:sld>
 </file>
 
+<file path=ppt/slides/slide12.xml><?xml version="1.0" encoding="utf-8"?>
+<p:sld xmlns:a="http://schemas.openxmlformats.org/drawingml/2006/main" xmlns:r="http://schemas.openxmlformats.org/officeDocument/2006/relationships" xmlns:p="http://schemas.openxmlformats.org/presentationml/2006/main">
+  <p:cSld>
+    <p:spTree>
+      <p:nvGrpSpPr>
+        <p:cNvPr id="1" name=""/>
+        <p:cNvGrpSpPr/>
+        <p:nvPr/>
+      </p:nvGrpSpPr>
+      <p:grpSpPr>
+        <a:xfrm>
+          <a:off x="0" y="0"/>
+          <a:ext cx="0" cy="0"/>
+          <a:chOff x="0" y="0"/>
+          <a:chExt cx="0" cy="0"/>
+        </a:xfrm>
+      </p:grpSpPr>
+      <p:sp>
+        <p:nvSpPr>
+          <p:cNvPr id="2" name="Title 1">
+            <a:extLst>
+              <a:ext uri="{FF2B5EF4-FFF2-40B4-BE49-F238E27FC236}">
+                <a16:creationId xmlns:a16="http://schemas.microsoft.com/office/drawing/2014/main" id="{E3C170C0-E196-AC4F-63AD-114D4391628B}"/>
+              </a:ext>
+            </a:extLst>
+          </p:cNvPr>
+          <p:cNvSpPr>
+            <a:spLocks noGrp="1"/>
+          </p:cNvSpPr>
+          <p:nvPr>
+            <p:ph type="title"/>
+          </p:nvPr>
+        </p:nvSpPr>
+        <p:spPr/>
+        <p:txBody>
+          <a:bodyPr/>
+          <a:lstStyle/>
+          <a:p>
+            <a:r>
+              <a:rPr lang="en-US" dirty="0"/>
+              <a:t>Braille usage steps</a:t>
+            </a:r>
+          </a:p>
+        </p:txBody>
+      </p:sp>
+      <p:sp>
+        <p:nvSpPr>
+          <p:cNvPr id="3" name="Content Placeholder 2">
+            <a:extLst>
+              <a:ext uri="{FF2B5EF4-FFF2-40B4-BE49-F238E27FC236}">
+                <a16:creationId xmlns:a16="http://schemas.microsoft.com/office/drawing/2014/main" id="{17F5FD6D-57CE-4440-1B6A-D98496F81BD3}"/>
+              </a:ext>
+            </a:extLst>
+          </p:cNvPr>
+          <p:cNvSpPr>
+            <a:spLocks noGrp="1"/>
+          </p:cNvSpPr>
+          <p:nvPr>
+            <p:ph idx="1"/>
+          </p:nvPr>
+        </p:nvSpPr>
+        <p:spPr/>
+        <p:txBody>
+          <a:bodyPr>
+            <a:normAutofit/>
+          </a:bodyPr>
+          <a:lstStyle/>
+          <a:p>
+            <a:r>
+              <a:rPr lang="en-US" sz="4000" dirty="0">
+                <a:solidFill>
+                  <a:schemeClr val="accent1"/>
+                </a:solidFill>
+              </a:rPr>
+              <a:t>Copy text</a:t>
+            </a:r>
+          </a:p>
+          <a:p>
+            <a:r>
+              <a:rPr lang="en-US" sz="4000" dirty="0">
+                <a:solidFill>
+                  <a:schemeClr val="accent1"/>
+                </a:solidFill>
+              </a:rPr>
+              <a:t>Transmit Braille machine</a:t>
+            </a:r>
+          </a:p>
+          <a:p>
+            <a:r>
+              <a:rPr lang="en-US" sz="4000" dirty="0">
+                <a:solidFill>
+                  <a:schemeClr val="accent1"/>
+                </a:solidFill>
+              </a:rPr>
+              <a:t>Retrieve Braille</a:t>
+            </a:r>
+          </a:p>
+          <a:p>
+            <a:r>
+              <a:rPr lang="en-US" sz="4000" dirty="0">
+                <a:solidFill>
+                  <a:schemeClr val="accent1"/>
+                </a:solidFill>
+              </a:rPr>
+              <a:t>Slows viewing </a:t>
+            </a:r>
+            <a:r>
+              <a:rPr lang="en-US" sz="4000" dirty="0">
+                <a:solidFill>
+                  <a:schemeClr val="accent1"/>
+                </a:solidFill>
+                <a:sym typeface="Wingdings" panose="05000000000000000000" pitchFamily="2" charset="2"/>
+              </a:rPr>
+              <a:t> reduces impact</a:t>
+            </a:r>
+            <a:endParaRPr lang="en-US" sz="4000" dirty="0">
+              <a:solidFill>
+                <a:schemeClr val="accent1"/>
+              </a:solidFill>
+            </a:endParaRPr>
+          </a:p>
+          <a:p>
+            <a:endParaRPr lang="en-US" sz="3200" dirty="0"/>
+          </a:p>
+        </p:txBody>
+      </p:sp>
+      <p:sp>
+        <p:nvSpPr>
+          <p:cNvPr id="4" name="Date Placeholder 3">
+            <a:extLst>
+              <a:ext uri="{FF2B5EF4-FFF2-40B4-BE49-F238E27FC236}">
+                <a16:creationId xmlns:a16="http://schemas.microsoft.com/office/drawing/2014/main" id="{06D9C378-DEEF-913F-A2E9-B49F0F4DC996}"/>
+              </a:ext>
+            </a:extLst>
+          </p:cNvPr>
+          <p:cNvSpPr>
+            <a:spLocks noGrp="1"/>
+          </p:cNvSpPr>
+          <p:nvPr>
+            <p:ph type="dt" sz="half" idx="10"/>
+          </p:nvPr>
+        </p:nvSpPr>
+        <p:spPr/>
+        <p:txBody>
+          <a:bodyPr/>
+          <a:lstStyle/>
+          <a:p>
+            <a:fld id="{A7119916-CD40-456D-ABE3-55F8822671F7}" type="datetime1">
+              <a:rPr lang="en-US" smtClean="0"/>
+              <a:t>5/18/2026</a:t>
+            </a:fld>
+            <a:endParaRPr lang="en-US" dirty="0"/>
+          </a:p>
+        </p:txBody>
+      </p:sp>
+      <p:sp>
+        <p:nvSpPr>
+          <p:cNvPr id="5" name="Footer Placeholder 4">
+            <a:extLst>
+              <a:ext uri="{FF2B5EF4-FFF2-40B4-BE49-F238E27FC236}">
+                <a16:creationId xmlns:a16="http://schemas.microsoft.com/office/drawing/2014/main" id="{589AF76C-F0C9-D37C-4906-0916A7BF8FF6}"/>
+              </a:ext>
+            </a:extLst>
+          </p:cNvPr>
+          <p:cNvSpPr>
+            <a:spLocks noGrp="1"/>
+          </p:cNvSpPr>
+          <p:nvPr>
+            <p:ph type="ftr" sz="quarter" idx="11"/>
+          </p:nvPr>
+        </p:nvSpPr>
+        <p:spPr/>
+        <p:txBody>
+          <a:bodyPr/>
+          <a:lstStyle/>
+          <a:p>
+            <a:r>
+              <a:rPr lang="en-US" dirty="0"/>
+              <a:t>raysmith@alum.mit.edu</a:t>
+            </a:r>
+          </a:p>
+        </p:txBody>
+      </p:sp>
+      <p:sp>
+        <p:nvSpPr>
+          <p:cNvPr id="6" name="Slide Number Placeholder 5">
+            <a:extLst>
+              <a:ext uri="{FF2B5EF4-FFF2-40B4-BE49-F238E27FC236}">
+                <a16:creationId xmlns:a16="http://schemas.microsoft.com/office/drawing/2014/main" id="{6C5D9DB7-EA9D-EC92-F3D9-074B87DA8F1D}"/>
+              </a:ext>
+            </a:extLst>
+          </p:cNvPr>
+          <p:cNvSpPr>
+            <a:spLocks noGrp="1"/>
+          </p:cNvSpPr>
+          <p:nvPr>
+            <p:ph type="sldNum" sz="quarter" idx="12"/>
+          </p:nvPr>
+        </p:nvSpPr>
+        <p:spPr/>
+        <p:txBody>
+          <a:bodyPr/>
+          <a:lstStyle/>
+          <a:p>
+            <a:fld id="{6D22F896-40B5-4ADD-8801-0D06FADFA095}" type="slidenum">
+              <a:rPr lang="en-US" smtClean="0"/>
+              <a:t>12</a:t>
+            </a:fld>
+            <a:endParaRPr lang="en-US" dirty="0"/>
+          </a:p>
+        </p:txBody>
+      </p:sp>
+    </p:spTree>
+    <p:extLst>
+      <p:ext uri="{BB962C8B-B14F-4D97-AF65-F5344CB8AC3E}">
+        <p14:creationId xmlns:p14="http://schemas.microsoft.com/office/powerpoint/2010/main" val="6695111"/>
+      </p:ext>
+    </p:extLst>
+  </p:cSld>
+  <p:clrMapOvr>
+    <a:masterClrMapping/>
+  </p:clrMapOvr>
+</p:sld>
+</file>
+
 <file path=ppt/slides/slide13.xml><?xml version="1.0" encoding="utf-8"?>
 <p:sld xmlns:a="http://schemas.openxmlformats.org/drawingml/2006/main" xmlns:r="http://schemas.openxmlformats.org/officeDocument/2006/relationships" xmlns:p="http://schemas.openxmlformats.org/presentationml/2006/main">
   <p:cSld>
@@ -10567,7 +10016,7 @@
           <a:p>
             <a:r>
               <a:rPr lang="en-US" dirty="0"/>
-              <a:t>Braille usage steps</a:t>
+              <a:t>Hope: quick change and quick view</a:t>
             </a:r>
           </a:p>
         </p:txBody>
@@ -10598,58 +10047,47 @@
             <a:r>
               <a:rPr lang="en-US" sz="4000" dirty="0">
                 <a:solidFill>
-                  <a:schemeClr val="accent1"/>
+                  <a:srgbClr val="00B0F0"/>
                 </a:solidFill>
               </a:rPr>
-              <a:t>Copy text</a:t>
+              <a:t>square_loop.py</a:t>
             </a:r>
           </a:p>
           <a:p>
             <a:r>
               <a:rPr lang="en-US" sz="4000" dirty="0">
                 <a:solidFill>
-                  <a:schemeClr val="accent1"/>
+                  <a:srgbClr val="00B0F0"/>
                 </a:solidFill>
               </a:rPr>
-              <a:t>Transmit Braille machine</a:t>
-            </a:r>
-          </a:p>
-          <a:p>
+              <a:t>square_loop_w40.py – </a:t>
+            </a:r>
             <a:r>
               <a:rPr lang="en-US" sz="4000" dirty="0">
                 <a:solidFill>
-                  <a:schemeClr val="accent1"/>
+                  <a:schemeClr val="tx1"/>
                 </a:solidFill>
               </a:rPr>
-              <a:t>Retrieve Braille</a:t>
+              <a:t>thicken lines</a:t>
             </a:r>
           </a:p>
           <a:p>
             <a:r>
               <a:rPr lang="en-US" sz="4000" dirty="0">
                 <a:solidFill>
-                  <a:schemeClr val="accent1"/>
+                  <a:srgbClr val="00B0F0"/>
                 </a:solidFill>
               </a:rPr>
-              <a:t>Slows viewing </a:t>
+              <a:t>square_loop_colors.py – </a:t>
             </a:r>
             <a:r>
               <a:rPr lang="en-US" sz="4000" dirty="0">
                 <a:solidFill>
-                  <a:schemeClr val="accent1"/>
-                </a:solidFill>
-                <a:sym typeface="Wingdings" panose="05000000000000000000" pitchFamily="2" charset="2"/>
+                  <a:schemeClr val="tx1"/>
+                </a:solidFill>
               </a:rPr>
-              <a:t> reduces impact</a:t>
-            </a:r>
-            <a:endParaRPr lang="en-US" sz="4000" dirty="0">
-              <a:solidFill>
-                <a:schemeClr val="accent1"/>
-              </a:solidFill>
-            </a:endParaRPr>
-          </a:p>
-          <a:p>
-            <a:endParaRPr lang="en-US" sz="3200" dirty="0"/>
+              <a:t>add colors</a:t>
+            </a:r>
           </a:p>
         </p:txBody>
       </p:sp>
@@ -10676,7 +10114,7 @@
           <a:p>
             <a:fld id="{A7119916-CD40-456D-ABE3-55F8822671F7}" type="datetime1">
               <a:rPr lang="en-US" smtClean="0"/>
-              <a:t>4/16/2024</a:t>
+              <a:t>5/18/2026</a:t>
             </a:fld>
             <a:endParaRPr lang="en-US" dirty="0"/>
           </a:p>
@@ -10704,10 +10142,9 @@
           <a:lstStyle/>
           <a:p>
             <a:r>
-              <a:rPr lang="en-US"/>
+              <a:rPr lang="en-US" dirty="0"/>
               <a:t>raysmith@alum.mit.edu</a:t>
             </a:r>
-            <a:endParaRPr lang="en-US" dirty="0"/>
           </a:p>
         </p:txBody>
       </p:sp>
@@ -10743,7 +10180,7 @@
     </p:spTree>
     <p:extLst>
       <p:ext uri="{BB962C8B-B14F-4D97-AF65-F5344CB8AC3E}">
-        <p14:creationId xmlns:p14="http://schemas.microsoft.com/office/powerpoint/2010/main" val="6695111"/>
+        <p14:creationId xmlns:p14="http://schemas.microsoft.com/office/powerpoint/2010/main" val="813966894"/>
       </p:ext>
     </p:extLst>
   </p:cSld>
@@ -10775,233 +10212,6 @@
           <p:cNvPr id="2" name="Title 1">
             <a:extLst>
               <a:ext uri="{FF2B5EF4-FFF2-40B4-BE49-F238E27FC236}">
-                <a16:creationId xmlns:a16="http://schemas.microsoft.com/office/drawing/2014/main" id="{E3C170C0-E196-AC4F-63AD-114D4391628B}"/>
-              </a:ext>
-            </a:extLst>
-          </p:cNvPr>
-          <p:cNvSpPr>
-            <a:spLocks noGrp="1"/>
-          </p:cNvSpPr>
-          <p:nvPr>
-            <p:ph type="title"/>
-          </p:nvPr>
-        </p:nvSpPr>
-        <p:spPr/>
-        <p:txBody>
-          <a:bodyPr/>
-          <a:lstStyle/>
-          <a:p>
-            <a:r>
-              <a:rPr lang="en-US"/>
-              <a:t>Hope: </a:t>
-            </a:r>
-            <a:r>
-              <a:rPr lang="en-US" dirty="0"/>
-              <a:t>quick change and quick view</a:t>
-            </a:r>
-          </a:p>
-        </p:txBody>
-      </p:sp>
-      <p:sp>
-        <p:nvSpPr>
-          <p:cNvPr id="3" name="Content Placeholder 2">
-            <a:extLst>
-              <a:ext uri="{FF2B5EF4-FFF2-40B4-BE49-F238E27FC236}">
-                <a16:creationId xmlns:a16="http://schemas.microsoft.com/office/drawing/2014/main" id="{17F5FD6D-57CE-4440-1B6A-D98496F81BD3}"/>
-              </a:ext>
-            </a:extLst>
-          </p:cNvPr>
-          <p:cNvSpPr>
-            <a:spLocks noGrp="1"/>
-          </p:cNvSpPr>
-          <p:nvPr>
-            <p:ph idx="1"/>
-          </p:nvPr>
-        </p:nvSpPr>
-        <p:spPr/>
-        <p:txBody>
-          <a:bodyPr>
-            <a:normAutofit/>
-          </a:bodyPr>
-          <a:lstStyle/>
-          <a:p>
-            <a:r>
-              <a:rPr lang="en-US" sz="4000" dirty="0">
-                <a:solidFill>
-                  <a:srgbClr val="00B0F0"/>
-                </a:solidFill>
-              </a:rPr>
-              <a:t>square_loop.py</a:t>
-            </a:r>
-          </a:p>
-          <a:p>
-            <a:r>
-              <a:rPr lang="en-US" sz="4000" dirty="0">
-                <a:solidFill>
-                  <a:srgbClr val="00B0F0"/>
-                </a:solidFill>
-              </a:rPr>
-              <a:t>square_loop_w40.py – </a:t>
-            </a:r>
-            <a:r>
-              <a:rPr lang="en-US" sz="4000" dirty="0">
-                <a:solidFill>
-                  <a:schemeClr val="tx1"/>
-                </a:solidFill>
-              </a:rPr>
-              <a:t>thicken lines</a:t>
-            </a:r>
-          </a:p>
-          <a:p>
-            <a:r>
-              <a:rPr lang="en-US" sz="4000">
-                <a:solidFill>
-                  <a:srgbClr val="00B0F0"/>
-                </a:solidFill>
-              </a:rPr>
-              <a:t>square</a:t>
-            </a:r>
-            <a:r>
-              <a:rPr lang="en-US" sz="4000" dirty="0">
-                <a:solidFill>
-                  <a:srgbClr val="00B0F0"/>
-                </a:solidFill>
-              </a:rPr>
-              <a:t>_loop_colors.py – </a:t>
-            </a:r>
-            <a:r>
-              <a:rPr lang="en-US" sz="4000" dirty="0">
-                <a:solidFill>
-                  <a:schemeClr val="tx1"/>
-                </a:solidFill>
-              </a:rPr>
-              <a:t>add colors</a:t>
-            </a:r>
-          </a:p>
-        </p:txBody>
-      </p:sp>
-      <p:sp>
-        <p:nvSpPr>
-          <p:cNvPr id="4" name="Date Placeholder 3">
-            <a:extLst>
-              <a:ext uri="{FF2B5EF4-FFF2-40B4-BE49-F238E27FC236}">
-                <a16:creationId xmlns:a16="http://schemas.microsoft.com/office/drawing/2014/main" id="{06D9C378-DEEF-913F-A2E9-B49F0F4DC996}"/>
-              </a:ext>
-            </a:extLst>
-          </p:cNvPr>
-          <p:cNvSpPr>
-            <a:spLocks noGrp="1"/>
-          </p:cNvSpPr>
-          <p:nvPr>
-            <p:ph type="dt" sz="half" idx="10"/>
-          </p:nvPr>
-        </p:nvSpPr>
-        <p:spPr/>
-        <p:txBody>
-          <a:bodyPr/>
-          <a:lstStyle/>
-          <a:p>
-            <a:fld id="{A7119916-CD40-456D-ABE3-55F8822671F7}" type="datetime1">
-              <a:rPr lang="en-US" smtClean="0"/>
-              <a:t>4/16/2024</a:t>
-            </a:fld>
-            <a:endParaRPr lang="en-US" dirty="0"/>
-          </a:p>
-        </p:txBody>
-      </p:sp>
-      <p:sp>
-        <p:nvSpPr>
-          <p:cNvPr id="5" name="Footer Placeholder 4">
-            <a:extLst>
-              <a:ext uri="{FF2B5EF4-FFF2-40B4-BE49-F238E27FC236}">
-                <a16:creationId xmlns:a16="http://schemas.microsoft.com/office/drawing/2014/main" id="{589AF76C-F0C9-D37C-4906-0916A7BF8FF6}"/>
-              </a:ext>
-            </a:extLst>
-          </p:cNvPr>
-          <p:cNvSpPr>
-            <a:spLocks noGrp="1"/>
-          </p:cNvSpPr>
-          <p:nvPr>
-            <p:ph type="ftr" sz="quarter" idx="11"/>
-          </p:nvPr>
-        </p:nvSpPr>
-        <p:spPr/>
-        <p:txBody>
-          <a:bodyPr/>
-          <a:lstStyle/>
-          <a:p>
-            <a:r>
-              <a:rPr lang="en-US"/>
-              <a:t>raysmith@alum.mit.edu</a:t>
-            </a:r>
-            <a:endParaRPr lang="en-US" dirty="0"/>
-          </a:p>
-        </p:txBody>
-      </p:sp>
-      <p:sp>
-        <p:nvSpPr>
-          <p:cNvPr id="6" name="Slide Number Placeholder 5">
-            <a:extLst>
-              <a:ext uri="{FF2B5EF4-FFF2-40B4-BE49-F238E27FC236}">
-                <a16:creationId xmlns:a16="http://schemas.microsoft.com/office/drawing/2014/main" id="{6C5D9DB7-EA9D-EC92-F3D9-074B87DA8F1D}"/>
-              </a:ext>
-            </a:extLst>
-          </p:cNvPr>
-          <p:cNvSpPr>
-            <a:spLocks noGrp="1"/>
-          </p:cNvSpPr>
-          <p:nvPr>
-            <p:ph type="sldNum" sz="quarter" idx="12"/>
-          </p:nvPr>
-        </p:nvSpPr>
-        <p:spPr/>
-        <p:txBody>
-          <a:bodyPr/>
-          <a:lstStyle/>
-          <a:p>
-            <a:fld id="{6D22F896-40B5-4ADD-8801-0D06FADFA095}" type="slidenum">
-              <a:rPr lang="en-US" smtClean="0"/>
-              <a:t>14</a:t>
-            </a:fld>
-            <a:endParaRPr lang="en-US" dirty="0"/>
-          </a:p>
-        </p:txBody>
-      </p:sp>
-    </p:spTree>
-    <p:extLst>
-      <p:ext uri="{BB962C8B-B14F-4D97-AF65-F5344CB8AC3E}">
-        <p14:creationId xmlns:p14="http://schemas.microsoft.com/office/powerpoint/2010/main" val="813966894"/>
-      </p:ext>
-    </p:extLst>
-  </p:cSld>
-  <p:clrMapOvr>
-    <a:masterClrMapping/>
-  </p:clrMapOvr>
-</p:sld>
-</file>
-
-<file path=ppt/slides/slide15.xml><?xml version="1.0" encoding="utf-8"?>
-<p:sld xmlns:a="http://schemas.openxmlformats.org/drawingml/2006/main" xmlns:r="http://schemas.openxmlformats.org/officeDocument/2006/relationships" xmlns:p="http://schemas.openxmlformats.org/presentationml/2006/main">
-  <p:cSld>
-    <p:spTree>
-      <p:nvGrpSpPr>
-        <p:cNvPr id="1" name=""/>
-        <p:cNvGrpSpPr/>
-        <p:nvPr/>
-      </p:nvGrpSpPr>
-      <p:grpSpPr>
-        <a:xfrm>
-          <a:off x="0" y="0"/>
-          <a:ext cx="0" cy="0"/>
-          <a:chOff x="0" y="0"/>
-          <a:chExt cx="0" cy="0"/>
-        </a:xfrm>
-      </p:grpSpPr>
-      <p:sp>
-        <p:nvSpPr>
-          <p:cNvPr id="2" name="Title 1">
-            <a:extLst>
-              <a:ext uri="{FF2B5EF4-FFF2-40B4-BE49-F238E27FC236}">
                 <a16:creationId xmlns:a16="http://schemas.microsoft.com/office/drawing/2014/main" id="{5FC6BBC6-583F-C6E8-818A-8FC7C80A71B7}"/>
               </a:ext>
             </a:extLst>
@@ -11055,7 +10265,7 @@
           <a:p>
             <a:fld id="{A7119916-CD40-456D-ABE3-55F8822671F7}" type="datetime1">
               <a:rPr lang="en-US" smtClean="0"/>
-              <a:t>4/16/2024</a:t>
+              <a:t>5/18/2026</a:t>
             </a:fld>
             <a:endParaRPr lang="en-US" dirty="0"/>
           </a:p>
@@ -11112,7 +10322,7 @@
           <a:p>
             <a:fld id="{6D22F896-40B5-4ADD-8801-0D06FADFA095}" type="slidenum">
               <a:rPr lang="en-US" smtClean="0"/>
-              <a:t>15</a:t>
+              <a:t>14</a:t>
             </a:fld>
             <a:endParaRPr lang="en-US" dirty="0"/>
           </a:p>
@@ -11190,6 +10400,179 @@
 </p:sld>
 </file>
 
+<file path=ppt/slides/slide15.xml><?xml version="1.0" encoding="utf-8"?>
+<p:sld xmlns:a="http://schemas.openxmlformats.org/drawingml/2006/main" xmlns:r="http://schemas.openxmlformats.org/officeDocument/2006/relationships" xmlns:p="http://schemas.openxmlformats.org/presentationml/2006/main">
+  <p:cSld>
+    <p:spTree>
+      <p:nvGrpSpPr>
+        <p:cNvPr id="1" name=""/>
+        <p:cNvGrpSpPr/>
+        <p:nvPr/>
+      </p:nvGrpSpPr>
+      <p:grpSpPr>
+        <a:xfrm>
+          <a:off x="0" y="0"/>
+          <a:ext cx="0" cy="0"/>
+          <a:chOff x="0" y="0"/>
+          <a:chExt cx="0" cy="0"/>
+        </a:xfrm>
+      </p:grpSpPr>
+      <p:sp>
+        <p:nvSpPr>
+          <p:cNvPr id="2" name="Title 1">
+            <a:extLst>
+              <a:ext uri="{FF2B5EF4-FFF2-40B4-BE49-F238E27FC236}">
+                <a16:creationId xmlns:a16="http://schemas.microsoft.com/office/drawing/2014/main" id="{8B770470-B88E-9501-6E3A-3D890DBC045D}"/>
+              </a:ext>
+            </a:extLst>
+          </p:cNvPr>
+          <p:cNvSpPr>
+            <a:spLocks noGrp="1"/>
+          </p:cNvSpPr>
+          <p:nvPr>
+            <p:ph type="title"/>
+          </p:nvPr>
+        </p:nvSpPr>
+        <p:spPr/>
+        <p:txBody>
+          <a:bodyPr/>
+          <a:lstStyle/>
+          <a:p>
+            <a:r>
+              <a:rPr lang="en-US" dirty="0"/>
+              <a:t>Spokes – A More elaborate figure</a:t>
+            </a:r>
+          </a:p>
+        </p:txBody>
+      </p:sp>
+      <p:pic>
+        <p:nvPicPr>
+          <p:cNvPr id="10" name="Content Placeholder 9">
+            <a:extLst>
+              <a:ext uri="{FF2B5EF4-FFF2-40B4-BE49-F238E27FC236}">
+                <a16:creationId xmlns:a16="http://schemas.microsoft.com/office/drawing/2014/main" id="{52FA5153-5002-56CE-F6CF-B6B0281BB5BC}"/>
+              </a:ext>
+            </a:extLst>
+          </p:cNvPr>
+          <p:cNvPicPr>
+            <a:picLocks noGrp="1" noChangeAspect="1"/>
+          </p:cNvPicPr>
+          <p:nvPr>
+            <p:ph idx="1"/>
+          </p:nvPr>
+        </p:nvPicPr>
+        <p:blipFill>
+          <a:blip r:embed="rId2"/>
+          <a:stretch>
+            <a:fillRect/>
+          </a:stretch>
+        </p:blipFill>
+        <p:spPr>
+          <a:xfrm>
+            <a:off x="3110257" y="2160588"/>
+            <a:ext cx="3621285" cy="3881437"/>
+          </a:xfrm>
+        </p:spPr>
+      </p:pic>
+      <p:sp>
+        <p:nvSpPr>
+          <p:cNvPr id="4" name="Date Placeholder 3">
+            <a:extLst>
+              <a:ext uri="{FF2B5EF4-FFF2-40B4-BE49-F238E27FC236}">
+                <a16:creationId xmlns:a16="http://schemas.microsoft.com/office/drawing/2014/main" id="{428A6463-CAFB-0686-BF0E-B547E5586DC2}"/>
+              </a:ext>
+            </a:extLst>
+          </p:cNvPr>
+          <p:cNvSpPr>
+            <a:spLocks noGrp="1"/>
+          </p:cNvSpPr>
+          <p:nvPr>
+            <p:ph type="dt" sz="half" idx="10"/>
+          </p:nvPr>
+        </p:nvSpPr>
+        <p:spPr/>
+        <p:txBody>
+          <a:bodyPr/>
+          <a:lstStyle/>
+          <a:p>
+            <a:fld id="{A7119916-CD40-456D-ABE3-55F8822671F7}" type="datetime1">
+              <a:rPr lang="en-US" smtClean="0"/>
+              <a:t>5/18/2026</a:t>
+            </a:fld>
+            <a:endParaRPr lang="en-US" dirty="0"/>
+          </a:p>
+        </p:txBody>
+      </p:sp>
+      <p:sp>
+        <p:nvSpPr>
+          <p:cNvPr id="5" name="Footer Placeholder 4">
+            <a:extLst>
+              <a:ext uri="{FF2B5EF4-FFF2-40B4-BE49-F238E27FC236}">
+                <a16:creationId xmlns:a16="http://schemas.microsoft.com/office/drawing/2014/main" id="{30B87D30-9780-7DD2-14C3-BEE9ACD15113}"/>
+              </a:ext>
+            </a:extLst>
+          </p:cNvPr>
+          <p:cNvSpPr>
+            <a:spLocks noGrp="1"/>
+          </p:cNvSpPr>
+          <p:nvPr>
+            <p:ph type="ftr" sz="quarter" idx="11"/>
+          </p:nvPr>
+        </p:nvSpPr>
+        <p:spPr/>
+        <p:txBody>
+          <a:bodyPr/>
+          <a:lstStyle/>
+          <a:p>
+            <a:r>
+              <a:rPr lang="en-US" dirty="0"/>
+              <a:t>raysmith@alum.mit.edu</a:t>
+            </a:r>
+          </a:p>
+        </p:txBody>
+      </p:sp>
+      <p:sp>
+        <p:nvSpPr>
+          <p:cNvPr id="6" name="Slide Number Placeholder 5">
+            <a:extLst>
+              <a:ext uri="{FF2B5EF4-FFF2-40B4-BE49-F238E27FC236}">
+                <a16:creationId xmlns:a16="http://schemas.microsoft.com/office/drawing/2014/main" id="{C0FAED9C-F886-8E3F-6217-21206A777F12}"/>
+              </a:ext>
+            </a:extLst>
+          </p:cNvPr>
+          <p:cNvSpPr>
+            <a:spLocks noGrp="1"/>
+          </p:cNvSpPr>
+          <p:nvPr>
+            <p:ph type="sldNum" sz="quarter" idx="12"/>
+          </p:nvPr>
+        </p:nvSpPr>
+        <p:spPr/>
+        <p:txBody>
+          <a:bodyPr/>
+          <a:lstStyle/>
+          <a:p>
+            <a:fld id="{6D22F896-40B5-4ADD-8801-0D06FADFA095}" type="slidenum">
+              <a:rPr lang="en-US" smtClean="0"/>
+              <a:t>15</a:t>
+            </a:fld>
+            <a:endParaRPr lang="en-US" dirty="0"/>
+          </a:p>
+        </p:txBody>
+      </p:sp>
+    </p:spTree>
+    <p:extLst>
+      <p:ext uri="{BB962C8B-B14F-4D97-AF65-F5344CB8AC3E}">
+        <p14:creationId xmlns:p14="http://schemas.microsoft.com/office/powerpoint/2010/main" val="3424989973"/>
+      </p:ext>
+    </p:extLst>
+  </p:cSld>
+  <p:clrMapOvr>
+    <a:masterClrMapping/>
+  </p:clrMapOvr>
+</p:sld>
+</file>
+
 <file path=ppt/slides/slide16.xml><?xml version="1.0" encoding="utf-8"?>
 <p:sld xmlns:a="http://schemas.openxmlformats.org/drawingml/2006/main" xmlns:r="http://schemas.openxmlformats.org/officeDocument/2006/relationships" xmlns:p="http://schemas.openxmlformats.org/presentationml/2006/main">
   <p:cSld>
@@ -11212,7 +10595,7 @@
           <p:cNvPr id="2" name="Title 1">
             <a:extLst>
               <a:ext uri="{FF2B5EF4-FFF2-40B4-BE49-F238E27FC236}">
-                <a16:creationId xmlns:a16="http://schemas.microsoft.com/office/drawing/2014/main" id="{8B770470-B88E-9501-6E3A-3D890DBC045D}"/>
+                <a16:creationId xmlns:a16="http://schemas.microsoft.com/office/drawing/2014/main" id="{FD627FA7-B676-FED3-104A-8515B4D5479F}"/>
               </a:ext>
             </a:extLst>
           </p:cNvPr>
@@ -11230,46 +10613,211 @@
           <a:p>
             <a:r>
               <a:rPr lang="en-US" dirty="0"/>
-              <a:t>Spokes – A More elaborate figure</a:t>
-            </a:r>
-          </a:p>
-        </p:txBody>
-      </p:sp>
-      <p:pic>
-        <p:nvPicPr>
-          <p:cNvPr id="10" name="Content Placeholder 9">
+              <a:t>Spokes text output</a:t>
+            </a:r>
+          </a:p>
+        </p:txBody>
+      </p:sp>
+      <p:sp>
+        <p:nvSpPr>
+          <p:cNvPr id="3" name="Content Placeholder 2">
             <a:extLst>
               <a:ext uri="{FF2B5EF4-FFF2-40B4-BE49-F238E27FC236}">
-                <a16:creationId xmlns:a16="http://schemas.microsoft.com/office/drawing/2014/main" id="{52FA5153-5002-56CE-F6CF-B6B0281BB5BC}"/>
+                <a16:creationId xmlns:a16="http://schemas.microsoft.com/office/drawing/2014/main" id="{6ED16830-CCDC-F8D4-4807-603E86E9DABA}"/>
               </a:ext>
             </a:extLst>
           </p:cNvPr>
-          <p:cNvPicPr>
-            <a:picLocks noGrp="1" noChangeAspect="1"/>
-          </p:cNvPicPr>
+          <p:cNvSpPr>
+            <a:spLocks noGrp="1"/>
+          </p:cNvSpPr>
           <p:nvPr>
             <p:ph idx="1"/>
           </p:nvPr>
-        </p:nvPicPr>
-        <p:blipFill>
-          <a:blip r:embed="rId2"/>
-          <a:stretch>
-            <a:fillRect/>
-          </a:stretch>
-        </p:blipFill>
+        </p:nvSpPr>
         <p:spPr>
           <a:xfrm>
-            <a:off x="3110257" y="2160588"/>
-            <a:ext cx="3621285" cy="3881437"/>
+            <a:off x="677334" y="1208599"/>
+            <a:ext cx="7642074" cy="4832764"/>
           </a:xfrm>
         </p:spPr>
-      </p:pic>
+        <p:txBody>
+          <a:bodyPr>
+            <a:noAutofit/>
+          </a:bodyPr>
+          <a:lstStyle/>
+          <a:p>
+            <a:pPr marL="0" indent="0">
+              <a:buNone/>
+            </a:pPr>
+            <a:r>
+              <a:rPr lang="en-US" sz="1400" dirty="0">
+                <a:latin typeface="Courier New" panose="02070309020205020404" pitchFamily="49" charset="0"/>
+                <a:cs typeface="Courier New" panose="02070309020205020404" pitchFamily="49" charset="0"/>
+              </a:rPr>
+              <a:t>,,,,,,,,,,,,,iii</a:t>
+            </a:r>
+          </a:p>
+          <a:p>
+            <a:pPr marL="0" indent="0">
+              <a:buNone/>
+            </a:pPr>
+            <a:r>
+              <a:rPr lang="en-US" sz="1400" dirty="0">
+                <a:latin typeface="Courier New" panose="02070309020205020404" pitchFamily="49" charset="0"/>
+                <a:cs typeface="Courier New" panose="02070309020205020404" pitchFamily="49" charset="0"/>
+              </a:rPr>
+              <a:t>,,,,,,,,,,,,iiiiii</a:t>
+            </a:r>
+          </a:p>
+          <a:p>
+            <a:pPr marL="0" indent="0">
+              <a:buNone/>
+            </a:pPr>
+            <a:r>
+              <a:rPr lang="en-US" sz="1400" dirty="0">
+                <a:latin typeface="Courier New" panose="02070309020205020404" pitchFamily="49" charset="0"/>
+                <a:cs typeface="Courier New" panose="02070309020205020404" pitchFamily="49" charset="0"/>
+              </a:rPr>
+              <a:t>,,,,,,,,,,,,iiiiii,,,,,,,,vvv</a:t>
+            </a:r>
+          </a:p>
+          <a:p>
+            <a:pPr marL="0" indent="0">
+              <a:buNone/>
+            </a:pPr>
+            <a:r>
+              <a:rPr lang="en-US" sz="1400" dirty="0">
+                <a:latin typeface="Courier New" panose="02070309020205020404" pitchFamily="49" charset="0"/>
+                <a:cs typeface="Courier New" panose="02070309020205020404" pitchFamily="49" charset="0"/>
+              </a:rPr>
+              <a:t>,,,,,,,,,,,,iiiii,,,,,,,vvvvvv</a:t>
+            </a:r>
+          </a:p>
+          <a:p>
+            <a:pPr marL="0" indent="0">
+              <a:buNone/>
+            </a:pPr>
+            <a:r>
+              <a:rPr lang="en-US" sz="1400" dirty="0">
+                <a:latin typeface="Courier New" panose="02070309020205020404" pitchFamily="49" charset="0"/>
+                <a:cs typeface="Courier New" panose="02070309020205020404" pitchFamily="49" charset="0"/>
+              </a:rPr>
+              <a:t>,,,,,,,,,,,,,,,i,,,,,,,,vvvvvv</a:t>
+            </a:r>
+          </a:p>
+          <a:p>
+            <a:pPr marL="0" indent="0">
+              <a:buNone/>
+            </a:pPr>
+            <a:r>
+              <a:rPr lang="en-US" sz="1400" dirty="0">
+                <a:latin typeface="Courier New" panose="02070309020205020404" pitchFamily="49" charset="0"/>
+                <a:cs typeface="Courier New" panose="02070309020205020404" pitchFamily="49" charset="0"/>
+              </a:rPr>
+              <a:t>,,,bbb,,,,,,,,,ii,,,,,,,,vvvvv</a:t>
+            </a:r>
+          </a:p>
+          <a:p>
+            <a:pPr marL="0" indent="0">
+              <a:buNone/>
+            </a:pPr>
+            <a:r>
+              <a:rPr lang="en-US" sz="1400" dirty="0">
+                <a:latin typeface="Courier New" panose="02070309020205020404" pitchFamily="49" charset="0"/>
+                <a:cs typeface="Courier New" panose="02070309020205020404" pitchFamily="49" charset="0"/>
+              </a:rPr>
+              <a:t>,,bbbbb,,,,,,,,,i,,,,,,vvv</a:t>
+            </a:r>
+          </a:p>
+          <a:p>
+            <a:pPr marL="0" indent="0">
+              <a:buNone/>
+            </a:pPr>
+            <a:r>
+              <a:rPr lang="en-US" sz="1400" dirty="0">
+                <a:latin typeface="Courier New" panose="02070309020205020404" pitchFamily="49" charset="0"/>
+                <a:cs typeface="Courier New" panose="02070309020205020404" pitchFamily="49" charset="0"/>
+              </a:rPr>
+              <a:t>,,bbbbbb,,,,,,,,i,,,,,vv</a:t>
+            </a:r>
+          </a:p>
+          <a:p>
+            <a:pPr marL="0" indent="0">
+              <a:buNone/>
+            </a:pPr>
+            <a:r>
+              <a:rPr lang="en-US" sz="1400" dirty="0">
+                <a:latin typeface="Courier New" panose="02070309020205020404" pitchFamily="49" charset="0"/>
+                <a:cs typeface="Courier New" panose="02070309020205020404" pitchFamily="49" charset="0"/>
+              </a:rPr>
+              <a:t>,,bbbbbbbb,,,,,,ii,,,vv</a:t>
+            </a:r>
+          </a:p>
+          <a:p>
+            <a:pPr marL="0" indent="0">
+              <a:buNone/>
+            </a:pPr>
+            <a:r>
+              <a:rPr lang="en-US" sz="1400" dirty="0">
+                <a:latin typeface="Courier New" panose="02070309020205020404" pitchFamily="49" charset="0"/>
+                <a:cs typeface="Courier New" panose="02070309020205020404" pitchFamily="49" charset="0"/>
+              </a:rPr>
+              <a:t>,,,,,,,,,,bbbb,,,i,,v,,,,,,,,,,,rr</a:t>
+            </a:r>
+          </a:p>
+          <a:p>
+            <a:pPr marL="0" indent="0">
+              <a:buNone/>
+            </a:pPr>
+            <a:r>
+              <a:rPr lang="en-US" sz="1400" dirty="0">
+                <a:latin typeface="Courier New" panose="02070309020205020404" pitchFamily="49" charset="0"/>
+                <a:cs typeface="Courier New" panose="02070309020205020404" pitchFamily="49" charset="0"/>
+              </a:rPr>
+              <a:t>,,,,,,,,,,,,,bbbbivv,,,,,,,,,,rrrrrr</a:t>
+            </a:r>
+          </a:p>
+          <a:p>
+            <a:pPr marL="0" indent="0">
+              <a:buNone/>
+            </a:pPr>
+            <a:r>
+              <a:rPr lang="en-US" sz="1400" dirty="0">
+                <a:latin typeface="Courier New" panose="02070309020205020404" pitchFamily="49" charset="0"/>
+                <a:cs typeface="Courier New" panose="02070309020205020404" pitchFamily="49" charset="0"/>
+              </a:rPr>
+              <a:t>,,,,,,,,,,,,,,,,bvvrrrrrrrrrrrrrrrrr</a:t>
+            </a:r>
+          </a:p>
+          <a:p>
+            <a:pPr marL="0" indent="0">
+              <a:buNone/>
+            </a:pPr>
+            <a:r>
+              <a:rPr lang="en-US" sz="1400" dirty="0">
+                <a:latin typeface="Courier New" panose="02070309020205020404" pitchFamily="49" charset="0"/>
+                <a:cs typeface="Courier New" panose="02070309020205020404" pitchFamily="49" charset="0"/>
+              </a:rPr>
+              <a:t>,,,,,,,,,,,,,ggg,yoo,,,,,,,,,,rrrrrr</a:t>
+            </a:r>
+          </a:p>
+          <a:p>
+            <a:pPr marL="0" indent="0">
+              <a:buNone/>
+            </a:pPr>
+            <a:r>
+              <a:rPr lang="en-US" sz="2000" dirty="0"/>
+              <a:t>… Omitted for brevity …</a:t>
+            </a:r>
+          </a:p>
+        </p:txBody>
+      </p:sp>
       <p:sp>
         <p:nvSpPr>
           <p:cNvPr id="4" name="Date Placeholder 3">
             <a:extLst>
               <a:ext uri="{FF2B5EF4-FFF2-40B4-BE49-F238E27FC236}">
-                <a16:creationId xmlns:a16="http://schemas.microsoft.com/office/drawing/2014/main" id="{428A6463-CAFB-0686-BF0E-B547E5586DC2}"/>
+                <a16:creationId xmlns:a16="http://schemas.microsoft.com/office/drawing/2014/main" id="{C997A8E9-4467-276A-F813-4BD4FD62133F}"/>
               </a:ext>
             </a:extLst>
           </p:cNvPr>
@@ -11287,7 +10835,7 @@
           <a:p>
             <a:fld id="{A7119916-CD40-456D-ABE3-55F8822671F7}" type="datetime1">
               <a:rPr lang="en-US" smtClean="0"/>
-              <a:t>4/16/2024</a:t>
+              <a:t>5/18/2026</a:t>
             </a:fld>
             <a:endParaRPr lang="en-US" dirty="0"/>
           </a:p>
@@ -11298,7 +10846,7 @@
           <p:cNvPr id="5" name="Footer Placeholder 4">
             <a:extLst>
               <a:ext uri="{FF2B5EF4-FFF2-40B4-BE49-F238E27FC236}">
-                <a16:creationId xmlns:a16="http://schemas.microsoft.com/office/drawing/2014/main" id="{30B87D30-9780-7DD2-14C3-BEE9ACD15113}"/>
+                <a16:creationId xmlns:a16="http://schemas.microsoft.com/office/drawing/2014/main" id="{4D9CFD0C-E57A-688E-A5C4-F5C6A0BE107D}"/>
               </a:ext>
             </a:extLst>
           </p:cNvPr>
@@ -11326,7 +10874,7 @@
           <p:cNvPr id="6" name="Slide Number Placeholder 5">
             <a:extLst>
               <a:ext uri="{FF2B5EF4-FFF2-40B4-BE49-F238E27FC236}">
-                <a16:creationId xmlns:a16="http://schemas.microsoft.com/office/drawing/2014/main" id="{C0FAED9C-F886-8E3F-6217-21206A777F12}"/>
+                <a16:creationId xmlns:a16="http://schemas.microsoft.com/office/drawing/2014/main" id="{BB6E60D3-1302-41FC-E73E-CAD5942ECD52}"/>
               </a:ext>
             </a:extLst>
           </p:cNvPr>
@@ -11353,7 +10901,7 @@
     </p:spTree>
     <p:extLst>
       <p:ext uri="{BB962C8B-B14F-4D97-AF65-F5344CB8AC3E}">
-        <p14:creationId xmlns:p14="http://schemas.microsoft.com/office/powerpoint/2010/main" val="3424989973"/>
+        <p14:creationId xmlns:p14="http://schemas.microsoft.com/office/powerpoint/2010/main" val="1873094788"/>
       </p:ext>
     </p:extLst>
   </p:cSld>
@@ -11385,344 +10933,6 @@
           <p:cNvPr id="2" name="Title 1">
             <a:extLst>
               <a:ext uri="{FF2B5EF4-FFF2-40B4-BE49-F238E27FC236}">
-                <a16:creationId xmlns:a16="http://schemas.microsoft.com/office/drawing/2014/main" id="{FD627FA7-B676-FED3-104A-8515B4D5479F}"/>
-              </a:ext>
-            </a:extLst>
-          </p:cNvPr>
-          <p:cNvSpPr>
-            <a:spLocks noGrp="1"/>
-          </p:cNvSpPr>
-          <p:nvPr>
-            <p:ph type="title"/>
-          </p:nvPr>
-        </p:nvSpPr>
-        <p:spPr/>
-        <p:txBody>
-          <a:bodyPr/>
-          <a:lstStyle/>
-          <a:p>
-            <a:r>
-              <a:rPr lang="en-US" dirty="0"/>
-              <a:t>Spokes text output</a:t>
-            </a:r>
-          </a:p>
-        </p:txBody>
-      </p:sp>
-      <p:sp>
-        <p:nvSpPr>
-          <p:cNvPr id="3" name="Content Placeholder 2">
-            <a:extLst>
-              <a:ext uri="{FF2B5EF4-FFF2-40B4-BE49-F238E27FC236}">
-                <a16:creationId xmlns:a16="http://schemas.microsoft.com/office/drawing/2014/main" id="{6ED16830-CCDC-F8D4-4807-603E86E9DABA}"/>
-              </a:ext>
-            </a:extLst>
-          </p:cNvPr>
-          <p:cNvSpPr>
-            <a:spLocks noGrp="1"/>
-          </p:cNvSpPr>
-          <p:nvPr>
-            <p:ph idx="1"/>
-          </p:nvPr>
-        </p:nvSpPr>
-        <p:spPr>
-          <a:xfrm>
-            <a:off x="677334" y="1208599"/>
-            <a:ext cx="7642074" cy="4832764"/>
-          </a:xfrm>
-        </p:spPr>
-        <p:txBody>
-          <a:bodyPr>
-            <a:noAutofit/>
-          </a:bodyPr>
-          <a:lstStyle/>
-          <a:p>
-            <a:pPr marL="0" indent="0">
-              <a:buNone/>
-            </a:pPr>
-            <a:r>
-              <a:rPr lang="en-US" sz="1400" dirty="0">
-                <a:latin typeface="Courier New" panose="02070309020205020404" pitchFamily="49" charset="0"/>
-                <a:cs typeface="Courier New" panose="02070309020205020404" pitchFamily="49" charset="0"/>
-              </a:rPr>
-              <a:t>,,,,,,,,,,,,,iii</a:t>
-            </a:r>
-          </a:p>
-          <a:p>
-            <a:pPr marL="0" indent="0">
-              <a:buNone/>
-            </a:pPr>
-            <a:r>
-              <a:rPr lang="en-US" sz="1400" dirty="0">
-                <a:latin typeface="Courier New" panose="02070309020205020404" pitchFamily="49" charset="0"/>
-                <a:cs typeface="Courier New" panose="02070309020205020404" pitchFamily="49" charset="0"/>
-              </a:rPr>
-              <a:t>,,,,,,,,,,,,iiiiii</a:t>
-            </a:r>
-          </a:p>
-          <a:p>
-            <a:pPr marL="0" indent="0">
-              <a:buNone/>
-            </a:pPr>
-            <a:r>
-              <a:rPr lang="en-US" sz="1400" dirty="0">
-                <a:latin typeface="Courier New" panose="02070309020205020404" pitchFamily="49" charset="0"/>
-                <a:cs typeface="Courier New" panose="02070309020205020404" pitchFamily="49" charset="0"/>
-              </a:rPr>
-              <a:t>,,,,,,,,,,,,iiiiii,,,,,,,,vvv</a:t>
-            </a:r>
-          </a:p>
-          <a:p>
-            <a:pPr marL="0" indent="0">
-              <a:buNone/>
-            </a:pPr>
-            <a:r>
-              <a:rPr lang="en-US" sz="1400" dirty="0">
-                <a:latin typeface="Courier New" panose="02070309020205020404" pitchFamily="49" charset="0"/>
-                <a:cs typeface="Courier New" panose="02070309020205020404" pitchFamily="49" charset="0"/>
-              </a:rPr>
-              <a:t>,,,,,,,,,,,,iiiii,,,,,,,vvvvvv</a:t>
-            </a:r>
-          </a:p>
-          <a:p>
-            <a:pPr marL="0" indent="0">
-              <a:buNone/>
-            </a:pPr>
-            <a:r>
-              <a:rPr lang="en-US" sz="1400" dirty="0">
-                <a:latin typeface="Courier New" panose="02070309020205020404" pitchFamily="49" charset="0"/>
-                <a:cs typeface="Courier New" panose="02070309020205020404" pitchFamily="49" charset="0"/>
-              </a:rPr>
-              <a:t>,,,,,,,,,,,,,,,i,,,,,,,,vvvvvv</a:t>
-            </a:r>
-          </a:p>
-          <a:p>
-            <a:pPr marL="0" indent="0">
-              <a:buNone/>
-            </a:pPr>
-            <a:r>
-              <a:rPr lang="en-US" sz="1400" dirty="0">
-                <a:latin typeface="Courier New" panose="02070309020205020404" pitchFamily="49" charset="0"/>
-                <a:cs typeface="Courier New" panose="02070309020205020404" pitchFamily="49" charset="0"/>
-              </a:rPr>
-              <a:t>,,,bbb,,,,,,,,,ii,,,,,,,,vvvvv</a:t>
-            </a:r>
-          </a:p>
-          <a:p>
-            <a:pPr marL="0" indent="0">
-              <a:buNone/>
-            </a:pPr>
-            <a:r>
-              <a:rPr lang="en-US" sz="1400" dirty="0">
-                <a:latin typeface="Courier New" panose="02070309020205020404" pitchFamily="49" charset="0"/>
-                <a:cs typeface="Courier New" panose="02070309020205020404" pitchFamily="49" charset="0"/>
-              </a:rPr>
-              <a:t>,,bbbbb,,,,,,,,,i,,,,,,vvv</a:t>
-            </a:r>
-          </a:p>
-          <a:p>
-            <a:pPr marL="0" indent="0">
-              <a:buNone/>
-            </a:pPr>
-            <a:r>
-              <a:rPr lang="en-US" sz="1400" dirty="0">
-                <a:latin typeface="Courier New" panose="02070309020205020404" pitchFamily="49" charset="0"/>
-                <a:cs typeface="Courier New" panose="02070309020205020404" pitchFamily="49" charset="0"/>
-              </a:rPr>
-              <a:t>,,bbbbbb,,,,,,,,i,,,,,vv</a:t>
-            </a:r>
-          </a:p>
-          <a:p>
-            <a:pPr marL="0" indent="0">
-              <a:buNone/>
-            </a:pPr>
-            <a:r>
-              <a:rPr lang="en-US" sz="1400" dirty="0">
-                <a:latin typeface="Courier New" panose="02070309020205020404" pitchFamily="49" charset="0"/>
-                <a:cs typeface="Courier New" panose="02070309020205020404" pitchFamily="49" charset="0"/>
-              </a:rPr>
-              <a:t>,,bbbbbbbb,,,,,,ii,,,vv</a:t>
-            </a:r>
-          </a:p>
-          <a:p>
-            <a:pPr marL="0" indent="0">
-              <a:buNone/>
-            </a:pPr>
-            <a:r>
-              <a:rPr lang="en-US" sz="1400" dirty="0">
-                <a:latin typeface="Courier New" panose="02070309020205020404" pitchFamily="49" charset="0"/>
-                <a:cs typeface="Courier New" panose="02070309020205020404" pitchFamily="49" charset="0"/>
-              </a:rPr>
-              <a:t>,,,,,,,,,,bbbb,,,i,,v,,,,,,,,,,,rr</a:t>
-            </a:r>
-          </a:p>
-          <a:p>
-            <a:pPr marL="0" indent="0">
-              <a:buNone/>
-            </a:pPr>
-            <a:r>
-              <a:rPr lang="en-US" sz="1400" dirty="0">
-                <a:latin typeface="Courier New" panose="02070309020205020404" pitchFamily="49" charset="0"/>
-                <a:cs typeface="Courier New" panose="02070309020205020404" pitchFamily="49" charset="0"/>
-              </a:rPr>
-              <a:t>,,,,,,,,,,,,,bbbbivv,,,,,,,,,,rrrrrr</a:t>
-            </a:r>
-          </a:p>
-          <a:p>
-            <a:pPr marL="0" indent="0">
-              <a:buNone/>
-            </a:pPr>
-            <a:r>
-              <a:rPr lang="en-US" sz="1400" dirty="0">
-                <a:latin typeface="Courier New" panose="02070309020205020404" pitchFamily="49" charset="0"/>
-                <a:cs typeface="Courier New" panose="02070309020205020404" pitchFamily="49" charset="0"/>
-              </a:rPr>
-              <a:t>,,,,,,,,,,,,,,,,bvvrrrrrrrrrrrrrrrrr</a:t>
-            </a:r>
-          </a:p>
-          <a:p>
-            <a:pPr marL="0" indent="0">
-              <a:buNone/>
-            </a:pPr>
-            <a:r>
-              <a:rPr lang="en-US" sz="1400" dirty="0">
-                <a:latin typeface="Courier New" panose="02070309020205020404" pitchFamily="49" charset="0"/>
-                <a:cs typeface="Courier New" panose="02070309020205020404" pitchFamily="49" charset="0"/>
-              </a:rPr>
-              <a:t>,,,,,,,,,,,,,ggg,yoo,,,,,,,,,,rrrrrr</a:t>
-            </a:r>
-          </a:p>
-          <a:p>
-            <a:pPr marL="0" indent="0">
-              <a:buNone/>
-            </a:pPr>
-            <a:r>
-              <a:rPr lang="en-US" sz="2000" dirty="0"/>
-              <a:t>… Omitted for brevity …</a:t>
-            </a:r>
-          </a:p>
-        </p:txBody>
-      </p:sp>
-      <p:sp>
-        <p:nvSpPr>
-          <p:cNvPr id="4" name="Date Placeholder 3">
-            <a:extLst>
-              <a:ext uri="{FF2B5EF4-FFF2-40B4-BE49-F238E27FC236}">
-                <a16:creationId xmlns:a16="http://schemas.microsoft.com/office/drawing/2014/main" id="{C997A8E9-4467-276A-F813-4BD4FD62133F}"/>
-              </a:ext>
-            </a:extLst>
-          </p:cNvPr>
-          <p:cNvSpPr>
-            <a:spLocks noGrp="1"/>
-          </p:cNvSpPr>
-          <p:nvPr>
-            <p:ph type="dt" sz="half" idx="10"/>
-          </p:nvPr>
-        </p:nvSpPr>
-        <p:spPr/>
-        <p:txBody>
-          <a:bodyPr/>
-          <a:lstStyle/>
-          <a:p>
-            <a:fld id="{A7119916-CD40-456D-ABE3-55F8822671F7}" type="datetime1">
-              <a:rPr lang="en-US" smtClean="0"/>
-              <a:t>4/16/2024</a:t>
-            </a:fld>
-            <a:endParaRPr lang="en-US" dirty="0"/>
-          </a:p>
-        </p:txBody>
-      </p:sp>
-      <p:sp>
-        <p:nvSpPr>
-          <p:cNvPr id="5" name="Footer Placeholder 4">
-            <a:extLst>
-              <a:ext uri="{FF2B5EF4-FFF2-40B4-BE49-F238E27FC236}">
-                <a16:creationId xmlns:a16="http://schemas.microsoft.com/office/drawing/2014/main" id="{4D9CFD0C-E57A-688E-A5C4-F5C6A0BE107D}"/>
-              </a:ext>
-            </a:extLst>
-          </p:cNvPr>
-          <p:cNvSpPr>
-            <a:spLocks noGrp="1"/>
-          </p:cNvSpPr>
-          <p:nvPr>
-            <p:ph type="ftr" sz="quarter" idx="11"/>
-          </p:nvPr>
-        </p:nvSpPr>
-        <p:spPr/>
-        <p:txBody>
-          <a:bodyPr/>
-          <a:lstStyle/>
-          <a:p>
-            <a:r>
-              <a:rPr lang="en-US" dirty="0"/>
-              <a:t>raysmith@alum.mit.edu</a:t>
-            </a:r>
-          </a:p>
-        </p:txBody>
-      </p:sp>
-      <p:sp>
-        <p:nvSpPr>
-          <p:cNvPr id="6" name="Slide Number Placeholder 5">
-            <a:extLst>
-              <a:ext uri="{FF2B5EF4-FFF2-40B4-BE49-F238E27FC236}">
-                <a16:creationId xmlns:a16="http://schemas.microsoft.com/office/drawing/2014/main" id="{BB6E60D3-1302-41FC-E73E-CAD5942ECD52}"/>
-              </a:ext>
-            </a:extLst>
-          </p:cNvPr>
-          <p:cNvSpPr>
-            <a:spLocks noGrp="1"/>
-          </p:cNvSpPr>
-          <p:nvPr>
-            <p:ph type="sldNum" sz="quarter" idx="12"/>
-          </p:nvPr>
-        </p:nvSpPr>
-        <p:spPr/>
-        <p:txBody>
-          <a:bodyPr/>
-          <a:lstStyle/>
-          <a:p>
-            <a:fld id="{6D22F896-40B5-4ADD-8801-0D06FADFA095}" type="slidenum">
-              <a:rPr lang="en-US" smtClean="0"/>
-              <a:t>17</a:t>
-            </a:fld>
-            <a:endParaRPr lang="en-US" dirty="0"/>
-          </a:p>
-        </p:txBody>
-      </p:sp>
-    </p:spTree>
-    <p:extLst>
-      <p:ext uri="{BB962C8B-B14F-4D97-AF65-F5344CB8AC3E}">
-        <p14:creationId xmlns:p14="http://schemas.microsoft.com/office/powerpoint/2010/main" val="1873094788"/>
-      </p:ext>
-    </p:extLst>
-  </p:cSld>
-  <p:clrMapOvr>
-    <a:masterClrMapping/>
-  </p:clrMapOvr>
-</p:sld>
-</file>
-
-<file path=ppt/slides/slide18.xml><?xml version="1.0" encoding="utf-8"?>
-<p:sld xmlns:a="http://schemas.openxmlformats.org/drawingml/2006/main" xmlns:r="http://schemas.openxmlformats.org/officeDocument/2006/relationships" xmlns:p="http://schemas.openxmlformats.org/presentationml/2006/main">
-  <p:cSld>
-    <p:spTree>
-      <p:nvGrpSpPr>
-        <p:cNvPr id="1" name=""/>
-        <p:cNvGrpSpPr/>
-        <p:nvPr/>
-      </p:nvGrpSpPr>
-      <p:grpSpPr>
-        <a:xfrm>
-          <a:off x="0" y="0"/>
-          <a:ext cx="0" cy="0"/>
-          <a:chOff x="0" y="0"/>
-          <a:chExt cx="0" cy="0"/>
-        </a:xfrm>
-      </p:grpSpPr>
-      <p:sp>
-        <p:nvSpPr>
-          <p:cNvPr id="2" name="Title 1">
-            <a:extLst>
-              <a:ext uri="{FF2B5EF4-FFF2-40B4-BE49-F238E27FC236}">
                 <a16:creationId xmlns:a16="http://schemas.microsoft.com/office/drawing/2014/main" id="{A7FB6925-B90A-634A-E1D7-CD2701EA64E7}"/>
               </a:ext>
             </a:extLst>
@@ -11769,7 +10979,7 @@
           <a:p>
             <a:fld id="{A7119916-CD40-456D-ABE3-55F8822671F7}" type="datetime1">
               <a:rPr lang="en-US" smtClean="0"/>
-              <a:t>4/16/2024</a:t>
+              <a:t>5/18/2026</a:t>
             </a:fld>
             <a:endParaRPr lang="en-US" dirty="0"/>
           </a:p>
@@ -11826,7 +11036,7 @@
           <a:p>
             <a:fld id="{6D22F896-40B5-4ADD-8801-0D06FADFA095}" type="slidenum">
               <a:rPr lang="en-US" smtClean="0"/>
-              <a:t>18</a:t>
+              <a:t>17</a:t>
             </a:fld>
             <a:endParaRPr lang="en-US" dirty="0"/>
           </a:p>
@@ -11874,6 +11084,339 @@
 </p:sld>
 </file>
 
+<file path=ppt/slides/slide18.xml><?xml version="1.0" encoding="utf-8"?>
+<p:sld xmlns:a="http://schemas.openxmlformats.org/drawingml/2006/main" xmlns:r="http://schemas.openxmlformats.org/officeDocument/2006/relationships" xmlns:p="http://schemas.openxmlformats.org/presentationml/2006/main">
+  <p:cSld>
+    <p:spTree>
+      <p:nvGrpSpPr>
+        <p:cNvPr id="1" name=""/>
+        <p:cNvGrpSpPr/>
+        <p:nvPr/>
+      </p:nvGrpSpPr>
+      <p:grpSpPr>
+        <a:xfrm>
+          <a:off x="0" y="0"/>
+          <a:ext cx="0" cy="0"/>
+          <a:chOff x="0" y="0"/>
+          <a:chExt cx="0" cy="0"/>
+        </a:xfrm>
+      </p:grpSpPr>
+      <p:sp>
+        <p:nvSpPr>
+          <p:cNvPr id="2" name="Title 1">
+            <a:extLst>
+              <a:ext uri="{FF2B5EF4-FFF2-40B4-BE49-F238E27FC236}">
+                <a16:creationId xmlns:a16="http://schemas.microsoft.com/office/drawing/2014/main" id="{F7E90694-AA7F-451B-A875-1D23D1FDBA32}"/>
+              </a:ext>
+            </a:extLst>
+          </p:cNvPr>
+          <p:cNvSpPr>
+            <a:spLocks noGrp="1"/>
+          </p:cNvSpPr>
+          <p:nvPr>
+            <p:ph type="title"/>
+          </p:nvPr>
+        </p:nvSpPr>
+        <p:spPr>
+          <a:noFill/>
+        </p:spPr>
+        <p:txBody>
+          <a:bodyPr>
+            <a:noAutofit/>
+          </a:bodyPr>
+          <a:lstStyle/>
+          <a:p>
+            <a:r>
+              <a:rPr lang="en-US" sz="4400" dirty="0"/>
+              <a:t>Draw a square: braille – Magnify</a:t>
+            </a:r>
+          </a:p>
+        </p:txBody>
+      </p:sp>
+      <p:sp>
+        <p:nvSpPr>
+          <p:cNvPr id="4" name="Date Placeholder 3">
+            <a:extLst>
+              <a:ext uri="{FF2B5EF4-FFF2-40B4-BE49-F238E27FC236}">
+                <a16:creationId xmlns:a16="http://schemas.microsoft.com/office/drawing/2014/main" id="{B623EE2F-E3E9-437B-AFAE-1E0C5C94A5F8}"/>
+              </a:ext>
+            </a:extLst>
+          </p:cNvPr>
+          <p:cNvSpPr>
+            <a:spLocks noGrp="1"/>
+          </p:cNvSpPr>
+          <p:nvPr>
+            <p:ph type="dt" sz="half" idx="10"/>
+          </p:nvPr>
+        </p:nvSpPr>
+        <p:spPr/>
+        <p:txBody>
+          <a:bodyPr/>
+          <a:lstStyle/>
+          <a:p>
+            <a:pPr marL="0" marR="0" lvl="0" indent="0" algn="r" defTabSz="457200" rtl="0" eaLnBrk="1" fontAlgn="auto" latinLnBrk="0" hangingPunct="1">
+              <a:lnSpc>
+                <a:spcPct val="100000"/>
+              </a:lnSpc>
+              <a:spcBef>
+                <a:spcPts val="0"/>
+              </a:spcBef>
+              <a:spcAft>
+                <a:spcPts val="0"/>
+              </a:spcAft>
+              <a:buClrTx/>
+              <a:buSzTx/>
+              <a:buFontTx/>
+              <a:buNone/>
+              <a:tabLst/>
+              <a:defRPr/>
+            </a:pPr>
+            <a:fld id="{A7119916-CD40-456D-ABE3-55F8822671F7}" type="datetime1">
+              <a:rPr kumimoji="0" lang="en-US" sz="900" b="0" i="0" u="none" strike="noStrike" kern="1200" cap="none" spc="0" normalizeH="0" baseline="0" noProof="0" smtClean="0">
+                <a:ln>
+                  <a:noFill/>
+                </a:ln>
+                <a:solidFill>
+                  <a:prstClr val="black">
+                    <a:tint val="75000"/>
+                  </a:prstClr>
+                </a:solidFill>
+                <a:effectLst/>
+                <a:uLnTx/>
+                <a:uFillTx/>
+                <a:latin typeface="Trebuchet MS" panose="020B0603020202020204"/>
+                <a:ea typeface="+mn-ea"/>
+                <a:cs typeface="+mn-cs"/>
+              </a:rPr>
+              <a:pPr marL="0" marR="0" lvl="0" indent="0" algn="r" defTabSz="457200" rtl="0" eaLnBrk="1" fontAlgn="auto" latinLnBrk="0" hangingPunct="1">
+                <a:lnSpc>
+                  <a:spcPct val="100000"/>
+                </a:lnSpc>
+                <a:spcBef>
+                  <a:spcPts val="0"/>
+                </a:spcBef>
+                <a:spcAft>
+                  <a:spcPts val="0"/>
+                </a:spcAft>
+                <a:buClrTx/>
+                <a:buSzTx/>
+                <a:buFontTx/>
+                <a:buNone/>
+                <a:tabLst/>
+                <a:defRPr/>
+              </a:pPr>
+              <a:t>5/18/2026</a:t>
+            </a:fld>
+            <a:endParaRPr kumimoji="0" lang="en-US" sz="900" b="0" i="0" u="none" strike="noStrike" kern="1200" cap="none" spc="0" normalizeH="0" baseline="0" noProof="0" dirty="0">
+              <a:ln>
+                <a:noFill/>
+              </a:ln>
+              <a:solidFill>
+                <a:prstClr val="black">
+                  <a:tint val="75000"/>
+                </a:prstClr>
+              </a:solidFill>
+              <a:effectLst/>
+              <a:uLnTx/>
+              <a:uFillTx/>
+              <a:latin typeface="Trebuchet MS" panose="020B0603020202020204"/>
+              <a:ea typeface="+mn-ea"/>
+              <a:cs typeface="+mn-cs"/>
+            </a:endParaRPr>
+          </a:p>
+        </p:txBody>
+      </p:sp>
+      <p:sp>
+        <p:nvSpPr>
+          <p:cNvPr id="5" name="Footer Placeholder 4">
+            <a:extLst>
+              <a:ext uri="{FF2B5EF4-FFF2-40B4-BE49-F238E27FC236}">
+                <a16:creationId xmlns:a16="http://schemas.microsoft.com/office/drawing/2014/main" id="{4E4D04EE-5AD0-4A57-A42E-AE62E411ACEA}"/>
+              </a:ext>
+            </a:extLst>
+          </p:cNvPr>
+          <p:cNvSpPr>
+            <a:spLocks noGrp="1"/>
+          </p:cNvSpPr>
+          <p:nvPr>
+            <p:ph type="ftr" sz="quarter" idx="11"/>
+          </p:nvPr>
+        </p:nvSpPr>
+        <p:spPr/>
+        <p:txBody>
+          <a:bodyPr/>
+          <a:lstStyle/>
+          <a:p>
+            <a:pPr marL="0" marR="0" lvl="0" indent="0" algn="l" defTabSz="457200" rtl="0" eaLnBrk="1" fontAlgn="auto" latinLnBrk="0" hangingPunct="1">
+              <a:lnSpc>
+                <a:spcPct val="100000"/>
+              </a:lnSpc>
+              <a:spcBef>
+                <a:spcPts val="0"/>
+              </a:spcBef>
+              <a:spcAft>
+                <a:spcPts val="0"/>
+              </a:spcAft>
+              <a:buClrTx/>
+              <a:buSzTx/>
+              <a:buFontTx/>
+              <a:buNone/>
+              <a:tabLst/>
+              <a:defRPr/>
+            </a:pPr>
+            <a:r>
+              <a:rPr kumimoji="0" lang="en-US" sz="900" b="0" i="0" u="none" strike="noStrike" kern="1200" cap="none" spc="0" normalizeH="0" baseline="0" noProof="0" dirty="0">
+                <a:ln>
+                  <a:noFill/>
+                </a:ln>
+                <a:solidFill>
+                  <a:prstClr val="black">
+                    <a:tint val="75000"/>
+                  </a:prstClr>
+                </a:solidFill>
+                <a:effectLst/>
+                <a:uLnTx/>
+                <a:uFillTx/>
+                <a:latin typeface="Trebuchet MS" panose="020B0603020202020204"/>
+                <a:ea typeface="+mn-ea"/>
+                <a:cs typeface="+mn-cs"/>
+              </a:rPr>
+              <a:t>raysmith@alum.mit.edu</a:t>
+            </a:r>
+          </a:p>
+        </p:txBody>
+      </p:sp>
+      <p:sp>
+        <p:nvSpPr>
+          <p:cNvPr id="6" name="Slide Number Placeholder 5">
+            <a:extLst>
+              <a:ext uri="{FF2B5EF4-FFF2-40B4-BE49-F238E27FC236}">
+                <a16:creationId xmlns:a16="http://schemas.microsoft.com/office/drawing/2014/main" id="{9711C448-36A8-43E6-A891-6E42F22D1185}"/>
+              </a:ext>
+            </a:extLst>
+          </p:cNvPr>
+          <p:cNvSpPr>
+            <a:spLocks noGrp="1"/>
+          </p:cNvSpPr>
+          <p:nvPr>
+            <p:ph type="sldNum" sz="quarter" idx="12"/>
+          </p:nvPr>
+        </p:nvSpPr>
+        <p:spPr/>
+        <p:txBody>
+          <a:bodyPr/>
+          <a:lstStyle/>
+          <a:p>
+            <a:pPr marL="0" marR="0" lvl="0" indent="0" algn="r" defTabSz="457200" rtl="0" eaLnBrk="1" fontAlgn="auto" latinLnBrk="0" hangingPunct="1">
+              <a:lnSpc>
+                <a:spcPct val="100000"/>
+              </a:lnSpc>
+              <a:spcBef>
+                <a:spcPts val="0"/>
+              </a:spcBef>
+              <a:spcAft>
+                <a:spcPts val="0"/>
+              </a:spcAft>
+              <a:buClrTx/>
+              <a:buSzTx/>
+              <a:buFontTx/>
+              <a:buNone/>
+              <a:tabLst/>
+              <a:defRPr/>
+            </a:pPr>
+            <a:fld id="{6D22F896-40B5-4ADD-8801-0D06FADFA095}" type="slidenum">
+              <a:rPr kumimoji="0" lang="en-US" sz="900" b="0" i="0" u="none" strike="noStrike" kern="1200" cap="none" spc="0" normalizeH="0" baseline="0" noProof="0" smtClean="0">
+                <a:ln>
+                  <a:noFill/>
+                </a:ln>
+                <a:solidFill>
+                  <a:srgbClr val="90C226"/>
+                </a:solidFill>
+                <a:effectLst/>
+                <a:uLnTx/>
+                <a:uFillTx/>
+                <a:latin typeface="Trebuchet MS" panose="020B0603020202020204"/>
+                <a:ea typeface="+mn-ea"/>
+                <a:cs typeface="+mn-cs"/>
+              </a:rPr>
+              <a:pPr marL="0" marR="0" lvl="0" indent="0" algn="r" defTabSz="457200" rtl="0" eaLnBrk="1" fontAlgn="auto" latinLnBrk="0" hangingPunct="1">
+                <a:lnSpc>
+                  <a:spcPct val="100000"/>
+                </a:lnSpc>
+                <a:spcBef>
+                  <a:spcPts val="0"/>
+                </a:spcBef>
+                <a:spcAft>
+                  <a:spcPts val="0"/>
+                </a:spcAft>
+                <a:buClrTx/>
+                <a:buSzTx/>
+                <a:buFontTx/>
+                <a:buNone/>
+                <a:tabLst/>
+                <a:defRPr/>
+              </a:pPr>
+              <a:t>18</a:t>
+            </a:fld>
+            <a:endParaRPr kumimoji="0" lang="en-US" sz="900" b="0" i="0" u="none" strike="noStrike" kern="1200" cap="none" spc="0" normalizeH="0" baseline="0" noProof="0" dirty="0">
+              <a:ln>
+                <a:noFill/>
+              </a:ln>
+              <a:solidFill>
+                <a:srgbClr val="90C226"/>
+              </a:solidFill>
+              <a:effectLst/>
+              <a:uLnTx/>
+              <a:uFillTx/>
+              <a:latin typeface="Trebuchet MS" panose="020B0603020202020204"/>
+              <a:ea typeface="+mn-ea"/>
+              <a:cs typeface="+mn-cs"/>
+            </a:endParaRPr>
+          </a:p>
+        </p:txBody>
+      </p:sp>
+      <p:pic>
+        <p:nvPicPr>
+          <p:cNvPr id="9" name="Content Placeholder 8">
+            <a:extLst>
+              <a:ext uri="{FF2B5EF4-FFF2-40B4-BE49-F238E27FC236}">
+                <a16:creationId xmlns:a16="http://schemas.microsoft.com/office/drawing/2014/main" id="{AA56CCC4-BCA8-7722-160B-F79873C3AEB9}"/>
+              </a:ext>
+            </a:extLst>
+          </p:cNvPr>
+          <p:cNvPicPr>
+            <a:picLocks noGrp="1" noChangeAspect="1"/>
+          </p:cNvPicPr>
+          <p:nvPr>
+            <p:ph idx="1"/>
+          </p:nvPr>
+        </p:nvPicPr>
+        <p:blipFill>
+          <a:blip r:embed="rId3"/>
+          <a:stretch>
+            <a:fillRect/>
+          </a:stretch>
+        </p:blipFill>
+        <p:spPr>
+          <a:xfrm>
+            <a:off x="2076867" y="2160588"/>
+            <a:ext cx="5798303" cy="3881437"/>
+          </a:xfrm>
+        </p:spPr>
+      </p:pic>
+    </p:spTree>
+    <p:extLst>
+      <p:ext uri="{BB962C8B-B14F-4D97-AF65-F5344CB8AC3E}">
+        <p14:creationId xmlns:p14="http://schemas.microsoft.com/office/powerpoint/2010/main" val="3160950372"/>
+      </p:ext>
+    </p:extLst>
+  </p:cSld>
+  <p:clrMapOvr>
+    <a:masterClrMapping/>
+  </p:clrMapOvr>
+</p:sld>
+</file>
+
 <file path=ppt/slides/slide19.xml><?xml version="1.0" encoding="utf-8"?>
 <p:sld xmlns:a="http://schemas.openxmlformats.org/drawingml/2006/main" xmlns:r="http://schemas.openxmlformats.org/officeDocument/2006/relationships" xmlns:p="http://schemas.openxmlformats.org/presentationml/2006/main">
   <p:cSld>
@@ -11896,6 +11439,1767 @@
           <p:cNvPr id="2" name="Title 1">
             <a:extLst>
               <a:ext uri="{FF2B5EF4-FFF2-40B4-BE49-F238E27FC236}">
+                <a16:creationId xmlns:a16="http://schemas.microsoft.com/office/drawing/2014/main" id="{F7E90694-AA7F-451B-A875-1D23D1FDBA32}"/>
+              </a:ext>
+            </a:extLst>
+          </p:cNvPr>
+          <p:cNvSpPr>
+            <a:spLocks noGrp="1"/>
+          </p:cNvSpPr>
+          <p:nvPr>
+            <p:ph type="title"/>
+          </p:nvPr>
+        </p:nvSpPr>
+        <p:spPr>
+          <a:noFill/>
+        </p:spPr>
+        <p:txBody>
+          <a:bodyPr>
+            <a:noAutofit/>
+          </a:bodyPr>
+          <a:lstStyle/>
+          <a:p>
+            <a:r>
+              <a:rPr lang="en-US" sz="4400" dirty="0"/>
+              <a:t>Draw a square: braille – </a:t>
+            </a:r>
+            <a:r>
+              <a:rPr lang="en-US" sz="4000" dirty="0"/>
+              <a:t>Close look</a:t>
+            </a:r>
+          </a:p>
+        </p:txBody>
+      </p:sp>
+      <p:sp>
+        <p:nvSpPr>
+          <p:cNvPr id="4" name="Date Placeholder 3">
+            <a:extLst>
+              <a:ext uri="{FF2B5EF4-FFF2-40B4-BE49-F238E27FC236}">
+                <a16:creationId xmlns:a16="http://schemas.microsoft.com/office/drawing/2014/main" id="{B623EE2F-E3E9-437B-AFAE-1E0C5C94A5F8}"/>
+              </a:ext>
+            </a:extLst>
+          </p:cNvPr>
+          <p:cNvSpPr>
+            <a:spLocks noGrp="1"/>
+          </p:cNvSpPr>
+          <p:nvPr>
+            <p:ph type="dt" sz="half" idx="10"/>
+          </p:nvPr>
+        </p:nvSpPr>
+        <p:spPr/>
+        <p:txBody>
+          <a:bodyPr/>
+          <a:lstStyle/>
+          <a:p>
+            <a:pPr marL="0" marR="0" lvl="0" indent="0" algn="r" defTabSz="457200" rtl="0" eaLnBrk="1" fontAlgn="auto" latinLnBrk="0" hangingPunct="1">
+              <a:lnSpc>
+                <a:spcPct val="100000"/>
+              </a:lnSpc>
+              <a:spcBef>
+                <a:spcPts val="0"/>
+              </a:spcBef>
+              <a:spcAft>
+                <a:spcPts val="0"/>
+              </a:spcAft>
+              <a:buClrTx/>
+              <a:buSzTx/>
+              <a:buFontTx/>
+              <a:buNone/>
+              <a:tabLst/>
+              <a:defRPr/>
+            </a:pPr>
+            <a:fld id="{A7119916-CD40-456D-ABE3-55F8822671F7}" type="datetime1">
+              <a:rPr kumimoji="0" lang="en-US" sz="900" b="0" i="0" u="none" strike="noStrike" kern="1200" cap="none" spc="0" normalizeH="0" baseline="0" noProof="0" smtClean="0">
+                <a:ln>
+                  <a:noFill/>
+                </a:ln>
+                <a:solidFill>
+                  <a:prstClr val="black">
+                    <a:tint val="75000"/>
+                  </a:prstClr>
+                </a:solidFill>
+                <a:effectLst/>
+                <a:uLnTx/>
+                <a:uFillTx/>
+                <a:latin typeface="Trebuchet MS" panose="020B0603020202020204"/>
+                <a:ea typeface="+mn-ea"/>
+                <a:cs typeface="+mn-cs"/>
+              </a:rPr>
+              <a:pPr marL="0" marR="0" lvl="0" indent="0" algn="r" defTabSz="457200" rtl="0" eaLnBrk="1" fontAlgn="auto" latinLnBrk="0" hangingPunct="1">
+                <a:lnSpc>
+                  <a:spcPct val="100000"/>
+                </a:lnSpc>
+                <a:spcBef>
+                  <a:spcPts val="0"/>
+                </a:spcBef>
+                <a:spcAft>
+                  <a:spcPts val="0"/>
+                </a:spcAft>
+                <a:buClrTx/>
+                <a:buSzTx/>
+                <a:buFontTx/>
+                <a:buNone/>
+                <a:tabLst/>
+                <a:defRPr/>
+              </a:pPr>
+              <a:t>5/18/2026</a:t>
+            </a:fld>
+            <a:endParaRPr kumimoji="0" lang="en-US" sz="900" b="0" i="0" u="none" strike="noStrike" kern="1200" cap="none" spc="0" normalizeH="0" baseline="0" noProof="0" dirty="0">
+              <a:ln>
+                <a:noFill/>
+              </a:ln>
+              <a:solidFill>
+                <a:prstClr val="black">
+                  <a:tint val="75000"/>
+                </a:prstClr>
+              </a:solidFill>
+              <a:effectLst/>
+              <a:uLnTx/>
+              <a:uFillTx/>
+              <a:latin typeface="Trebuchet MS" panose="020B0603020202020204"/>
+              <a:ea typeface="+mn-ea"/>
+              <a:cs typeface="+mn-cs"/>
+            </a:endParaRPr>
+          </a:p>
+        </p:txBody>
+      </p:sp>
+      <p:sp>
+        <p:nvSpPr>
+          <p:cNvPr id="5" name="Footer Placeholder 4">
+            <a:extLst>
+              <a:ext uri="{FF2B5EF4-FFF2-40B4-BE49-F238E27FC236}">
+                <a16:creationId xmlns:a16="http://schemas.microsoft.com/office/drawing/2014/main" id="{4E4D04EE-5AD0-4A57-A42E-AE62E411ACEA}"/>
+              </a:ext>
+            </a:extLst>
+          </p:cNvPr>
+          <p:cNvSpPr>
+            <a:spLocks noGrp="1"/>
+          </p:cNvSpPr>
+          <p:nvPr>
+            <p:ph type="ftr" sz="quarter" idx="11"/>
+          </p:nvPr>
+        </p:nvSpPr>
+        <p:spPr/>
+        <p:txBody>
+          <a:bodyPr/>
+          <a:lstStyle/>
+          <a:p>
+            <a:pPr marL="0" marR="0" lvl="0" indent="0" algn="l" defTabSz="457200" rtl="0" eaLnBrk="1" fontAlgn="auto" latinLnBrk="0" hangingPunct="1">
+              <a:lnSpc>
+                <a:spcPct val="100000"/>
+              </a:lnSpc>
+              <a:spcBef>
+                <a:spcPts val="0"/>
+              </a:spcBef>
+              <a:spcAft>
+                <a:spcPts val="0"/>
+              </a:spcAft>
+              <a:buClrTx/>
+              <a:buSzTx/>
+              <a:buFontTx/>
+              <a:buNone/>
+              <a:tabLst/>
+              <a:defRPr/>
+            </a:pPr>
+            <a:r>
+              <a:rPr kumimoji="0" lang="en-US" sz="900" b="0" i="0" u="none" strike="noStrike" kern="1200" cap="none" spc="0" normalizeH="0" baseline="0" noProof="0" dirty="0">
+                <a:ln>
+                  <a:noFill/>
+                </a:ln>
+                <a:solidFill>
+                  <a:prstClr val="black">
+                    <a:tint val="75000"/>
+                  </a:prstClr>
+                </a:solidFill>
+                <a:effectLst/>
+                <a:uLnTx/>
+                <a:uFillTx/>
+                <a:latin typeface="Trebuchet MS" panose="020B0603020202020204"/>
+                <a:ea typeface="+mn-ea"/>
+                <a:cs typeface="+mn-cs"/>
+              </a:rPr>
+              <a:t>raysmith@alum.mit.edu</a:t>
+            </a:r>
+          </a:p>
+        </p:txBody>
+      </p:sp>
+      <p:sp>
+        <p:nvSpPr>
+          <p:cNvPr id="6" name="Slide Number Placeholder 5">
+            <a:extLst>
+              <a:ext uri="{FF2B5EF4-FFF2-40B4-BE49-F238E27FC236}">
+                <a16:creationId xmlns:a16="http://schemas.microsoft.com/office/drawing/2014/main" id="{9711C448-36A8-43E6-A891-6E42F22D1185}"/>
+              </a:ext>
+            </a:extLst>
+          </p:cNvPr>
+          <p:cNvSpPr>
+            <a:spLocks noGrp="1"/>
+          </p:cNvSpPr>
+          <p:nvPr>
+            <p:ph type="sldNum" sz="quarter" idx="12"/>
+          </p:nvPr>
+        </p:nvSpPr>
+        <p:spPr/>
+        <p:txBody>
+          <a:bodyPr/>
+          <a:lstStyle/>
+          <a:p>
+            <a:pPr marL="0" marR="0" lvl="0" indent="0" algn="r" defTabSz="457200" rtl="0" eaLnBrk="1" fontAlgn="auto" latinLnBrk="0" hangingPunct="1">
+              <a:lnSpc>
+                <a:spcPct val="100000"/>
+              </a:lnSpc>
+              <a:spcBef>
+                <a:spcPts val="0"/>
+              </a:spcBef>
+              <a:spcAft>
+                <a:spcPts val="0"/>
+              </a:spcAft>
+              <a:buClrTx/>
+              <a:buSzTx/>
+              <a:buFontTx/>
+              <a:buNone/>
+              <a:tabLst/>
+              <a:defRPr/>
+            </a:pPr>
+            <a:fld id="{6D22F896-40B5-4ADD-8801-0D06FADFA095}" type="slidenum">
+              <a:rPr kumimoji="0" lang="en-US" sz="900" b="0" i="0" u="none" strike="noStrike" kern="1200" cap="none" spc="0" normalizeH="0" baseline="0" noProof="0" smtClean="0">
+                <a:ln>
+                  <a:noFill/>
+                </a:ln>
+                <a:solidFill>
+                  <a:srgbClr val="90C226"/>
+                </a:solidFill>
+                <a:effectLst/>
+                <a:uLnTx/>
+                <a:uFillTx/>
+                <a:latin typeface="Trebuchet MS" panose="020B0603020202020204"/>
+                <a:ea typeface="+mn-ea"/>
+                <a:cs typeface="+mn-cs"/>
+              </a:rPr>
+              <a:pPr marL="0" marR="0" lvl="0" indent="0" algn="r" defTabSz="457200" rtl="0" eaLnBrk="1" fontAlgn="auto" latinLnBrk="0" hangingPunct="1">
+                <a:lnSpc>
+                  <a:spcPct val="100000"/>
+                </a:lnSpc>
+                <a:spcBef>
+                  <a:spcPts val="0"/>
+                </a:spcBef>
+                <a:spcAft>
+                  <a:spcPts val="0"/>
+                </a:spcAft>
+                <a:buClrTx/>
+                <a:buSzTx/>
+                <a:buFontTx/>
+                <a:buNone/>
+                <a:tabLst/>
+                <a:defRPr/>
+              </a:pPr>
+              <a:t>19</a:t>
+            </a:fld>
+            <a:endParaRPr kumimoji="0" lang="en-US" sz="900" b="0" i="0" u="none" strike="noStrike" kern="1200" cap="none" spc="0" normalizeH="0" baseline="0" noProof="0" dirty="0">
+              <a:ln>
+                <a:noFill/>
+              </a:ln>
+              <a:solidFill>
+                <a:srgbClr val="90C226"/>
+              </a:solidFill>
+              <a:effectLst/>
+              <a:uLnTx/>
+              <a:uFillTx/>
+              <a:latin typeface="Trebuchet MS" panose="020B0603020202020204"/>
+              <a:ea typeface="+mn-ea"/>
+              <a:cs typeface="+mn-cs"/>
+            </a:endParaRPr>
+          </a:p>
+        </p:txBody>
+      </p:sp>
+      <p:pic>
+        <p:nvPicPr>
+          <p:cNvPr id="10" name="Content Placeholder 9">
+            <a:extLst>
+              <a:ext uri="{FF2B5EF4-FFF2-40B4-BE49-F238E27FC236}">
+                <a16:creationId xmlns:a16="http://schemas.microsoft.com/office/drawing/2014/main" id="{E4D419EC-0F75-484F-BF03-97486086871A}"/>
+              </a:ext>
+            </a:extLst>
+          </p:cNvPr>
+          <p:cNvPicPr>
+            <a:picLocks noGrp="1" noChangeAspect="1"/>
+          </p:cNvPicPr>
+          <p:nvPr>
+            <p:ph idx="1"/>
+          </p:nvPr>
+        </p:nvPicPr>
+        <p:blipFill>
+          <a:blip r:embed="rId3"/>
+          <a:stretch>
+            <a:fillRect/>
+          </a:stretch>
+        </p:blipFill>
+        <p:spPr>
+          <a:xfrm>
+            <a:off x="1562470" y="2160588"/>
+            <a:ext cx="6827098" cy="3881437"/>
+          </a:xfrm>
+        </p:spPr>
+      </p:pic>
+    </p:spTree>
+    <p:extLst>
+      <p:ext uri="{BB962C8B-B14F-4D97-AF65-F5344CB8AC3E}">
+        <p14:creationId xmlns:p14="http://schemas.microsoft.com/office/powerpoint/2010/main" val="2269166299"/>
+      </p:ext>
+    </p:extLst>
+  </p:cSld>
+  <p:clrMapOvr>
+    <a:masterClrMapping/>
+  </p:clrMapOvr>
+</p:sld>
+</file>
+
+<file path=ppt/slides/slide2.xml><?xml version="1.0" encoding="utf-8"?>
+<p:sld xmlns:a="http://schemas.openxmlformats.org/drawingml/2006/main" xmlns:r="http://schemas.openxmlformats.org/officeDocument/2006/relationships" xmlns:p="http://schemas.openxmlformats.org/presentationml/2006/main">
+  <p:cSld>
+    <p:bg>
+      <p:bgPr>
+        <a:gradFill>
+          <a:gsLst>
+            <a:gs pos="0">
+              <a:schemeClr val="accent4">
+                <a:lumMod val="5000"/>
+                <a:lumOff val="95000"/>
+              </a:schemeClr>
+            </a:gs>
+            <a:gs pos="74000">
+              <a:schemeClr val="accent4">
+                <a:lumMod val="45000"/>
+                <a:lumOff val="55000"/>
+              </a:schemeClr>
+            </a:gs>
+            <a:gs pos="83000">
+              <a:schemeClr val="accent4">
+                <a:lumMod val="45000"/>
+                <a:lumOff val="55000"/>
+              </a:schemeClr>
+            </a:gs>
+            <a:gs pos="100000">
+              <a:schemeClr val="accent4">
+                <a:lumMod val="30000"/>
+                <a:lumOff val="70000"/>
+              </a:schemeClr>
+            </a:gs>
+          </a:gsLst>
+          <a:lin ang="5400000" scaled="1"/>
+        </a:gradFill>
+        <a:effectLst/>
+      </p:bgPr>
+    </p:bg>
+    <p:spTree>
+      <p:nvGrpSpPr>
+        <p:cNvPr id="1" name=""/>
+        <p:cNvGrpSpPr/>
+        <p:nvPr/>
+      </p:nvGrpSpPr>
+      <p:grpSpPr>
+        <a:xfrm>
+          <a:off x="0" y="0"/>
+          <a:ext cx="0" cy="0"/>
+          <a:chOff x="0" y="0"/>
+          <a:chExt cx="0" cy="0"/>
+        </a:xfrm>
+      </p:grpSpPr>
+      <p:sp>
+        <p:nvSpPr>
+          <p:cNvPr id="2" name="Title 1">
+            <a:extLst>
+              <a:ext uri="{FF2B5EF4-FFF2-40B4-BE49-F238E27FC236}">
+                <a16:creationId xmlns:a16="http://schemas.microsoft.com/office/drawing/2014/main" id="{F7E90694-AA7F-451B-A875-1D23D1FDBA32}"/>
+              </a:ext>
+            </a:extLst>
+          </p:cNvPr>
+          <p:cNvSpPr>
+            <a:spLocks noGrp="1"/>
+          </p:cNvSpPr>
+          <p:nvPr>
+            <p:ph type="title"/>
+          </p:nvPr>
+        </p:nvSpPr>
+        <p:spPr>
+          <a:noFill/>
+        </p:spPr>
+        <p:txBody>
+          <a:bodyPr>
+            <a:noAutofit/>
+          </a:bodyPr>
+          <a:lstStyle/>
+          <a:p>
+            <a:r>
+              <a:rPr lang="en-US" sz="4400" dirty="0"/>
+              <a:t>Introduction</a:t>
+            </a:r>
+          </a:p>
+        </p:txBody>
+      </p:sp>
+      <p:sp>
+        <p:nvSpPr>
+          <p:cNvPr id="3" name="Content Placeholder 2">
+            <a:extLst>
+              <a:ext uri="{FF2B5EF4-FFF2-40B4-BE49-F238E27FC236}">
+                <a16:creationId xmlns:a16="http://schemas.microsoft.com/office/drawing/2014/main" id="{B25115FD-141E-48C6-A3F1-61C4558CC9C7}"/>
+              </a:ext>
+            </a:extLst>
+          </p:cNvPr>
+          <p:cNvSpPr>
+            <a:spLocks noGrp="1"/>
+          </p:cNvSpPr>
+          <p:nvPr>
+            <p:ph idx="1"/>
+          </p:nvPr>
+        </p:nvSpPr>
+        <p:spPr/>
+        <p:txBody>
+          <a:bodyPr>
+            <a:normAutofit/>
+          </a:bodyPr>
+          <a:lstStyle/>
+          <a:p>
+            <a:r>
+              <a:rPr lang="en-US" sz="3600" dirty="0"/>
+              <a:t>Goals</a:t>
+            </a:r>
+          </a:p>
+          <a:p>
+            <a:pPr lvl="1"/>
+            <a:r>
+              <a:rPr lang="en-US" sz="3400" i="1" dirty="0"/>
+              <a:t>Demonstrate graphics tool</a:t>
+            </a:r>
+          </a:p>
+          <a:p>
+            <a:pPr lvl="1"/>
+            <a:r>
+              <a:rPr lang="en-US" sz="3400" i="1" dirty="0"/>
+              <a:t>Provide reasons behind</a:t>
+            </a:r>
+          </a:p>
+          <a:p>
+            <a:pPr lvl="1"/>
+            <a:r>
+              <a:rPr lang="en-US" sz="3400" i="1" dirty="0"/>
+              <a:t>Show some extensions</a:t>
+            </a:r>
+          </a:p>
+          <a:p>
+            <a:pPr lvl="1"/>
+            <a:endParaRPr lang="en-US" sz="3400" i="1" dirty="0"/>
+          </a:p>
+        </p:txBody>
+      </p:sp>
+      <p:sp>
+        <p:nvSpPr>
+          <p:cNvPr id="4" name="Date Placeholder 3">
+            <a:extLst>
+              <a:ext uri="{FF2B5EF4-FFF2-40B4-BE49-F238E27FC236}">
+                <a16:creationId xmlns:a16="http://schemas.microsoft.com/office/drawing/2014/main" id="{B623EE2F-E3E9-437B-AFAE-1E0C5C94A5F8}"/>
+              </a:ext>
+            </a:extLst>
+          </p:cNvPr>
+          <p:cNvSpPr>
+            <a:spLocks noGrp="1"/>
+          </p:cNvSpPr>
+          <p:nvPr>
+            <p:ph type="dt" sz="half" idx="10"/>
+          </p:nvPr>
+        </p:nvSpPr>
+        <p:spPr/>
+        <p:txBody>
+          <a:bodyPr/>
+          <a:lstStyle/>
+          <a:p>
+            <a:pPr marL="0" marR="0" lvl="0" indent="0" algn="r" defTabSz="457200" rtl="0" eaLnBrk="1" fontAlgn="auto" latinLnBrk="0" hangingPunct="1">
+              <a:lnSpc>
+                <a:spcPct val="100000"/>
+              </a:lnSpc>
+              <a:spcBef>
+                <a:spcPts val="0"/>
+              </a:spcBef>
+              <a:spcAft>
+                <a:spcPts val="0"/>
+              </a:spcAft>
+              <a:buClrTx/>
+              <a:buSzTx/>
+              <a:buFontTx/>
+              <a:buNone/>
+              <a:tabLst/>
+              <a:defRPr/>
+            </a:pPr>
+            <a:fld id="{A7119916-CD40-456D-ABE3-55F8822671F7}" type="datetime1">
+              <a:rPr kumimoji="0" lang="en-US" sz="900" b="0" i="0" u="none" strike="noStrike" kern="1200" cap="none" spc="0" normalizeH="0" baseline="0" noProof="0" smtClean="0">
+                <a:ln>
+                  <a:noFill/>
+                </a:ln>
+                <a:solidFill>
+                  <a:prstClr val="black">
+                    <a:tint val="75000"/>
+                  </a:prstClr>
+                </a:solidFill>
+                <a:effectLst/>
+                <a:uLnTx/>
+                <a:uFillTx/>
+                <a:latin typeface="Trebuchet MS" panose="020B0603020202020204"/>
+                <a:ea typeface="+mn-ea"/>
+                <a:cs typeface="+mn-cs"/>
+              </a:rPr>
+              <a:pPr marL="0" marR="0" lvl="0" indent="0" algn="r" defTabSz="457200" rtl="0" eaLnBrk="1" fontAlgn="auto" latinLnBrk="0" hangingPunct="1">
+                <a:lnSpc>
+                  <a:spcPct val="100000"/>
+                </a:lnSpc>
+                <a:spcBef>
+                  <a:spcPts val="0"/>
+                </a:spcBef>
+                <a:spcAft>
+                  <a:spcPts val="0"/>
+                </a:spcAft>
+                <a:buClrTx/>
+                <a:buSzTx/>
+                <a:buFontTx/>
+                <a:buNone/>
+                <a:tabLst/>
+                <a:defRPr/>
+              </a:pPr>
+              <a:t>5/18/2026</a:t>
+            </a:fld>
+            <a:endParaRPr kumimoji="0" lang="en-US" sz="900" b="0" i="0" u="none" strike="noStrike" kern="1200" cap="none" spc="0" normalizeH="0" baseline="0" noProof="0" dirty="0">
+              <a:ln>
+                <a:noFill/>
+              </a:ln>
+              <a:solidFill>
+                <a:prstClr val="black">
+                  <a:tint val="75000"/>
+                </a:prstClr>
+              </a:solidFill>
+              <a:effectLst/>
+              <a:uLnTx/>
+              <a:uFillTx/>
+              <a:latin typeface="Trebuchet MS" panose="020B0603020202020204"/>
+              <a:ea typeface="+mn-ea"/>
+              <a:cs typeface="+mn-cs"/>
+            </a:endParaRPr>
+          </a:p>
+        </p:txBody>
+      </p:sp>
+      <p:sp>
+        <p:nvSpPr>
+          <p:cNvPr id="5" name="Footer Placeholder 4">
+            <a:extLst>
+              <a:ext uri="{FF2B5EF4-FFF2-40B4-BE49-F238E27FC236}">
+                <a16:creationId xmlns:a16="http://schemas.microsoft.com/office/drawing/2014/main" id="{4E4D04EE-5AD0-4A57-A42E-AE62E411ACEA}"/>
+              </a:ext>
+            </a:extLst>
+          </p:cNvPr>
+          <p:cNvSpPr>
+            <a:spLocks noGrp="1"/>
+          </p:cNvSpPr>
+          <p:nvPr>
+            <p:ph type="ftr" sz="quarter" idx="11"/>
+          </p:nvPr>
+        </p:nvSpPr>
+        <p:spPr/>
+        <p:txBody>
+          <a:bodyPr/>
+          <a:lstStyle/>
+          <a:p>
+            <a:pPr marL="0" marR="0" lvl="0" indent="0" algn="l" defTabSz="457200" rtl="0" eaLnBrk="1" fontAlgn="auto" latinLnBrk="0" hangingPunct="1">
+              <a:lnSpc>
+                <a:spcPct val="100000"/>
+              </a:lnSpc>
+              <a:spcBef>
+                <a:spcPts val="0"/>
+              </a:spcBef>
+              <a:spcAft>
+                <a:spcPts val="0"/>
+              </a:spcAft>
+              <a:buClrTx/>
+              <a:buSzTx/>
+              <a:buFontTx/>
+              <a:buNone/>
+              <a:tabLst/>
+              <a:defRPr/>
+            </a:pPr>
+            <a:r>
+              <a:rPr kumimoji="0" lang="en-US" sz="900" b="0" i="0" u="none" strike="noStrike" kern="1200" cap="none" spc="0" normalizeH="0" baseline="0" noProof="0" dirty="0">
+                <a:ln>
+                  <a:noFill/>
+                </a:ln>
+                <a:solidFill>
+                  <a:prstClr val="black">
+                    <a:tint val="75000"/>
+                  </a:prstClr>
+                </a:solidFill>
+                <a:effectLst/>
+                <a:uLnTx/>
+                <a:uFillTx/>
+                <a:latin typeface="Trebuchet MS" panose="020B0603020202020204"/>
+                <a:ea typeface="+mn-ea"/>
+                <a:cs typeface="+mn-cs"/>
+              </a:rPr>
+              <a:t>raysmith@alum.mit.edu</a:t>
+            </a:r>
+          </a:p>
+        </p:txBody>
+      </p:sp>
+      <p:sp>
+        <p:nvSpPr>
+          <p:cNvPr id="6" name="Slide Number Placeholder 5">
+            <a:extLst>
+              <a:ext uri="{FF2B5EF4-FFF2-40B4-BE49-F238E27FC236}">
+                <a16:creationId xmlns:a16="http://schemas.microsoft.com/office/drawing/2014/main" id="{9711C448-36A8-43E6-A891-6E42F22D1185}"/>
+              </a:ext>
+            </a:extLst>
+          </p:cNvPr>
+          <p:cNvSpPr>
+            <a:spLocks noGrp="1"/>
+          </p:cNvSpPr>
+          <p:nvPr>
+            <p:ph type="sldNum" sz="quarter" idx="12"/>
+          </p:nvPr>
+        </p:nvSpPr>
+        <p:spPr/>
+        <p:txBody>
+          <a:bodyPr/>
+          <a:lstStyle/>
+          <a:p>
+            <a:pPr marL="0" marR="0" lvl="0" indent="0" algn="r" defTabSz="457200" rtl="0" eaLnBrk="1" fontAlgn="auto" latinLnBrk="0" hangingPunct="1">
+              <a:lnSpc>
+                <a:spcPct val="100000"/>
+              </a:lnSpc>
+              <a:spcBef>
+                <a:spcPts val="0"/>
+              </a:spcBef>
+              <a:spcAft>
+                <a:spcPts val="0"/>
+              </a:spcAft>
+              <a:buClrTx/>
+              <a:buSzTx/>
+              <a:buFontTx/>
+              <a:buNone/>
+              <a:tabLst/>
+              <a:defRPr/>
+            </a:pPr>
+            <a:fld id="{6D22F896-40B5-4ADD-8801-0D06FADFA095}" type="slidenum">
+              <a:rPr kumimoji="0" lang="en-US" sz="900" b="0" i="0" u="none" strike="noStrike" kern="1200" cap="none" spc="0" normalizeH="0" baseline="0" noProof="0" smtClean="0">
+                <a:ln>
+                  <a:noFill/>
+                </a:ln>
+                <a:solidFill>
+                  <a:srgbClr val="90C226"/>
+                </a:solidFill>
+                <a:effectLst/>
+                <a:uLnTx/>
+                <a:uFillTx/>
+                <a:latin typeface="Trebuchet MS" panose="020B0603020202020204"/>
+                <a:ea typeface="+mn-ea"/>
+                <a:cs typeface="+mn-cs"/>
+              </a:rPr>
+              <a:pPr marL="0" marR="0" lvl="0" indent="0" algn="r" defTabSz="457200" rtl="0" eaLnBrk="1" fontAlgn="auto" latinLnBrk="0" hangingPunct="1">
+                <a:lnSpc>
+                  <a:spcPct val="100000"/>
+                </a:lnSpc>
+                <a:spcBef>
+                  <a:spcPts val="0"/>
+                </a:spcBef>
+                <a:spcAft>
+                  <a:spcPts val="0"/>
+                </a:spcAft>
+                <a:buClrTx/>
+                <a:buSzTx/>
+                <a:buFontTx/>
+                <a:buNone/>
+                <a:tabLst/>
+                <a:defRPr/>
+              </a:pPr>
+              <a:t>2</a:t>
+            </a:fld>
+            <a:endParaRPr kumimoji="0" lang="en-US" sz="900" b="0" i="0" u="none" strike="noStrike" kern="1200" cap="none" spc="0" normalizeH="0" baseline="0" noProof="0" dirty="0">
+              <a:ln>
+                <a:noFill/>
+              </a:ln>
+              <a:solidFill>
+                <a:srgbClr val="90C226"/>
+              </a:solidFill>
+              <a:effectLst/>
+              <a:uLnTx/>
+              <a:uFillTx/>
+              <a:latin typeface="Trebuchet MS" panose="020B0603020202020204"/>
+              <a:ea typeface="+mn-ea"/>
+              <a:cs typeface="+mn-cs"/>
+            </a:endParaRPr>
+          </a:p>
+        </p:txBody>
+      </p:sp>
+    </p:spTree>
+    <p:extLst>
+      <p:ext uri="{BB962C8B-B14F-4D97-AF65-F5344CB8AC3E}">
+        <p14:creationId xmlns:p14="http://schemas.microsoft.com/office/powerpoint/2010/main" val="2312526716"/>
+      </p:ext>
+    </p:extLst>
+  </p:cSld>
+  <p:clrMapOvr>
+    <a:masterClrMapping/>
+  </p:clrMapOvr>
+</p:sld>
+</file>
+
+<file path=ppt/slides/slide20.xml><?xml version="1.0" encoding="utf-8"?>
+<p:sld xmlns:a="http://schemas.openxmlformats.org/drawingml/2006/main" xmlns:r="http://schemas.openxmlformats.org/officeDocument/2006/relationships" xmlns:p="http://schemas.openxmlformats.org/presentationml/2006/main">
+  <p:cSld>
+    <p:spTree>
+      <p:nvGrpSpPr>
+        <p:cNvPr id="1" name=""/>
+        <p:cNvGrpSpPr/>
+        <p:nvPr/>
+      </p:nvGrpSpPr>
+      <p:grpSpPr>
+        <a:xfrm>
+          <a:off x="0" y="0"/>
+          <a:ext cx="0" cy="0"/>
+          <a:chOff x="0" y="0"/>
+          <a:chExt cx="0" cy="0"/>
+        </a:xfrm>
+      </p:grpSpPr>
+      <p:sp>
+        <p:nvSpPr>
+          <p:cNvPr id="2" name="Title 1">
+            <a:extLst>
+              <a:ext uri="{FF2B5EF4-FFF2-40B4-BE49-F238E27FC236}">
+                <a16:creationId xmlns:a16="http://schemas.microsoft.com/office/drawing/2014/main" id="{89E7459D-B5BC-9CC6-A0D1-3B3A95B67D93}"/>
+              </a:ext>
+            </a:extLst>
+          </p:cNvPr>
+          <p:cNvSpPr>
+            <a:spLocks noGrp="1"/>
+          </p:cNvSpPr>
+          <p:nvPr>
+            <p:ph type="title"/>
+          </p:nvPr>
+        </p:nvSpPr>
+        <p:spPr/>
+        <p:txBody>
+          <a:bodyPr/>
+          <a:lstStyle/>
+          <a:p>
+            <a:r>
+              <a:rPr lang="en-US" dirty="0"/>
+              <a:t>A look at actual Braille</a:t>
+            </a:r>
+          </a:p>
+        </p:txBody>
+      </p:sp>
+      <p:pic>
+        <p:nvPicPr>
+          <p:cNvPr id="5" name="Content Placeholder 4">
+            <a:extLst>
+              <a:ext uri="{FF2B5EF4-FFF2-40B4-BE49-F238E27FC236}">
+                <a16:creationId xmlns:a16="http://schemas.microsoft.com/office/drawing/2014/main" id="{12299330-4636-07B7-32E3-444BCDF3EFDC}"/>
+              </a:ext>
+            </a:extLst>
+          </p:cNvPr>
+          <p:cNvPicPr>
+            <a:picLocks noGrp="1" noChangeAspect="1"/>
+          </p:cNvPicPr>
+          <p:nvPr>
+            <p:ph idx="1"/>
+          </p:nvPr>
+        </p:nvPicPr>
+        <p:blipFill>
+          <a:blip r:embed="rId2"/>
+          <a:stretch>
+            <a:fillRect/>
+          </a:stretch>
+        </p:blipFill>
+        <p:spPr>
+          <a:xfrm>
+            <a:off x="2368909" y="2160588"/>
+            <a:ext cx="5214219" cy="3881437"/>
+          </a:xfrm>
+        </p:spPr>
+      </p:pic>
+    </p:spTree>
+    <p:extLst>
+      <p:ext uri="{BB962C8B-B14F-4D97-AF65-F5344CB8AC3E}">
+        <p14:creationId xmlns:p14="http://schemas.microsoft.com/office/powerpoint/2010/main" val="2417186510"/>
+      </p:ext>
+    </p:extLst>
+  </p:cSld>
+  <p:clrMapOvr>
+    <a:masterClrMapping/>
+  </p:clrMapOvr>
+</p:sld>
+</file>
+
+<file path=ppt/slides/slide21.xml><?xml version="1.0" encoding="utf-8"?>
+<p:sld xmlns:a="http://schemas.openxmlformats.org/drawingml/2006/main" xmlns:r="http://schemas.openxmlformats.org/officeDocument/2006/relationships" xmlns:p="http://schemas.openxmlformats.org/presentationml/2006/main">
+  <p:cSld>
+    <p:spTree>
+      <p:nvGrpSpPr>
+        <p:cNvPr id="1" name=""/>
+        <p:cNvGrpSpPr/>
+        <p:nvPr/>
+      </p:nvGrpSpPr>
+      <p:grpSpPr>
+        <a:xfrm>
+          <a:off x="0" y="0"/>
+          <a:ext cx="0" cy="0"/>
+          <a:chOff x="0" y="0"/>
+          <a:chExt cx="0" cy="0"/>
+        </a:xfrm>
+      </p:grpSpPr>
+      <p:sp>
+        <p:nvSpPr>
+          <p:cNvPr id="2" name="Title 1">
+            <a:extLst>
+              <a:ext uri="{FF2B5EF4-FFF2-40B4-BE49-F238E27FC236}">
+                <a16:creationId xmlns:a16="http://schemas.microsoft.com/office/drawing/2014/main" id="{6C59DBBB-72B6-41A0-FAC2-48B414FD1742}"/>
+              </a:ext>
+            </a:extLst>
+          </p:cNvPr>
+          <p:cNvSpPr>
+            <a:spLocks noGrp="1"/>
+          </p:cNvSpPr>
+          <p:nvPr>
+            <p:ph type="title"/>
+          </p:nvPr>
+        </p:nvSpPr>
+        <p:spPr/>
+        <p:txBody>
+          <a:bodyPr/>
+          <a:lstStyle/>
+          <a:p>
+            <a:r>
+              <a:rPr lang="en-US" dirty="0"/>
+              <a:t>Actual Code for Braille</a:t>
+            </a:r>
+          </a:p>
+        </p:txBody>
+      </p:sp>
+      <p:sp>
+        <p:nvSpPr>
+          <p:cNvPr id="3" name="Content Placeholder 2">
+            <a:extLst>
+              <a:ext uri="{FF2B5EF4-FFF2-40B4-BE49-F238E27FC236}">
+                <a16:creationId xmlns:a16="http://schemas.microsoft.com/office/drawing/2014/main" id="{C79B5955-B391-D899-1282-047C7D3868DB}"/>
+              </a:ext>
+            </a:extLst>
+          </p:cNvPr>
+          <p:cNvSpPr>
+            <a:spLocks noGrp="1"/>
+          </p:cNvSpPr>
+          <p:nvPr>
+            <p:ph idx="1"/>
+          </p:nvPr>
+        </p:nvSpPr>
+        <p:spPr>
+          <a:xfrm>
+            <a:off x="677334" y="1581912"/>
+            <a:ext cx="8596668" cy="5020055"/>
+          </a:xfrm>
+        </p:spPr>
+        <p:txBody>
+          <a:bodyPr>
+            <a:normAutofit/>
+          </a:bodyPr>
+          <a:lstStyle/>
+          <a:p>
+            <a:pPr marL="0" indent="0">
+              <a:buNone/>
+            </a:pPr>
+            <a:r>
+              <a:rPr lang="en-US" sz="2000" b="0" dirty="0">
+                <a:solidFill>
+                  <a:srgbClr val="008000"/>
+                </a:solidFill>
+                <a:effectLst/>
+                <a:highlight>
+                  <a:srgbClr val="FFFFFF"/>
+                </a:highlight>
+                <a:latin typeface="Consolas" panose="020B0609020204030204" pitchFamily="49" charset="0"/>
+              </a:rPr>
+              <a:t># square_loop.py</a:t>
+            </a:r>
+            <a:endParaRPr lang="en-US" sz="2000" b="0" dirty="0">
+              <a:solidFill>
+                <a:srgbClr val="3B3B3B"/>
+              </a:solidFill>
+              <a:effectLst/>
+              <a:highlight>
+                <a:srgbClr val="FFFFFF"/>
+              </a:highlight>
+              <a:latin typeface="Consolas" panose="020B0609020204030204" pitchFamily="49" charset="0"/>
+            </a:endParaRPr>
+          </a:p>
+          <a:p>
+            <a:pPr marL="0" indent="0">
+              <a:buNone/>
+            </a:pPr>
+            <a:r>
+              <a:rPr lang="en-US" sz="2000" b="0" dirty="0">
+                <a:solidFill>
+                  <a:srgbClr val="008000"/>
+                </a:solidFill>
+                <a:effectLst/>
+                <a:highlight>
+                  <a:srgbClr val="FFFFFF"/>
+                </a:highlight>
+                <a:latin typeface="Consolas" panose="020B0609020204030204" pitchFamily="49" charset="0"/>
+              </a:rPr>
+              <a:t># Display a square</a:t>
+            </a:r>
+            <a:endParaRPr lang="en-US" sz="2000" b="0" dirty="0">
+              <a:solidFill>
+                <a:srgbClr val="3B3B3B"/>
+              </a:solidFill>
+              <a:effectLst/>
+              <a:highlight>
+                <a:srgbClr val="FFFFFF"/>
+              </a:highlight>
+              <a:latin typeface="Consolas" panose="020B0609020204030204" pitchFamily="49" charset="0"/>
+            </a:endParaRPr>
+          </a:p>
+          <a:p>
+            <a:pPr marL="0" indent="0">
+              <a:buNone/>
+            </a:pPr>
+            <a:br>
+              <a:rPr lang="en-US" sz="2000" b="0" dirty="0">
+                <a:solidFill>
+                  <a:srgbClr val="3B3B3B"/>
+                </a:solidFill>
+                <a:effectLst/>
+                <a:highlight>
+                  <a:srgbClr val="FFFFFF"/>
+                </a:highlight>
+                <a:latin typeface="Consolas" panose="020B0609020204030204" pitchFamily="49" charset="0"/>
+              </a:rPr>
+            </a:br>
+            <a:r>
+              <a:rPr lang="en-US" sz="2000" b="0" dirty="0">
+                <a:solidFill>
+                  <a:srgbClr val="AF00DB"/>
+                </a:solidFill>
+                <a:effectLst/>
+                <a:highlight>
+                  <a:srgbClr val="FFFFFF"/>
+                </a:highlight>
+                <a:latin typeface="Consolas" panose="020B0609020204030204" pitchFamily="49" charset="0"/>
+              </a:rPr>
+              <a:t>from</a:t>
+            </a:r>
+            <a:r>
+              <a:rPr lang="en-US" sz="2000" b="0" dirty="0">
+                <a:solidFill>
+                  <a:srgbClr val="3B3B3B"/>
+                </a:solidFill>
+                <a:effectLst/>
+                <a:highlight>
+                  <a:srgbClr val="FFFFFF"/>
+                </a:highlight>
+                <a:latin typeface="Consolas" panose="020B0609020204030204" pitchFamily="49" charset="0"/>
+              </a:rPr>
+              <a:t> </a:t>
+            </a:r>
+            <a:r>
+              <a:rPr lang="en-US" sz="2000" b="0" dirty="0">
+                <a:solidFill>
+                  <a:srgbClr val="267F99"/>
+                </a:solidFill>
+                <a:effectLst/>
+                <a:highlight>
+                  <a:srgbClr val="FFFFFF"/>
+                </a:highlight>
+                <a:latin typeface="Consolas" panose="020B0609020204030204" pitchFamily="49" charset="0"/>
+              </a:rPr>
+              <a:t>turtle_braille_link</a:t>
+            </a:r>
+            <a:r>
+              <a:rPr lang="en-US" sz="2000" b="0" dirty="0">
+                <a:solidFill>
+                  <a:srgbClr val="3B3B3B"/>
+                </a:solidFill>
+                <a:effectLst/>
+                <a:highlight>
+                  <a:srgbClr val="FFFFFF"/>
+                </a:highlight>
+                <a:latin typeface="Consolas" panose="020B0609020204030204" pitchFamily="49" charset="0"/>
+              </a:rPr>
+              <a:t> </a:t>
+            </a:r>
+            <a:r>
+              <a:rPr lang="en-US" sz="2000" b="0" dirty="0">
+                <a:solidFill>
+                  <a:srgbClr val="AF00DB"/>
+                </a:solidFill>
+                <a:effectLst/>
+                <a:highlight>
+                  <a:srgbClr val="FFFFFF"/>
+                </a:highlight>
+                <a:latin typeface="Consolas" panose="020B0609020204030204" pitchFamily="49" charset="0"/>
+              </a:rPr>
+              <a:t>import</a:t>
+            </a:r>
+            <a:r>
+              <a:rPr lang="en-US" sz="2000" b="0" dirty="0">
+                <a:solidFill>
+                  <a:srgbClr val="3B3B3B"/>
+                </a:solidFill>
+                <a:effectLst/>
+                <a:highlight>
+                  <a:srgbClr val="FFFFFF"/>
+                </a:highlight>
+                <a:latin typeface="Consolas" panose="020B0609020204030204" pitchFamily="49" charset="0"/>
+              </a:rPr>
+              <a:t> </a:t>
+            </a:r>
+            <a:r>
+              <a:rPr lang="en-US" sz="2000" b="0" dirty="0">
+                <a:solidFill>
+                  <a:srgbClr val="000000"/>
+                </a:solidFill>
+                <a:effectLst/>
+                <a:highlight>
+                  <a:srgbClr val="FFFFFF"/>
+                </a:highlight>
+                <a:latin typeface="Consolas" panose="020B0609020204030204" pitchFamily="49" charset="0"/>
+              </a:rPr>
+              <a:t>*</a:t>
+            </a:r>
+            <a:r>
+              <a:rPr lang="en-US" sz="2000" b="0" dirty="0">
+                <a:solidFill>
+                  <a:srgbClr val="3B3B3B"/>
+                </a:solidFill>
+                <a:effectLst/>
+                <a:highlight>
+                  <a:srgbClr val="FFFFFF"/>
+                </a:highlight>
+                <a:latin typeface="Consolas" panose="020B0609020204030204" pitchFamily="49" charset="0"/>
+              </a:rPr>
+              <a:t>    </a:t>
+            </a:r>
+            <a:r>
+              <a:rPr lang="en-US" sz="2000" b="0" dirty="0">
+                <a:solidFill>
+                  <a:srgbClr val="008000"/>
+                </a:solidFill>
+                <a:effectLst/>
+                <a:highlight>
+                  <a:srgbClr val="FFFFFF"/>
+                </a:highlight>
+                <a:latin typeface="Consolas" panose="020B0609020204030204" pitchFamily="49" charset="0"/>
+              </a:rPr>
+              <a:t># Get our graphics</a:t>
+            </a:r>
+            <a:endParaRPr lang="en-US" sz="2000" b="0" dirty="0">
+              <a:solidFill>
+                <a:srgbClr val="3B3B3B"/>
+              </a:solidFill>
+              <a:effectLst/>
+              <a:highlight>
+                <a:srgbClr val="FFFFFF"/>
+              </a:highlight>
+              <a:latin typeface="Consolas" panose="020B0609020204030204" pitchFamily="49" charset="0"/>
+            </a:endParaRPr>
+          </a:p>
+          <a:p>
+            <a:pPr marL="0" indent="0">
+              <a:buNone/>
+            </a:pPr>
+            <a:r>
+              <a:rPr lang="en-US" sz="2000" b="0" dirty="0">
+                <a:solidFill>
+                  <a:srgbClr val="008000"/>
+                </a:solidFill>
+                <a:effectLst/>
+                <a:highlight>
+                  <a:srgbClr val="FFFFFF"/>
+                </a:highlight>
+                <a:latin typeface="Consolas" panose="020B0609020204030204" pitchFamily="49" charset="0"/>
+              </a:rPr>
+              <a:t>##from turtle import *           # Get standard stuff</a:t>
+            </a:r>
+            <a:endParaRPr lang="en-US" sz="2000" b="0" dirty="0">
+              <a:solidFill>
+                <a:srgbClr val="3B3B3B"/>
+              </a:solidFill>
+              <a:effectLst/>
+              <a:highlight>
+                <a:srgbClr val="FFFFFF"/>
+              </a:highlight>
+              <a:latin typeface="Consolas" panose="020B0609020204030204" pitchFamily="49" charset="0"/>
+            </a:endParaRPr>
+          </a:p>
+          <a:p>
+            <a:pPr marL="0" indent="0">
+              <a:buNone/>
+            </a:pPr>
+            <a:br>
+              <a:rPr lang="en-US" sz="2000" b="0" dirty="0">
+                <a:solidFill>
+                  <a:srgbClr val="3B3B3B"/>
+                </a:solidFill>
+                <a:effectLst/>
+                <a:highlight>
+                  <a:srgbClr val="FFFFFF"/>
+                </a:highlight>
+                <a:latin typeface="Consolas" panose="020B0609020204030204" pitchFamily="49" charset="0"/>
+              </a:rPr>
+            </a:br>
+            <a:r>
+              <a:rPr lang="en-US" sz="2000" b="0" dirty="0">
+                <a:solidFill>
+                  <a:srgbClr val="3B3B3B"/>
+                </a:solidFill>
+                <a:effectLst/>
+                <a:highlight>
+                  <a:srgbClr val="FFFFFF"/>
+                </a:highlight>
+                <a:latin typeface="Consolas" panose="020B0609020204030204" pitchFamily="49" charset="0"/>
+              </a:rPr>
+              <a:t>color(</a:t>
+            </a:r>
+            <a:r>
+              <a:rPr lang="en-US" sz="2000" b="0" dirty="0">
+                <a:solidFill>
+                  <a:srgbClr val="A31515"/>
+                </a:solidFill>
+                <a:effectLst/>
+                <a:highlight>
+                  <a:srgbClr val="FFFFFF"/>
+                </a:highlight>
+                <a:latin typeface="Consolas" panose="020B0609020204030204" pitchFamily="49" charset="0"/>
+              </a:rPr>
+              <a:t>"violet"</a:t>
+            </a:r>
+            <a:r>
+              <a:rPr lang="en-US" sz="2000" b="0" dirty="0">
+                <a:solidFill>
+                  <a:srgbClr val="3B3B3B"/>
+                </a:solidFill>
+                <a:effectLst/>
+                <a:highlight>
+                  <a:srgbClr val="FFFFFF"/>
+                </a:highlight>
+                <a:latin typeface="Consolas" panose="020B0609020204030204" pitchFamily="49" charset="0"/>
+              </a:rPr>
+              <a:t>)</a:t>
+            </a:r>
+          </a:p>
+          <a:p>
+            <a:pPr marL="0" indent="0">
+              <a:buNone/>
+            </a:pPr>
+            <a:r>
+              <a:rPr lang="en-US" sz="2000" b="0" dirty="0">
+                <a:solidFill>
+                  <a:srgbClr val="AF00DB"/>
+                </a:solidFill>
+                <a:effectLst/>
+                <a:highlight>
+                  <a:srgbClr val="FFFFFF"/>
+                </a:highlight>
+                <a:latin typeface="Consolas" panose="020B0609020204030204" pitchFamily="49" charset="0"/>
+              </a:rPr>
+              <a:t>for</a:t>
+            </a:r>
+            <a:r>
+              <a:rPr lang="en-US" sz="2000" b="0" dirty="0">
+                <a:solidFill>
+                  <a:srgbClr val="3B3B3B"/>
+                </a:solidFill>
+                <a:effectLst/>
+                <a:highlight>
+                  <a:srgbClr val="FFFFFF"/>
+                </a:highlight>
+                <a:latin typeface="Consolas" panose="020B0609020204030204" pitchFamily="49" charset="0"/>
+              </a:rPr>
+              <a:t> </a:t>
+            </a:r>
+            <a:r>
+              <a:rPr lang="en-US" sz="2000" b="0" dirty="0">
+                <a:solidFill>
+                  <a:srgbClr val="001080"/>
+                </a:solidFill>
+                <a:effectLst/>
+                <a:highlight>
+                  <a:srgbClr val="FFFFFF"/>
+                </a:highlight>
+                <a:latin typeface="Consolas" panose="020B0609020204030204" pitchFamily="49" charset="0"/>
+              </a:rPr>
+              <a:t>i</a:t>
+            </a:r>
+            <a:r>
+              <a:rPr lang="en-US" sz="2000" b="0" dirty="0">
+                <a:solidFill>
+                  <a:srgbClr val="3B3B3B"/>
+                </a:solidFill>
+                <a:effectLst/>
+                <a:highlight>
+                  <a:srgbClr val="FFFFFF"/>
+                </a:highlight>
+                <a:latin typeface="Consolas" panose="020B0609020204030204" pitchFamily="49" charset="0"/>
+              </a:rPr>
+              <a:t> </a:t>
+            </a:r>
+            <a:r>
+              <a:rPr lang="en-US" sz="2000" b="0" dirty="0">
+                <a:solidFill>
+                  <a:srgbClr val="AF00DB"/>
+                </a:solidFill>
+                <a:effectLst/>
+                <a:highlight>
+                  <a:srgbClr val="FFFFFF"/>
+                </a:highlight>
+                <a:latin typeface="Consolas" panose="020B0609020204030204" pitchFamily="49" charset="0"/>
+              </a:rPr>
+              <a:t>in</a:t>
+            </a:r>
+            <a:r>
+              <a:rPr lang="en-US" sz="2000" b="0" dirty="0">
+                <a:solidFill>
+                  <a:srgbClr val="3B3B3B"/>
+                </a:solidFill>
+                <a:effectLst/>
+                <a:highlight>
+                  <a:srgbClr val="FFFFFF"/>
+                </a:highlight>
+                <a:latin typeface="Consolas" panose="020B0609020204030204" pitchFamily="49" charset="0"/>
+              </a:rPr>
+              <a:t> </a:t>
+            </a:r>
+            <a:r>
+              <a:rPr lang="en-US" sz="2000" b="0" dirty="0">
+                <a:solidFill>
+                  <a:srgbClr val="267F99"/>
+                </a:solidFill>
+                <a:effectLst/>
+                <a:highlight>
+                  <a:srgbClr val="FFFFFF"/>
+                </a:highlight>
+                <a:latin typeface="Consolas" panose="020B0609020204030204" pitchFamily="49" charset="0"/>
+              </a:rPr>
+              <a:t>range</a:t>
+            </a:r>
+            <a:r>
+              <a:rPr lang="en-US" sz="2000" b="0" dirty="0">
+                <a:solidFill>
+                  <a:srgbClr val="3B3B3B"/>
+                </a:solidFill>
+                <a:effectLst/>
+                <a:highlight>
+                  <a:srgbClr val="FFFFFF"/>
+                </a:highlight>
+                <a:latin typeface="Consolas" panose="020B0609020204030204" pitchFamily="49" charset="0"/>
+              </a:rPr>
+              <a:t>(</a:t>
+            </a:r>
+            <a:r>
+              <a:rPr lang="en-US" sz="2000" b="0" dirty="0">
+                <a:solidFill>
+                  <a:srgbClr val="098658"/>
+                </a:solidFill>
+                <a:effectLst/>
+                <a:highlight>
+                  <a:srgbClr val="FFFFFF"/>
+                </a:highlight>
+                <a:latin typeface="Consolas" panose="020B0609020204030204" pitchFamily="49" charset="0"/>
+              </a:rPr>
+              <a:t>4</a:t>
+            </a:r>
+            <a:r>
+              <a:rPr lang="en-US" sz="2000" b="0" dirty="0">
+                <a:solidFill>
+                  <a:srgbClr val="3B3B3B"/>
+                </a:solidFill>
+                <a:effectLst/>
+                <a:highlight>
+                  <a:srgbClr val="FFFFFF"/>
+                </a:highlight>
+                <a:latin typeface="Consolas" panose="020B0609020204030204" pitchFamily="49" charset="0"/>
+              </a:rPr>
+              <a:t>):  </a:t>
+            </a:r>
+            <a:r>
+              <a:rPr lang="en-US" sz="2000" b="0" dirty="0">
+                <a:solidFill>
+                  <a:srgbClr val="008000"/>
+                </a:solidFill>
+                <a:effectLst/>
+                <a:highlight>
+                  <a:srgbClr val="FFFFFF"/>
+                </a:highlight>
+                <a:latin typeface="Consolas" panose="020B0609020204030204" pitchFamily="49" charset="0"/>
+              </a:rPr>
+              <a:t># Do 4 times</a:t>
+            </a:r>
+            <a:endParaRPr lang="en-US" sz="2000" b="0" dirty="0">
+              <a:solidFill>
+                <a:srgbClr val="3B3B3B"/>
+              </a:solidFill>
+              <a:effectLst/>
+              <a:highlight>
+                <a:srgbClr val="FFFFFF"/>
+              </a:highlight>
+              <a:latin typeface="Consolas" panose="020B0609020204030204" pitchFamily="49" charset="0"/>
+            </a:endParaRPr>
+          </a:p>
+          <a:p>
+            <a:pPr marL="0" indent="0">
+              <a:buNone/>
+            </a:pPr>
+            <a:r>
+              <a:rPr lang="en-US" sz="2000" b="0" dirty="0">
+                <a:solidFill>
+                  <a:srgbClr val="3B3B3B"/>
+                </a:solidFill>
+                <a:effectLst/>
+                <a:highlight>
+                  <a:srgbClr val="FFFFFF"/>
+                </a:highlight>
+                <a:latin typeface="Consolas" panose="020B0609020204030204" pitchFamily="49" charset="0"/>
+              </a:rPr>
+              <a:t>    forward(</a:t>
+            </a:r>
+            <a:r>
+              <a:rPr lang="en-US" sz="2000" b="0" dirty="0">
+                <a:solidFill>
+                  <a:srgbClr val="098658"/>
+                </a:solidFill>
+                <a:effectLst/>
+                <a:highlight>
+                  <a:srgbClr val="FFFFFF"/>
+                </a:highlight>
+                <a:latin typeface="Consolas" panose="020B0609020204030204" pitchFamily="49" charset="0"/>
+              </a:rPr>
+              <a:t>150</a:t>
+            </a:r>
+            <a:r>
+              <a:rPr lang="en-US" sz="2000" b="0" dirty="0">
+                <a:solidFill>
+                  <a:srgbClr val="3B3B3B"/>
+                </a:solidFill>
+                <a:effectLst/>
+                <a:highlight>
+                  <a:srgbClr val="FFFFFF"/>
+                </a:highlight>
+                <a:latin typeface="Consolas" panose="020B0609020204030204" pitchFamily="49" charset="0"/>
+              </a:rPr>
+              <a:t>)</a:t>
+            </a:r>
+          </a:p>
+          <a:p>
+            <a:pPr marL="0" indent="0">
+              <a:buNone/>
+            </a:pPr>
+            <a:r>
+              <a:rPr lang="en-US" sz="2000" b="0" dirty="0">
+                <a:solidFill>
+                  <a:srgbClr val="3B3B3B"/>
+                </a:solidFill>
+                <a:effectLst/>
+                <a:highlight>
+                  <a:srgbClr val="FFFFFF"/>
+                </a:highlight>
+                <a:latin typeface="Consolas" panose="020B0609020204030204" pitchFamily="49" charset="0"/>
+              </a:rPr>
+              <a:t>    right(</a:t>
+            </a:r>
+            <a:r>
+              <a:rPr lang="en-US" sz="2000" b="0" dirty="0">
+                <a:solidFill>
+                  <a:srgbClr val="098658"/>
+                </a:solidFill>
+                <a:effectLst/>
+                <a:highlight>
+                  <a:srgbClr val="FFFFFF"/>
+                </a:highlight>
+                <a:latin typeface="Consolas" panose="020B0609020204030204" pitchFamily="49" charset="0"/>
+              </a:rPr>
+              <a:t>90</a:t>
+            </a:r>
+            <a:r>
+              <a:rPr lang="en-US" sz="2000" b="0" dirty="0">
+                <a:solidFill>
+                  <a:srgbClr val="3B3B3B"/>
+                </a:solidFill>
+                <a:effectLst/>
+                <a:highlight>
+                  <a:srgbClr val="FFFFFF"/>
+                </a:highlight>
+                <a:latin typeface="Consolas" panose="020B0609020204030204" pitchFamily="49" charset="0"/>
+              </a:rPr>
+              <a:t>)</a:t>
+            </a:r>
+          </a:p>
+          <a:p>
+            <a:pPr marL="0" indent="0">
+              <a:buNone/>
+            </a:pPr>
+            <a:r>
+              <a:rPr lang="en-US" sz="2000" b="0" dirty="0">
+                <a:solidFill>
+                  <a:srgbClr val="3B3B3B"/>
+                </a:solidFill>
+                <a:effectLst/>
+                <a:highlight>
+                  <a:srgbClr val="FFFFFF"/>
+                </a:highlight>
+                <a:latin typeface="Consolas" panose="020B0609020204030204" pitchFamily="49" charset="0"/>
+              </a:rPr>
+              <a:t>done()          </a:t>
+            </a:r>
+            <a:r>
+              <a:rPr lang="en-US" sz="2000" b="0" dirty="0">
+                <a:solidFill>
+                  <a:srgbClr val="008000"/>
+                </a:solidFill>
+                <a:effectLst/>
+                <a:highlight>
+                  <a:srgbClr val="FFFFFF"/>
+                </a:highlight>
+                <a:latin typeface="Consolas" panose="020B0609020204030204" pitchFamily="49" charset="0"/>
+              </a:rPr>
+              <a:t># Complete drawing</a:t>
+            </a:r>
+            <a:endParaRPr lang="en-US" sz="2000" b="0" dirty="0">
+              <a:solidFill>
+                <a:srgbClr val="3B3B3B"/>
+              </a:solidFill>
+              <a:effectLst/>
+              <a:highlight>
+                <a:srgbClr val="FFFFFF"/>
+              </a:highlight>
+              <a:latin typeface="Consolas" panose="020B0609020204030204" pitchFamily="49" charset="0"/>
+            </a:endParaRPr>
+          </a:p>
+          <a:p>
+            <a:pPr marL="0" indent="0">
+              <a:buNone/>
+            </a:pPr>
+            <a:endParaRPr lang="en-US" b="0" dirty="0">
+              <a:solidFill>
+                <a:srgbClr val="3B3B3B"/>
+              </a:solidFill>
+              <a:effectLst/>
+              <a:highlight>
+                <a:srgbClr val="FFFFFF"/>
+              </a:highlight>
+              <a:latin typeface="Consolas" panose="020B0609020204030204" pitchFamily="49" charset="0"/>
+            </a:endParaRPr>
+          </a:p>
+          <a:p>
+            <a:endParaRPr lang="en-US" dirty="0"/>
+          </a:p>
+        </p:txBody>
+      </p:sp>
+    </p:spTree>
+    <p:extLst>
+      <p:ext uri="{BB962C8B-B14F-4D97-AF65-F5344CB8AC3E}">
+        <p14:creationId xmlns:p14="http://schemas.microsoft.com/office/powerpoint/2010/main" val="1352594604"/>
+      </p:ext>
+    </p:extLst>
+  </p:cSld>
+  <p:clrMapOvr>
+    <a:masterClrMapping/>
+  </p:clrMapOvr>
+</p:sld>
+</file>
+
+<file path=ppt/slides/slide22.xml><?xml version="1.0" encoding="utf-8"?>
+<p:sld xmlns:a="http://schemas.openxmlformats.org/drawingml/2006/main" xmlns:r="http://schemas.openxmlformats.org/officeDocument/2006/relationships" xmlns:p="http://schemas.openxmlformats.org/presentationml/2006/main">
+  <p:cSld>
+    <p:spTree>
+      <p:nvGrpSpPr>
+        <p:cNvPr id="1" name=""/>
+        <p:cNvGrpSpPr/>
+        <p:nvPr/>
+      </p:nvGrpSpPr>
+      <p:grpSpPr>
+        <a:xfrm>
+          <a:off x="0" y="0"/>
+          <a:ext cx="0" cy="0"/>
+          <a:chOff x="0" y="0"/>
+          <a:chExt cx="0" cy="0"/>
+        </a:xfrm>
+      </p:grpSpPr>
+      <p:sp>
+        <p:nvSpPr>
+          <p:cNvPr id="2" name="Title 1">
+            <a:extLst>
+              <a:ext uri="{FF2B5EF4-FFF2-40B4-BE49-F238E27FC236}">
+                <a16:creationId xmlns:a16="http://schemas.microsoft.com/office/drawing/2014/main" id="{FAC68C4C-AC67-8EB4-7364-5FF162C724E2}"/>
+              </a:ext>
+            </a:extLst>
+          </p:cNvPr>
+          <p:cNvSpPr>
+            <a:spLocks noGrp="1"/>
+          </p:cNvSpPr>
+          <p:nvPr>
+            <p:ph type="title"/>
+          </p:nvPr>
+        </p:nvSpPr>
+        <p:spPr/>
+        <p:txBody>
+          <a:bodyPr/>
+          <a:lstStyle/>
+          <a:p>
+            <a:r>
+              <a:rPr lang="en-US" dirty="0"/>
+              <a:t>Text map sent to Braille Embosser</a:t>
+            </a:r>
+          </a:p>
+        </p:txBody>
+      </p:sp>
+      <p:sp>
+        <p:nvSpPr>
+          <p:cNvPr id="3" name="Content Placeholder 2">
+            <a:extLst>
+              <a:ext uri="{FF2B5EF4-FFF2-40B4-BE49-F238E27FC236}">
+                <a16:creationId xmlns:a16="http://schemas.microsoft.com/office/drawing/2014/main" id="{589508EC-E106-6886-04CF-184FAE5EAC72}"/>
+              </a:ext>
+            </a:extLst>
+          </p:cNvPr>
+          <p:cNvSpPr>
+            <a:spLocks noGrp="1"/>
+          </p:cNvSpPr>
+          <p:nvPr>
+            <p:ph idx="1"/>
+          </p:nvPr>
+        </p:nvSpPr>
+        <p:spPr/>
+        <p:txBody>
+          <a:bodyPr>
+            <a:noAutofit/>
+          </a:bodyPr>
+          <a:lstStyle/>
+          <a:p>
+            <a:pPr marL="0" indent="0">
+              <a:buNone/>
+            </a:pPr>
+            <a:r>
+              <a:rPr lang="en-US" sz="4400" dirty="0">
+                <a:latin typeface="Courier New" panose="02070309020205020404" pitchFamily="49" charset="0"/>
+                <a:cs typeface="Courier New" panose="02070309020205020404" pitchFamily="49" charset="0"/>
+              </a:rPr>
+              <a:t>,,vvvvvvv</a:t>
+            </a:r>
+          </a:p>
+          <a:p>
+            <a:pPr marL="0" indent="0">
+              <a:buNone/>
+            </a:pPr>
+            <a:r>
+              <a:rPr lang="en-US" sz="4400" dirty="0">
+                <a:latin typeface="Courier New" panose="02070309020205020404" pitchFamily="49" charset="0"/>
+                <a:cs typeface="Courier New" panose="02070309020205020404" pitchFamily="49" charset="0"/>
+              </a:rPr>
+              <a:t>,,vv,,,,v</a:t>
+            </a:r>
+          </a:p>
+          <a:p>
+            <a:pPr marL="0" indent="0">
+              <a:buNone/>
+            </a:pPr>
+            <a:r>
+              <a:rPr lang="en-US" sz="4400" dirty="0">
+                <a:latin typeface="Courier New" panose="02070309020205020404" pitchFamily="49" charset="0"/>
+                <a:cs typeface="Courier New" panose="02070309020205020404" pitchFamily="49" charset="0"/>
+              </a:rPr>
+              <a:t>,,vv,,,,v</a:t>
+            </a:r>
+          </a:p>
+          <a:p>
+            <a:pPr marL="0" indent="0">
+              <a:buNone/>
+            </a:pPr>
+            <a:r>
+              <a:rPr lang="en-US" sz="4400" dirty="0">
+                <a:latin typeface="Courier New" panose="02070309020205020404" pitchFamily="49" charset="0"/>
+                <a:cs typeface="Courier New" panose="02070309020205020404" pitchFamily="49" charset="0"/>
+              </a:rPr>
+              <a:t>,,vv,,,,v</a:t>
+            </a:r>
+          </a:p>
+          <a:p>
+            <a:pPr marL="0" indent="0">
+              <a:buNone/>
+            </a:pPr>
+            <a:r>
+              <a:rPr lang="en-US" sz="4400" dirty="0">
+                <a:latin typeface="Courier New" panose="02070309020205020404" pitchFamily="49" charset="0"/>
+                <a:cs typeface="Courier New" panose="02070309020205020404" pitchFamily="49" charset="0"/>
+              </a:rPr>
+              <a:t>,,vv,,,,v</a:t>
+            </a:r>
+          </a:p>
+          <a:p>
+            <a:pPr marL="0" indent="0">
+              <a:buNone/>
+            </a:pPr>
+            <a:r>
+              <a:rPr lang="en-US" sz="4400" dirty="0">
+                <a:latin typeface="Courier New" panose="02070309020205020404" pitchFamily="49" charset="0"/>
+                <a:cs typeface="Courier New" panose="02070309020205020404" pitchFamily="49" charset="0"/>
+              </a:rPr>
+              <a:t>,,vvvvvvv</a:t>
+            </a:r>
+          </a:p>
+        </p:txBody>
+      </p:sp>
+    </p:spTree>
+    <p:extLst>
+      <p:ext uri="{BB962C8B-B14F-4D97-AF65-F5344CB8AC3E}">
+        <p14:creationId xmlns:p14="http://schemas.microsoft.com/office/powerpoint/2010/main" val="2472157851"/>
+      </p:ext>
+    </p:extLst>
+  </p:cSld>
+  <p:clrMapOvr>
+    <a:masterClrMapping/>
+  </p:clrMapOvr>
+</p:sld>
+</file>
+
+<file path=ppt/slides/slide23.xml><?xml version="1.0" encoding="utf-8"?>
+<p:sld xmlns:a="http://schemas.openxmlformats.org/drawingml/2006/main" xmlns:r="http://schemas.openxmlformats.org/officeDocument/2006/relationships" xmlns:p="http://schemas.openxmlformats.org/presentationml/2006/main">
+  <p:cSld>
+    <p:spTree>
+      <p:nvGrpSpPr>
+        <p:cNvPr id="1" name=""/>
+        <p:cNvGrpSpPr/>
+        <p:nvPr/>
+      </p:nvGrpSpPr>
+      <p:grpSpPr>
+        <a:xfrm>
+          <a:off x="0" y="0"/>
+          <a:ext cx="0" cy="0"/>
+          <a:chOff x="0" y="0"/>
+          <a:chExt cx="0" cy="0"/>
+        </a:xfrm>
+      </p:grpSpPr>
+      <p:sp>
+        <p:nvSpPr>
+          <p:cNvPr id="2" name="Title 1">
+            <a:extLst>
+              <a:ext uri="{FF2B5EF4-FFF2-40B4-BE49-F238E27FC236}">
+                <a16:creationId xmlns:a16="http://schemas.microsoft.com/office/drawing/2014/main" id="{1C0195F7-533E-5756-2EBC-FD84647DAC9C}"/>
+              </a:ext>
+            </a:extLst>
+          </p:cNvPr>
+          <p:cNvSpPr>
+            <a:spLocks noGrp="1"/>
+          </p:cNvSpPr>
+          <p:nvPr>
+            <p:ph type="title"/>
+          </p:nvPr>
+        </p:nvSpPr>
+        <p:spPr/>
+        <p:txBody>
+          <a:bodyPr/>
+          <a:lstStyle/>
+          <a:p>
+            <a:r>
+              <a:rPr lang="en-US" dirty="0"/>
+              <a:t>More Information</a:t>
+            </a:r>
+          </a:p>
+        </p:txBody>
+      </p:sp>
+      <p:sp>
+        <p:nvSpPr>
+          <p:cNvPr id="3" name="Content Placeholder 2">
+            <a:extLst>
+              <a:ext uri="{FF2B5EF4-FFF2-40B4-BE49-F238E27FC236}">
+                <a16:creationId xmlns:a16="http://schemas.microsoft.com/office/drawing/2014/main" id="{1DF7246C-A6FB-40A0-A76E-6AC2AC5BE937}"/>
+              </a:ext>
+            </a:extLst>
+          </p:cNvPr>
+          <p:cNvSpPr>
+            <a:spLocks noGrp="1"/>
+          </p:cNvSpPr>
+          <p:nvPr>
+            <p:ph idx="1"/>
+          </p:nvPr>
+        </p:nvSpPr>
+        <p:spPr/>
+        <p:txBody>
+          <a:bodyPr>
+            <a:normAutofit/>
+          </a:bodyPr>
+          <a:lstStyle/>
+          <a:p>
+            <a:r>
+              <a:rPr lang="en-US" sz="3200" dirty="0">
+                <a:solidFill>
+                  <a:schemeClr val="accent1"/>
+                </a:solidFill>
+              </a:rPr>
+              <a:t>Brief Description</a:t>
+            </a:r>
+            <a:r>
+              <a:rPr lang="en-US" sz="3200" dirty="0"/>
+              <a:t> </a:t>
+            </a:r>
+            <a:r>
+              <a:rPr lang="en-US" sz="2400" i="1" dirty="0">
+                <a:solidFill>
+                  <a:schemeClr val="accent1"/>
+                </a:solidFill>
+              </a:rPr>
+              <a:t>github.com/raysmith619/resource_lib/README.md</a:t>
+            </a:r>
+          </a:p>
+          <a:p>
+            <a:r>
+              <a:rPr lang="en-US" sz="3600" dirty="0">
+                <a:solidFill>
+                  <a:schemeClr val="accent1"/>
+                </a:solidFill>
+              </a:rPr>
+              <a:t>Demonstration via Zoom</a:t>
+            </a:r>
+          </a:p>
+        </p:txBody>
+      </p:sp>
+    </p:spTree>
+    <p:extLst>
+      <p:ext uri="{BB962C8B-B14F-4D97-AF65-F5344CB8AC3E}">
+        <p14:creationId xmlns:p14="http://schemas.microsoft.com/office/powerpoint/2010/main" val="2390878048"/>
+      </p:ext>
+    </p:extLst>
+  </p:cSld>
+  <p:clrMapOvr>
+    <a:masterClrMapping/>
+  </p:clrMapOvr>
+</p:sld>
+</file>
+
+<file path=ppt/slides/slide24.xml><?xml version="1.0" encoding="utf-8"?>
+<p:sld xmlns:a="http://schemas.openxmlformats.org/drawingml/2006/main" xmlns:r="http://schemas.openxmlformats.org/officeDocument/2006/relationships" xmlns:p="http://schemas.openxmlformats.org/presentationml/2006/main">
+  <p:cSld>
+    <p:spTree>
+      <p:nvGrpSpPr>
+        <p:cNvPr id="1" name=""/>
+        <p:cNvGrpSpPr/>
+        <p:nvPr/>
+      </p:nvGrpSpPr>
+      <p:grpSpPr>
+        <a:xfrm>
+          <a:off x="0" y="0"/>
+          <a:ext cx="0" cy="0"/>
+          <a:chOff x="0" y="0"/>
+          <a:chExt cx="0" cy="0"/>
+        </a:xfrm>
+      </p:grpSpPr>
+      <p:sp>
+        <p:nvSpPr>
+          <p:cNvPr id="2" name="Title 1">
+            <a:extLst>
+              <a:ext uri="{FF2B5EF4-FFF2-40B4-BE49-F238E27FC236}">
                 <a16:creationId xmlns:a16="http://schemas.microsoft.com/office/drawing/2014/main" id="{66A1D87C-2817-85BE-2881-092A6E900BA0}"/>
               </a:ext>
             </a:extLst>
@@ -11942,7 +13246,7 @@
           <a:p>
             <a:fld id="{A7119916-CD40-456D-ABE3-55F8822671F7}" type="datetime1">
               <a:rPr lang="en-US" smtClean="0"/>
-              <a:t>4/16/2024</a:t>
+              <a:t>5/18/2026</a:t>
             </a:fld>
             <a:endParaRPr lang="en-US" dirty="0"/>
           </a:p>
@@ -11999,7 +13303,7 @@
           <a:p>
             <a:fld id="{6D22F896-40B5-4ADD-8801-0D06FADFA095}" type="slidenum">
               <a:rPr lang="en-US" smtClean="0"/>
-              <a:t>19</a:t>
+              <a:t>24</a:t>
             </a:fld>
             <a:endParaRPr lang="en-US" dirty="0"/>
           </a:p>
@@ -12430,400 +13734,7 @@
 </p:sld>
 </file>
 
-<file path=ppt/slides/slide2.xml><?xml version="1.0" encoding="utf-8"?>
-<p:sld xmlns:a="http://schemas.openxmlformats.org/drawingml/2006/main" xmlns:r="http://schemas.openxmlformats.org/officeDocument/2006/relationships" xmlns:p="http://schemas.openxmlformats.org/presentationml/2006/main">
-  <p:cSld>
-    <p:bg>
-      <p:bgPr>
-        <a:gradFill>
-          <a:gsLst>
-            <a:gs pos="0">
-              <a:schemeClr val="accent4">
-                <a:lumMod val="5000"/>
-                <a:lumOff val="95000"/>
-              </a:schemeClr>
-            </a:gs>
-            <a:gs pos="74000">
-              <a:schemeClr val="accent4">
-                <a:lumMod val="45000"/>
-                <a:lumOff val="55000"/>
-              </a:schemeClr>
-            </a:gs>
-            <a:gs pos="83000">
-              <a:schemeClr val="accent4">
-                <a:lumMod val="45000"/>
-                <a:lumOff val="55000"/>
-              </a:schemeClr>
-            </a:gs>
-            <a:gs pos="100000">
-              <a:schemeClr val="accent4">
-                <a:lumMod val="30000"/>
-                <a:lumOff val="70000"/>
-              </a:schemeClr>
-            </a:gs>
-          </a:gsLst>
-          <a:lin ang="5400000" scaled="1"/>
-        </a:gradFill>
-        <a:effectLst/>
-      </p:bgPr>
-    </p:bg>
-    <p:spTree>
-      <p:nvGrpSpPr>
-        <p:cNvPr id="1" name=""/>
-        <p:cNvGrpSpPr/>
-        <p:nvPr/>
-      </p:nvGrpSpPr>
-      <p:grpSpPr>
-        <a:xfrm>
-          <a:off x="0" y="0"/>
-          <a:ext cx="0" cy="0"/>
-          <a:chOff x="0" y="0"/>
-          <a:chExt cx="0" cy="0"/>
-        </a:xfrm>
-      </p:grpSpPr>
-      <p:sp>
-        <p:nvSpPr>
-          <p:cNvPr id="2" name="Title 1">
-            <a:extLst>
-              <a:ext uri="{FF2B5EF4-FFF2-40B4-BE49-F238E27FC236}">
-                <a16:creationId xmlns:a16="http://schemas.microsoft.com/office/drawing/2014/main" id="{F7E90694-AA7F-451B-A875-1D23D1FDBA32}"/>
-              </a:ext>
-            </a:extLst>
-          </p:cNvPr>
-          <p:cNvSpPr>
-            <a:spLocks noGrp="1"/>
-          </p:cNvSpPr>
-          <p:nvPr>
-            <p:ph type="title"/>
-          </p:nvPr>
-        </p:nvSpPr>
-        <p:spPr>
-          <a:noFill/>
-        </p:spPr>
-        <p:txBody>
-          <a:bodyPr>
-            <a:noAutofit/>
-          </a:bodyPr>
-          <a:lstStyle/>
-          <a:p>
-            <a:r>
-              <a:rPr lang="en-US" sz="4400" dirty="0"/>
-              <a:t>Introduction</a:t>
-            </a:r>
-          </a:p>
-        </p:txBody>
-      </p:sp>
-      <p:sp>
-        <p:nvSpPr>
-          <p:cNvPr id="3" name="Content Placeholder 2">
-            <a:extLst>
-              <a:ext uri="{FF2B5EF4-FFF2-40B4-BE49-F238E27FC236}">
-                <a16:creationId xmlns:a16="http://schemas.microsoft.com/office/drawing/2014/main" id="{B25115FD-141E-48C6-A3F1-61C4558CC9C7}"/>
-              </a:ext>
-            </a:extLst>
-          </p:cNvPr>
-          <p:cNvSpPr>
-            <a:spLocks noGrp="1"/>
-          </p:cNvSpPr>
-          <p:nvPr>
-            <p:ph idx="1"/>
-          </p:nvPr>
-        </p:nvSpPr>
-        <p:spPr/>
-        <p:txBody>
-          <a:bodyPr>
-            <a:normAutofit/>
-          </a:bodyPr>
-          <a:lstStyle/>
-          <a:p>
-            <a:r>
-              <a:rPr lang="en-US" sz="3600" dirty="0"/>
-              <a:t>Goals</a:t>
-            </a:r>
-          </a:p>
-          <a:p>
-            <a:pPr lvl="1"/>
-            <a:r>
-              <a:rPr lang="en-US" sz="3400" i="1" dirty="0"/>
-              <a:t>Demonstrate tool</a:t>
-            </a:r>
-          </a:p>
-          <a:p>
-            <a:pPr lvl="1"/>
-            <a:r>
-              <a:rPr lang="en-US" sz="3400" i="1" dirty="0"/>
-              <a:t>Graphics Insight</a:t>
-            </a:r>
-          </a:p>
-          <a:p>
-            <a:pPr lvl="1"/>
-            <a:r>
-              <a:rPr lang="en-US" sz="3400" i="1" dirty="0"/>
-              <a:t>Raise Awareness</a:t>
-            </a:r>
-          </a:p>
-          <a:p>
-            <a:pPr lvl="1"/>
-            <a:endParaRPr lang="en-US" sz="3400" i="1" dirty="0"/>
-          </a:p>
-        </p:txBody>
-      </p:sp>
-      <p:sp>
-        <p:nvSpPr>
-          <p:cNvPr id="4" name="Date Placeholder 3">
-            <a:extLst>
-              <a:ext uri="{FF2B5EF4-FFF2-40B4-BE49-F238E27FC236}">
-                <a16:creationId xmlns:a16="http://schemas.microsoft.com/office/drawing/2014/main" id="{B623EE2F-E3E9-437B-AFAE-1E0C5C94A5F8}"/>
-              </a:ext>
-            </a:extLst>
-          </p:cNvPr>
-          <p:cNvSpPr>
-            <a:spLocks noGrp="1"/>
-          </p:cNvSpPr>
-          <p:nvPr>
-            <p:ph type="dt" sz="half" idx="10"/>
-          </p:nvPr>
-        </p:nvSpPr>
-        <p:spPr/>
-        <p:txBody>
-          <a:bodyPr/>
-          <a:lstStyle/>
-          <a:p>
-            <a:pPr marL="0" marR="0" lvl="0" indent="0" algn="r" defTabSz="457200" rtl="0" eaLnBrk="1" fontAlgn="auto" latinLnBrk="0" hangingPunct="1">
-              <a:lnSpc>
-                <a:spcPct val="100000"/>
-              </a:lnSpc>
-              <a:spcBef>
-                <a:spcPts val="0"/>
-              </a:spcBef>
-              <a:spcAft>
-                <a:spcPts val="0"/>
-              </a:spcAft>
-              <a:buClrTx/>
-              <a:buSzTx/>
-              <a:buFontTx/>
-              <a:buNone/>
-              <a:tabLst/>
-              <a:defRPr/>
-            </a:pPr>
-            <a:fld id="{A7119916-CD40-456D-ABE3-55F8822671F7}" type="datetime1">
-              <a:rPr kumimoji="0" lang="en-US" sz="900" b="0" i="0" u="none" strike="noStrike" kern="1200" cap="none" spc="0" normalizeH="0" baseline="0" noProof="0" smtClean="0">
-                <a:ln>
-                  <a:noFill/>
-                </a:ln>
-                <a:solidFill>
-                  <a:prstClr val="black">
-                    <a:tint val="75000"/>
-                  </a:prstClr>
-                </a:solidFill>
-                <a:effectLst/>
-                <a:uLnTx/>
-                <a:uFillTx/>
-                <a:latin typeface="Trebuchet MS" panose="020B0603020202020204"/>
-                <a:ea typeface="+mn-ea"/>
-                <a:cs typeface="+mn-cs"/>
-              </a:rPr>
-              <a:pPr marL="0" marR="0" lvl="0" indent="0" algn="r" defTabSz="457200" rtl="0" eaLnBrk="1" fontAlgn="auto" latinLnBrk="0" hangingPunct="1">
-                <a:lnSpc>
-                  <a:spcPct val="100000"/>
-                </a:lnSpc>
-                <a:spcBef>
-                  <a:spcPts val="0"/>
-                </a:spcBef>
-                <a:spcAft>
-                  <a:spcPts val="0"/>
-                </a:spcAft>
-                <a:buClrTx/>
-                <a:buSzTx/>
-                <a:buFontTx/>
-                <a:buNone/>
-                <a:tabLst/>
-                <a:defRPr/>
-              </a:pPr>
-              <a:t>4/16/2024</a:t>
-            </a:fld>
-            <a:endParaRPr kumimoji="0" lang="en-US" sz="900" b="0" i="0" u="none" strike="noStrike" kern="1200" cap="none" spc="0" normalizeH="0" baseline="0" noProof="0" dirty="0">
-              <a:ln>
-                <a:noFill/>
-              </a:ln>
-              <a:solidFill>
-                <a:prstClr val="black">
-                  <a:tint val="75000"/>
-                </a:prstClr>
-              </a:solidFill>
-              <a:effectLst/>
-              <a:uLnTx/>
-              <a:uFillTx/>
-              <a:latin typeface="Trebuchet MS" panose="020B0603020202020204"/>
-              <a:ea typeface="+mn-ea"/>
-              <a:cs typeface="+mn-cs"/>
-            </a:endParaRPr>
-          </a:p>
-        </p:txBody>
-      </p:sp>
-      <p:sp>
-        <p:nvSpPr>
-          <p:cNvPr id="5" name="Footer Placeholder 4">
-            <a:extLst>
-              <a:ext uri="{FF2B5EF4-FFF2-40B4-BE49-F238E27FC236}">
-                <a16:creationId xmlns:a16="http://schemas.microsoft.com/office/drawing/2014/main" id="{4E4D04EE-5AD0-4A57-A42E-AE62E411ACEA}"/>
-              </a:ext>
-            </a:extLst>
-          </p:cNvPr>
-          <p:cNvSpPr>
-            <a:spLocks noGrp="1"/>
-          </p:cNvSpPr>
-          <p:nvPr>
-            <p:ph type="ftr" sz="quarter" idx="11"/>
-          </p:nvPr>
-        </p:nvSpPr>
-        <p:spPr/>
-        <p:txBody>
-          <a:bodyPr/>
-          <a:lstStyle/>
-          <a:p>
-            <a:pPr marL="0" marR="0" lvl="0" indent="0" algn="l" defTabSz="457200" rtl="0" eaLnBrk="1" fontAlgn="auto" latinLnBrk="0" hangingPunct="1">
-              <a:lnSpc>
-                <a:spcPct val="100000"/>
-              </a:lnSpc>
-              <a:spcBef>
-                <a:spcPts val="0"/>
-              </a:spcBef>
-              <a:spcAft>
-                <a:spcPts val="0"/>
-              </a:spcAft>
-              <a:buClrTx/>
-              <a:buSzTx/>
-              <a:buFontTx/>
-              <a:buNone/>
-              <a:tabLst/>
-              <a:defRPr/>
-            </a:pPr>
-            <a:r>
-              <a:rPr kumimoji="0" lang="en-US" sz="900" b="0" i="0" u="none" strike="noStrike" kern="1200" cap="none" spc="0" normalizeH="0" baseline="0" noProof="0" dirty="0">
-                <a:ln>
-                  <a:noFill/>
-                </a:ln>
-                <a:solidFill>
-                  <a:prstClr val="black">
-                    <a:tint val="75000"/>
-                  </a:prstClr>
-                </a:solidFill>
-                <a:effectLst/>
-                <a:uLnTx/>
-                <a:uFillTx/>
-                <a:latin typeface="Trebuchet MS" panose="020B0603020202020204"/>
-                <a:ea typeface="+mn-ea"/>
-                <a:cs typeface="+mn-cs"/>
-              </a:rPr>
-              <a:t>raysmith@alum.mit.edu</a:t>
-            </a:r>
-          </a:p>
-        </p:txBody>
-      </p:sp>
-      <p:sp>
-        <p:nvSpPr>
-          <p:cNvPr id="6" name="Slide Number Placeholder 5">
-            <a:extLst>
-              <a:ext uri="{FF2B5EF4-FFF2-40B4-BE49-F238E27FC236}">
-                <a16:creationId xmlns:a16="http://schemas.microsoft.com/office/drawing/2014/main" id="{9711C448-36A8-43E6-A891-6E42F22D1185}"/>
-              </a:ext>
-            </a:extLst>
-          </p:cNvPr>
-          <p:cNvSpPr>
-            <a:spLocks noGrp="1"/>
-          </p:cNvSpPr>
-          <p:nvPr>
-            <p:ph type="sldNum" sz="quarter" idx="12"/>
-          </p:nvPr>
-        </p:nvSpPr>
-        <p:spPr/>
-        <p:txBody>
-          <a:bodyPr/>
-          <a:lstStyle/>
-          <a:p>
-            <a:pPr marL="0" marR="0" lvl="0" indent="0" algn="r" defTabSz="457200" rtl="0" eaLnBrk="1" fontAlgn="auto" latinLnBrk="0" hangingPunct="1">
-              <a:lnSpc>
-                <a:spcPct val="100000"/>
-              </a:lnSpc>
-              <a:spcBef>
-                <a:spcPts val="0"/>
-              </a:spcBef>
-              <a:spcAft>
-                <a:spcPts val="0"/>
-              </a:spcAft>
-              <a:buClrTx/>
-              <a:buSzTx/>
-              <a:buFontTx/>
-              <a:buNone/>
-              <a:tabLst/>
-              <a:defRPr/>
-            </a:pPr>
-            <a:fld id="{6D22F896-40B5-4ADD-8801-0D06FADFA095}" type="slidenum">
-              <a:rPr kumimoji="0" lang="en-US" sz="900" b="0" i="0" u="none" strike="noStrike" kern="1200" cap="none" spc="0" normalizeH="0" baseline="0" noProof="0" smtClean="0">
-                <a:ln>
-                  <a:noFill/>
-                </a:ln>
-                <a:solidFill>
-                  <a:srgbClr val="90C226"/>
-                </a:solidFill>
-                <a:effectLst/>
-                <a:uLnTx/>
-                <a:uFillTx/>
-                <a:latin typeface="Trebuchet MS" panose="020B0603020202020204"/>
-                <a:ea typeface="+mn-ea"/>
-                <a:cs typeface="+mn-cs"/>
-              </a:rPr>
-              <a:pPr marL="0" marR="0" lvl="0" indent="0" algn="r" defTabSz="457200" rtl="0" eaLnBrk="1" fontAlgn="auto" latinLnBrk="0" hangingPunct="1">
-                <a:lnSpc>
-                  <a:spcPct val="100000"/>
-                </a:lnSpc>
-                <a:spcBef>
-                  <a:spcPts val="0"/>
-                </a:spcBef>
-                <a:spcAft>
-                  <a:spcPts val="0"/>
-                </a:spcAft>
-                <a:buClrTx/>
-                <a:buSzTx/>
-                <a:buFontTx/>
-                <a:buNone/>
-                <a:tabLst/>
-                <a:defRPr/>
-              </a:pPr>
-              <a:t>2</a:t>
-            </a:fld>
-            <a:endParaRPr kumimoji="0" lang="en-US" sz="900" b="0" i="0" u="none" strike="noStrike" kern="1200" cap="none" spc="0" normalizeH="0" baseline="0" noProof="0" dirty="0">
-              <a:ln>
-                <a:noFill/>
-              </a:ln>
-              <a:solidFill>
-                <a:srgbClr val="90C226"/>
-              </a:solidFill>
-              <a:effectLst/>
-              <a:uLnTx/>
-              <a:uFillTx/>
-              <a:latin typeface="Trebuchet MS" panose="020B0603020202020204"/>
-              <a:ea typeface="+mn-ea"/>
-              <a:cs typeface="+mn-cs"/>
-            </a:endParaRPr>
-          </a:p>
-        </p:txBody>
-      </p:sp>
-    </p:spTree>
-    <p:extLst>
-      <p:ext uri="{BB962C8B-B14F-4D97-AF65-F5344CB8AC3E}">
-        <p14:creationId xmlns:p14="http://schemas.microsoft.com/office/powerpoint/2010/main" val="2312526716"/>
-      </p:ext>
-    </p:extLst>
-  </p:cSld>
-  <p:clrMapOvr>
-    <a:masterClrMapping/>
-  </p:clrMapOvr>
-</p:sld>
-</file>
-
-<file path=ppt/slides/slide20.xml><?xml version="1.0" encoding="utf-8"?>
+<file path=ppt/slides/slide25.xml><?xml version="1.0" encoding="utf-8"?>
 <p:sld xmlns:a="http://schemas.openxmlformats.org/drawingml/2006/main" xmlns:r="http://schemas.openxmlformats.org/officeDocument/2006/relationships" xmlns:p="http://schemas.openxmlformats.org/presentationml/2006/main">
   <p:cSld>
     <p:bg>
@@ -12879,516 +13790,6 @@
           <p:cNvPr id="2" name="Title 1">
             <a:extLst>
               <a:ext uri="{FF2B5EF4-FFF2-40B4-BE49-F238E27FC236}">
-                <a16:creationId xmlns:a16="http://schemas.microsoft.com/office/drawing/2014/main" id="{4C738398-DAA7-2BCE-76F4-AF36E34176F5}"/>
-              </a:ext>
-            </a:extLst>
-          </p:cNvPr>
-          <p:cNvSpPr>
-            <a:spLocks noGrp="1"/>
-          </p:cNvSpPr>
-          <p:nvPr>
-            <p:ph type="title"/>
-          </p:nvPr>
-        </p:nvSpPr>
-        <p:spPr/>
-        <p:txBody>
-          <a:bodyPr>
-            <a:normAutofit/>
-          </a:bodyPr>
-          <a:lstStyle/>
-          <a:p>
-            <a:pPr algn="ctr"/>
-            <a:r>
-              <a:rPr lang="en-US" sz="3600" dirty="0">
-                <a:solidFill>
-                  <a:schemeClr val="accent1"/>
-                </a:solidFill>
-              </a:rPr>
-              <a:t>Future Possibilities</a:t>
-            </a:r>
-            <a:endParaRPr lang="en-US" dirty="0"/>
-          </a:p>
-        </p:txBody>
-      </p:sp>
-      <p:sp>
-        <p:nvSpPr>
-          <p:cNvPr id="3" name="Content Placeholder 2">
-            <a:extLst>
-              <a:ext uri="{FF2B5EF4-FFF2-40B4-BE49-F238E27FC236}">
-                <a16:creationId xmlns:a16="http://schemas.microsoft.com/office/drawing/2014/main" id="{0C360948-50A1-2DC8-8408-53BDDAF2B33C}"/>
-              </a:ext>
-            </a:extLst>
-          </p:cNvPr>
-          <p:cNvSpPr>
-            <a:spLocks noGrp="1"/>
-          </p:cNvSpPr>
-          <p:nvPr>
-            <p:ph idx="1"/>
-          </p:nvPr>
-        </p:nvSpPr>
-        <p:spPr>
-          <a:xfrm>
-            <a:off x="550113" y="2051051"/>
-            <a:ext cx="8596668" cy="3880773"/>
-          </a:xfrm>
-        </p:spPr>
-        <p:txBody>
-          <a:bodyPr>
-            <a:normAutofit/>
-          </a:bodyPr>
-          <a:lstStyle/>
-          <a:p>
-            <a:r>
-              <a:rPr lang="en-US" sz="2800" dirty="0">
-                <a:solidFill>
-                  <a:schemeClr val="tx1"/>
-                </a:solidFill>
-              </a:rPr>
-              <a:t>Better Screen Reader Support</a:t>
-            </a:r>
-          </a:p>
-          <a:p>
-            <a:pPr lvl="1"/>
-            <a:r>
-              <a:rPr lang="en-US" sz="2800" dirty="0">
-                <a:solidFill>
-                  <a:schemeClr val="tx1"/>
-                </a:solidFill>
-              </a:rPr>
-              <a:t>Port to wxPython</a:t>
-            </a:r>
-          </a:p>
-          <a:p>
-            <a:pPr lvl="1"/>
-            <a:r>
-              <a:rPr lang="en-US" sz="2800" dirty="0">
-                <a:solidFill>
-                  <a:schemeClr val="tx1"/>
-                </a:solidFill>
-              </a:rPr>
-              <a:t>Speed-up scanning</a:t>
-            </a:r>
-          </a:p>
-          <a:p>
-            <a:r>
-              <a:rPr lang="en-US" sz="2800" dirty="0">
-                <a:solidFill>
-                  <a:schemeClr val="tx1"/>
-                </a:solidFill>
-              </a:rPr>
-              <a:t>Presentation Improvements</a:t>
-            </a:r>
-          </a:p>
-          <a:p>
-            <a:pPr lvl="1"/>
-            <a:r>
-              <a:rPr lang="en-US" sz="2800" dirty="0">
-                <a:solidFill>
-                  <a:schemeClr val="tx1"/>
-                </a:solidFill>
-              </a:rPr>
-              <a:t>Extended </a:t>
-            </a:r>
-            <a:r>
-              <a:rPr lang="en-US" sz="2800" dirty="0" err="1">
-                <a:solidFill>
-                  <a:schemeClr val="tx1"/>
-                </a:solidFill>
-              </a:rPr>
-              <a:t>magnificaton</a:t>
-            </a:r>
-            <a:endParaRPr lang="en-US" sz="2800" dirty="0">
-              <a:solidFill>
-                <a:schemeClr val="tx1"/>
-              </a:solidFill>
-            </a:endParaRPr>
-          </a:p>
-          <a:p>
-            <a:pPr marL="0" indent="0">
-              <a:buNone/>
-            </a:pPr>
-            <a:endParaRPr lang="en-US" sz="2400" dirty="0">
-              <a:solidFill>
-                <a:schemeClr val="tx1"/>
-              </a:solidFill>
-            </a:endParaRPr>
-          </a:p>
-        </p:txBody>
-      </p:sp>
-      <p:sp>
-        <p:nvSpPr>
-          <p:cNvPr id="4" name="Date Placeholder 3">
-            <a:extLst>
-              <a:ext uri="{FF2B5EF4-FFF2-40B4-BE49-F238E27FC236}">
-                <a16:creationId xmlns:a16="http://schemas.microsoft.com/office/drawing/2014/main" id="{5EDCC79F-3336-222D-207D-DDBE9A586431}"/>
-              </a:ext>
-            </a:extLst>
-          </p:cNvPr>
-          <p:cNvSpPr>
-            <a:spLocks noGrp="1"/>
-          </p:cNvSpPr>
-          <p:nvPr>
-            <p:ph type="dt" sz="half" idx="10"/>
-          </p:nvPr>
-        </p:nvSpPr>
-        <p:spPr/>
-        <p:txBody>
-          <a:bodyPr/>
-          <a:lstStyle/>
-          <a:p>
-            <a:pPr marL="0" marR="0" lvl="0" indent="0" algn="r" defTabSz="914400" rtl="0" eaLnBrk="1" fontAlgn="auto" latinLnBrk="0" hangingPunct="1">
-              <a:lnSpc>
-                <a:spcPct val="100000"/>
-              </a:lnSpc>
-              <a:spcBef>
-                <a:spcPts val="0"/>
-              </a:spcBef>
-              <a:spcAft>
-                <a:spcPts val="0"/>
-              </a:spcAft>
-              <a:buClrTx/>
-              <a:buSzTx/>
-              <a:buFontTx/>
-              <a:buNone/>
-              <a:tabLst/>
-              <a:defRPr/>
-            </a:pPr>
-            <a:fld id="{A7119916-CD40-456D-ABE3-55F8822671F7}" type="datetime1">
-              <a:rPr kumimoji="0" lang="en-US" sz="900" b="0" i="0" u="none" strike="noStrike" kern="1200" cap="none" spc="0" normalizeH="0" baseline="0" noProof="0" smtClean="0">
-                <a:ln>
-                  <a:noFill/>
-                </a:ln>
-                <a:solidFill>
-                  <a:prstClr val="black">
-                    <a:tint val="75000"/>
-                  </a:prstClr>
-                </a:solidFill>
-                <a:effectLst/>
-                <a:uLnTx/>
-                <a:uFillTx/>
-                <a:latin typeface="Trebuchet MS" panose="020B0603020202020204"/>
-                <a:ea typeface="+mn-ea"/>
-                <a:cs typeface="+mn-cs"/>
-              </a:rPr>
-              <a:pPr marL="0" marR="0" lvl="0" indent="0" algn="r" defTabSz="914400" rtl="0" eaLnBrk="1" fontAlgn="auto" latinLnBrk="0" hangingPunct="1">
-                <a:lnSpc>
-                  <a:spcPct val="100000"/>
-                </a:lnSpc>
-                <a:spcBef>
-                  <a:spcPts val="0"/>
-                </a:spcBef>
-                <a:spcAft>
-                  <a:spcPts val="0"/>
-                </a:spcAft>
-                <a:buClrTx/>
-                <a:buSzTx/>
-                <a:buFontTx/>
-                <a:buNone/>
-                <a:tabLst/>
-                <a:defRPr/>
-              </a:pPr>
-              <a:t>4/16/2024</a:t>
-            </a:fld>
-            <a:endParaRPr kumimoji="0" lang="en-US" sz="900" b="0" i="0" u="none" strike="noStrike" kern="1200" cap="none" spc="0" normalizeH="0" baseline="0" noProof="0" dirty="0">
-              <a:ln>
-                <a:noFill/>
-              </a:ln>
-              <a:solidFill>
-                <a:prstClr val="black">
-                  <a:tint val="75000"/>
-                </a:prstClr>
-              </a:solidFill>
-              <a:effectLst/>
-              <a:uLnTx/>
-              <a:uFillTx/>
-              <a:latin typeface="Trebuchet MS" panose="020B0603020202020204"/>
-              <a:ea typeface="+mn-ea"/>
-              <a:cs typeface="+mn-cs"/>
-            </a:endParaRPr>
-          </a:p>
-        </p:txBody>
-      </p:sp>
-      <p:sp>
-        <p:nvSpPr>
-          <p:cNvPr id="5" name="Footer Placeholder 4">
-            <a:extLst>
-              <a:ext uri="{FF2B5EF4-FFF2-40B4-BE49-F238E27FC236}">
-                <a16:creationId xmlns:a16="http://schemas.microsoft.com/office/drawing/2014/main" id="{009CCD2F-A4CE-60DA-E7BA-37B3D06C1ADD}"/>
-              </a:ext>
-            </a:extLst>
-          </p:cNvPr>
-          <p:cNvSpPr>
-            <a:spLocks noGrp="1"/>
-          </p:cNvSpPr>
-          <p:nvPr>
-            <p:ph type="ftr" sz="quarter" idx="11"/>
-          </p:nvPr>
-        </p:nvSpPr>
-        <p:spPr/>
-        <p:txBody>
-          <a:bodyPr/>
-          <a:lstStyle/>
-          <a:p>
-            <a:pPr marL="0" marR="0" lvl="0" indent="0" algn="l" defTabSz="914400" rtl="0" eaLnBrk="1" fontAlgn="auto" latinLnBrk="0" hangingPunct="1">
-              <a:lnSpc>
-                <a:spcPct val="100000"/>
-              </a:lnSpc>
-              <a:spcBef>
-                <a:spcPts val="0"/>
-              </a:spcBef>
-              <a:spcAft>
-                <a:spcPts val="0"/>
-              </a:spcAft>
-              <a:buClrTx/>
-              <a:buSzTx/>
-              <a:buFontTx/>
-              <a:buNone/>
-              <a:tabLst/>
-              <a:defRPr/>
-            </a:pPr>
-            <a:r>
-              <a:rPr kumimoji="0" lang="en-US" sz="900" b="0" i="0" u="none" strike="noStrike" kern="1200" cap="none" spc="0" normalizeH="0" baseline="0" noProof="0">
-                <a:ln>
-                  <a:noFill/>
-                </a:ln>
-                <a:solidFill>
-                  <a:prstClr val="black">
-                    <a:tint val="75000"/>
-                  </a:prstClr>
-                </a:solidFill>
-                <a:effectLst/>
-                <a:uLnTx/>
-                <a:uFillTx/>
-                <a:latin typeface="Trebuchet MS" panose="020B0603020202020204"/>
-                <a:ea typeface="+mn-ea"/>
-                <a:cs typeface="+mn-cs"/>
-              </a:rPr>
-              <a:t>raysmith@alum.mit.edu</a:t>
-            </a:r>
-            <a:endParaRPr kumimoji="0" lang="en-US" sz="900" b="0" i="0" u="none" strike="noStrike" kern="1200" cap="none" spc="0" normalizeH="0" baseline="0" noProof="0" dirty="0">
-              <a:ln>
-                <a:noFill/>
-              </a:ln>
-              <a:solidFill>
-                <a:prstClr val="black">
-                  <a:tint val="75000"/>
-                </a:prstClr>
-              </a:solidFill>
-              <a:effectLst/>
-              <a:uLnTx/>
-              <a:uFillTx/>
-              <a:latin typeface="Trebuchet MS" panose="020B0603020202020204"/>
-              <a:ea typeface="+mn-ea"/>
-              <a:cs typeface="+mn-cs"/>
-            </a:endParaRPr>
-          </a:p>
-        </p:txBody>
-      </p:sp>
-      <p:sp>
-        <p:nvSpPr>
-          <p:cNvPr id="6" name="Slide Number Placeholder 5">
-            <a:extLst>
-              <a:ext uri="{FF2B5EF4-FFF2-40B4-BE49-F238E27FC236}">
-                <a16:creationId xmlns:a16="http://schemas.microsoft.com/office/drawing/2014/main" id="{54E7395C-C96B-C82A-58E2-49E4B31B73C9}"/>
-              </a:ext>
-            </a:extLst>
-          </p:cNvPr>
-          <p:cNvSpPr>
-            <a:spLocks noGrp="1"/>
-          </p:cNvSpPr>
-          <p:nvPr>
-            <p:ph type="sldNum" sz="quarter" idx="12"/>
-          </p:nvPr>
-        </p:nvSpPr>
-        <p:spPr/>
-        <p:txBody>
-          <a:bodyPr/>
-          <a:lstStyle/>
-          <a:p>
-            <a:pPr marL="0" marR="0" lvl="0" indent="0" algn="r" defTabSz="914400" rtl="0" eaLnBrk="1" fontAlgn="auto" latinLnBrk="0" hangingPunct="1">
-              <a:lnSpc>
-                <a:spcPct val="100000"/>
-              </a:lnSpc>
-              <a:spcBef>
-                <a:spcPts val="0"/>
-              </a:spcBef>
-              <a:spcAft>
-                <a:spcPts val="0"/>
-              </a:spcAft>
-              <a:buClrTx/>
-              <a:buSzTx/>
-              <a:buFontTx/>
-              <a:buNone/>
-              <a:tabLst/>
-              <a:defRPr/>
-            </a:pPr>
-            <a:fld id="{6D22F896-40B5-4ADD-8801-0D06FADFA095}" type="slidenum">
-              <a:rPr kumimoji="0" lang="en-US" sz="900" b="0" i="0" u="none" strike="noStrike" kern="1200" cap="none" spc="0" normalizeH="0" baseline="0" noProof="0" smtClean="0">
-                <a:ln>
-                  <a:noFill/>
-                </a:ln>
-                <a:solidFill>
-                  <a:srgbClr val="90C226"/>
-                </a:solidFill>
-                <a:effectLst/>
-                <a:uLnTx/>
-                <a:uFillTx/>
-                <a:latin typeface="Trebuchet MS" panose="020B0603020202020204"/>
-                <a:ea typeface="+mn-ea"/>
-                <a:cs typeface="+mn-cs"/>
-              </a:rPr>
-              <a:pPr marL="0" marR="0" lvl="0" indent="0" algn="r" defTabSz="914400" rtl="0" eaLnBrk="1" fontAlgn="auto" latinLnBrk="0" hangingPunct="1">
-                <a:lnSpc>
-                  <a:spcPct val="100000"/>
-                </a:lnSpc>
-                <a:spcBef>
-                  <a:spcPts val="0"/>
-                </a:spcBef>
-                <a:spcAft>
-                  <a:spcPts val="0"/>
-                </a:spcAft>
-                <a:buClrTx/>
-                <a:buSzTx/>
-                <a:buFontTx/>
-                <a:buNone/>
-                <a:tabLst/>
-                <a:defRPr/>
-              </a:pPr>
-              <a:t>20</a:t>
-            </a:fld>
-            <a:endParaRPr kumimoji="0" lang="en-US" sz="900" b="0" i="0" u="none" strike="noStrike" kern="1200" cap="none" spc="0" normalizeH="0" baseline="0" noProof="0" dirty="0">
-              <a:ln>
-                <a:noFill/>
-              </a:ln>
-              <a:solidFill>
-                <a:srgbClr val="90C226"/>
-              </a:solidFill>
-              <a:effectLst/>
-              <a:uLnTx/>
-              <a:uFillTx/>
-              <a:latin typeface="Trebuchet MS" panose="020B0603020202020204"/>
-              <a:ea typeface="+mn-ea"/>
-              <a:cs typeface="+mn-cs"/>
-            </a:endParaRPr>
-          </a:p>
-        </p:txBody>
-      </p:sp>
-      <p:pic>
-        <p:nvPicPr>
-          <p:cNvPr id="1025" name="Picture 1" descr="2">
-            <a:extLst>
-              <a:ext uri="{FF2B5EF4-FFF2-40B4-BE49-F238E27FC236}">
-                <a16:creationId xmlns:a16="http://schemas.microsoft.com/office/drawing/2014/main" id="{E655AFAE-90EF-81F0-845D-A0C543B6A4BD}"/>
-              </a:ext>
-            </a:extLst>
-          </p:cNvPr>
-          <p:cNvPicPr>
-            <a:picLocks noChangeAspect="1" noChangeArrowheads="1"/>
-          </p:cNvPicPr>
-          <p:nvPr/>
-        </p:nvPicPr>
-        <p:blipFill>
-          <a:blip r:embed="rId2">
-            <a:extLst>
-              <a:ext uri="{28A0092B-C50C-407E-A947-70E740481C1C}">
-                <a14:useLocalDpi xmlns:a14="http://schemas.microsoft.com/office/drawing/2010/main" val="0"/>
-              </a:ext>
-            </a:extLst>
-          </a:blip>
-          <a:srcRect/>
-          <a:stretch>
-            <a:fillRect/>
-          </a:stretch>
-        </p:blipFill>
-        <p:spPr bwMode="auto">
-          <a:xfrm>
-            <a:off x="0" y="0"/>
-            <a:ext cx="133350" cy="219075"/>
-          </a:xfrm>
-          <a:prstGeom prst="rect">
-            <a:avLst/>
-          </a:prstGeom>
-          <a:noFill/>
-          <a:extLst>
-            <a:ext uri="{909E8E84-426E-40DD-AFC4-6F175D3DCCD1}">
-              <a14:hiddenFill xmlns:a14="http://schemas.microsoft.com/office/drawing/2010/main">
-                <a:solidFill>
-                  <a:srgbClr val="FFFFFF"/>
-                </a:solidFill>
-              </a14:hiddenFill>
-            </a:ext>
-          </a:extLst>
-        </p:spPr>
-      </p:pic>
-    </p:spTree>
-    <p:extLst>
-      <p:ext uri="{BB962C8B-B14F-4D97-AF65-F5344CB8AC3E}">
-        <p14:creationId xmlns:p14="http://schemas.microsoft.com/office/powerpoint/2010/main" val="587817200"/>
-      </p:ext>
-    </p:extLst>
-  </p:cSld>
-  <p:clrMapOvr>
-    <a:masterClrMapping/>
-  </p:clrMapOvr>
-</p:sld>
-</file>
-
-<file path=ppt/slides/slide21.xml><?xml version="1.0" encoding="utf-8"?>
-<p:sld xmlns:a="http://schemas.openxmlformats.org/drawingml/2006/main" xmlns:r="http://schemas.openxmlformats.org/officeDocument/2006/relationships" xmlns:p="http://schemas.openxmlformats.org/presentationml/2006/main">
-  <p:cSld>
-    <p:bg>
-      <p:bgPr>
-        <a:gradFill>
-          <a:gsLst>
-            <a:gs pos="0">
-              <a:schemeClr val="accent4">
-                <a:lumMod val="20000"/>
-                <a:lumOff val="80000"/>
-              </a:schemeClr>
-            </a:gs>
-            <a:gs pos="74000">
-              <a:schemeClr val="accent4">
-                <a:lumMod val="45000"/>
-                <a:lumOff val="55000"/>
-              </a:schemeClr>
-            </a:gs>
-            <a:gs pos="83000">
-              <a:schemeClr val="accent4">
-                <a:lumMod val="45000"/>
-                <a:lumOff val="55000"/>
-              </a:schemeClr>
-            </a:gs>
-            <a:gs pos="100000">
-              <a:schemeClr val="accent4">
-                <a:lumMod val="30000"/>
-                <a:lumOff val="70000"/>
-              </a:schemeClr>
-            </a:gs>
-          </a:gsLst>
-          <a:lin ang="5400000" scaled="1"/>
-        </a:gradFill>
-        <a:effectLst/>
-      </p:bgPr>
-    </p:bg>
-    <p:spTree>
-      <p:nvGrpSpPr>
-        <p:cNvPr id="1" name=""/>
-        <p:cNvGrpSpPr/>
-        <p:nvPr/>
-      </p:nvGrpSpPr>
-      <p:grpSpPr>
-        <a:xfrm>
-          <a:off x="0" y="0"/>
-          <a:ext cx="0" cy="0"/>
-          <a:chOff x="0" y="0"/>
-          <a:chExt cx="0" cy="0"/>
-        </a:xfrm>
-      </p:grpSpPr>
-      <p:sp>
-        <p:nvSpPr>
-          <p:cNvPr id="2" name="Title 1">
-            <a:extLst>
-              <a:ext uri="{FF2B5EF4-FFF2-40B4-BE49-F238E27FC236}">
                 <a16:creationId xmlns:a16="http://schemas.microsoft.com/office/drawing/2014/main" id="{F7E90694-AA7F-451B-A875-1D23D1FDBA32}"/>
               </a:ext>
             </a:extLst>
@@ -13402,8 +13803,8 @@
         </p:nvSpPr>
         <p:spPr>
           <a:xfrm>
-            <a:off x="955892" y="2723014"/>
-            <a:ext cx="8596668" cy="2289739"/>
+            <a:off x="780748" y="1449386"/>
+            <a:ext cx="8596668" cy="1424443"/>
           </a:xfrm>
         </p:spPr>
         <p:txBody>
@@ -13415,17 +13816,6 @@
             <a:pPr algn="ctr"/>
             <a:r>
               <a:rPr lang="en-US" sz="6600" dirty="0"/>
-              <a:t>Tool </a:t>
-            </a:r>
-            <a:br>
-              <a:rPr lang="en-US" sz="6600" dirty="0"/>
-            </a:br>
-            <a:r>
-              <a:rPr lang="en-US" sz="6600" dirty="0">
-                <a:solidFill>
-                  <a:schemeClr val="tx1"/>
-                </a:solidFill>
-              </a:rPr>
               <a:t>Question and Answer</a:t>
             </a:r>
           </a:p>
@@ -13454,7 +13844,7 @@
           <a:p>
             <a:fld id="{A7119916-CD40-456D-ABE3-55F8822671F7}" type="datetime1">
               <a:rPr lang="en-US" smtClean="0"/>
-              <a:t>4/16/2024</a:t>
+              <a:t>5/18/2026</a:t>
             </a:fld>
             <a:endParaRPr lang="en-US" dirty="0"/>
           </a:p>
@@ -13511,7 +13901,7 @@
           <a:p>
             <a:fld id="{6D22F896-40B5-4ADD-8801-0D06FADFA095}" type="slidenum">
               <a:rPr lang="en-US" smtClean="0"/>
-              <a:t>21</a:t>
+              <a:t>25</a:t>
             </a:fld>
             <a:endParaRPr lang="en-US" dirty="0"/>
           </a:p>
@@ -13646,14 +14036,14 @@
             <a:pPr lvl="1"/>
             <a:r>
               <a:rPr lang="en-US" sz="4000" i="1" dirty="0"/>
-              <a:t>Graphics / Pictures are powerful</a:t>
+              <a:t>Pictures a powerful tool</a:t>
             </a:r>
           </a:p>
           <a:p>
             <a:pPr lvl="1"/>
             <a:r>
               <a:rPr lang="en-US" sz="4000" i="1" dirty="0"/>
-              <a:t>Blind have limited graphics access</a:t>
+              <a:t>Bind – pictures of little use</a:t>
             </a:r>
           </a:p>
         </p:txBody>
@@ -13730,7 +14120,7 @@
                 <a:tabLst/>
                 <a:defRPr/>
               </a:pPr>
-              <a:t>4/16/2024</a:t>
+              <a:t>5/18/2026</a:t>
             </a:fld>
             <a:endParaRPr kumimoji="0" lang="en-US" sz="900" b="0" i="0" u="none" strike="noStrike" kern="1200" cap="none" spc="0" normalizeH="0" baseline="0" noProof="0" dirty="0">
               <a:ln>
@@ -13991,7 +14381,7 @@
           <a:p>
             <a:r>
               <a:rPr lang="en-US" sz="4400" dirty="0"/>
-              <a:t>Problems</a:t>
+              <a:t>Teaching Goals</a:t>
             </a:r>
           </a:p>
         </p:txBody>
@@ -14012,7 +14402,12 @@
             <p:ph idx="1"/>
           </p:nvPr>
         </p:nvSpPr>
-        <p:spPr/>
+        <p:spPr>
+          <a:xfrm>
+            <a:off x="677333" y="2160589"/>
+            <a:ext cx="9136137" cy="3880773"/>
+          </a:xfrm>
+        </p:spPr>
         <p:txBody>
           <a:bodyPr>
             <a:normAutofit/>
@@ -14021,22 +14416,22 @@
           <a:p>
             <a:pPr lvl="1"/>
             <a:r>
-              <a:rPr lang="en-US" sz="3600" i="1" dirty="0"/>
-              <a:t>Little access to graphical presentations</a:t>
-            </a:r>
-          </a:p>
-          <a:p>
-            <a:pPr lvl="2"/>
-            <a:r>
-              <a:rPr lang="en-US" sz="3400" i="1" dirty="0"/>
-              <a:t>Tools e.g. Braille embossers are expensive – not at everyone's desk</a:t>
-            </a:r>
-          </a:p>
-          <a:p>
-            <a:pPr lvl="2"/>
-            <a:r>
-              <a:rPr lang="en-US" sz="3400" i="1" dirty="0"/>
-              <a:t>Access - slow/cumbersome</a:t>
+              <a:rPr lang="en-US" sz="4000" i="1" dirty="0"/>
+              <a:t>Help beginners learn Programming</a:t>
+            </a:r>
+          </a:p>
+          <a:p>
+            <a:pPr lvl="1"/>
+            <a:r>
+              <a:rPr lang="en-US" sz="4000" i="1" dirty="0"/>
+              <a:t>Improved examples - Pictures</a:t>
+            </a:r>
+          </a:p>
+          <a:p>
+            <a:pPr lvl="1"/>
+            <a:r>
+              <a:rPr lang="en-US" sz="4000" i="1" dirty="0"/>
+              <a:t>Provide the blind a view</a:t>
             </a:r>
           </a:p>
         </p:txBody>
@@ -14113,7 +14508,7 @@
                 <a:tabLst/>
                 <a:defRPr/>
               </a:pPr>
-              <a:t>4/16/2024</a:t>
+              <a:t>5/18/2026</a:t>
             </a:fld>
             <a:endParaRPr kumimoji="0" lang="en-US" sz="900" b="0" i="0" u="none" strike="noStrike" kern="1200" cap="none" spc="0" normalizeH="0" baseline="0" noProof="0" dirty="0">
               <a:ln>
@@ -14286,7 +14681,7 @@
     </p:spTree>
     <p:extLst>
       <p:ext uri="{BB962C8B-B14F-4D97-AF65-F5344CB8AC3E}">
-        <p14:creationId xmlns:p14="http://schemas.microsoft.com/office/powerpoint/2010/main" val="4105107090"/>
+        <p14:creationId xmlns:p14="http://schemas.microsoft.com/office/powerpoint/2010/main" val="1535291961"/>
       </p:ext>
     </p:extLst>
   </p:cSld>
@@ -14374,7 +14769,7 @@
           <a:p>
             <a:r>
               <a:rPr lang="en-US" sz="4400" dirty="0"/>
-              <a:t>The Tool</a:t>
+              <a:t>Benefits to the blind</a:t>
             </a:r>
           </a:p>
         </p:txBody>
@@ -14405,15 +14800,25 @@
             <a:pPr lvl="1"/>
             <a:r>
               <a:rPr lang="en-US" sz="4000" i="1" dirty="0"/>
-              <a:t>Initial goal: Help beginners learn Programming</a:t>
+              <a:t>Tactile rendition of pictures</a:t>
             </a:r>
           </a:p>
           <a:p>
             <a:pPr lvl="1"/>
             <a:r>
               <a:rPr lang="en-US" sz="4000" i="1" dirty="0"/>
-              <a:t>Extended goal: Graphics for Visually Impaired </a:t>
-            </a:r>
+              <a:t> Navigation via audio feedback</a:t>
+            </a:r>
+          </a:p>
+          <a:p>
+            <a:pPr lvl="1"/>
+            <a:endParaRPr lang="en-US" sz="4000" i="1" dirty="0"/>
+          </a:p>
+          <a:p>
+            <a:pPr marL="457200" lvl="1" indent="0">
+              <a:buNone/>
+            </a:pPr>
+            <a:endParaRPr lang="en-US" sz="4000" i="1" dirty="0"/>
           </a:p>
         </p:txBody>
       </p:sp>
@@ -14489,7 +14894,7 @@
                 <a:tabLst/>
                 <a:defRPr/>
               </a:pPr>
-              <a:t>4/16/2024</a:t>
+              <a:t>5/18/2026</a:t>
             </a:fld>
             <a:endParaRPr kumimoji="0" lang="en-US" sz="900" b="0" i="0" u="none" strike="noStrike" kern="1200" cap="none" spc="0" normalizeH="0" baseline="0" noProof="0" dirty="0">
               <a:ln>
@@ -14662,7 +15067,7 @@
     </p:spTree>
     <p:extLst>
       <p:ext uri="{BB962C8B-B14F-4D97-AF65-F5344CB8AC3E}">
-        <p14:creationId xmlns:p14="http://schemas.microsoft.com/office/powerpoint/2010/main" val="1535291961"/>
+        <p14:creationId xmlns:p14="http://schemas.microsoft.com/office/powerpoint/2010/main" val="882134422"/>
       </p:ext>
     </p:extLst>
   </p:cSld>
@@ -14750,7 +15155,7 @@
           <a:p>
             <a:r>
               <a:rPr lang="en-US" sz="4400" dirty="0"/>
-              <a:t>Tool Benefits Provided</a:t>
+              <a:t>Pre-programming view</a:t>
             </a:r>
           </a:p>
         </p:txBody>
@@ -14781,25 +15186,34 @@
             <a:pPr lvl="1"/>
             <a:r>
               <a:rPr lang="en-US" sz="4000" i="1" dirty="0"/>
-              <a:t>Braille rendition of simple graphics output</a:t>
-            </a:r>
-          </a:p>
-          <a:p>
-            <a:pPr lvl="1"/>
-            <a:r>
-              <a:rPr lang="en-US" sz="4000" i="1" dirty="0"/>
-              <a:t>Graphics output with audio feedback</a:t>
-            </a:r>
-          </a:p>
-          <a:p>
-            <a:pPr lvl="1"/>
-            <a:endParaRPr lang="en-US" sz="4000" i="1" dirty="0"/>
-          </a:p>
-          <a:p>
-            <a:pPr marL="457200" lvl="1" indent="0">
-              <a:buNone/>
-            </a:pPr>
-            <a:endParaRPr lang="en-US" sz="4000" i="1" dirty="0"/>
+              <a:t>Python program</a:t>
+            </a:r>
+          </a:p>
+          <a:p>
+            <a:pPr lvl="2"/>
+            <a:r>
+              <a:rPr lang="en-US" sz="3800" i="1" dirty="0"/>
+              <a:t>a wordy nerdy "</a:t>
+            </a:r>
+            <a:r>
+              <a:rPr lang="en-US" sz="3800" i="1" dirty="0">
+                <a:solidFill>
+                  <a:schemeClr val="accent1"/>
+                </a:solidFill>
+              </a:rPr>
+              <a:t>Etch A Sketch</a:t>
+            </a:r>
+            <a:r>
+              <a:rPr lang="en-US" sz="3800" i="1" dirty="0"/>
+              <a:t>" drawing tool</a:t>
+            </a:r>
+          </a:p>
+          <a:p>
+            <a:pPr lvl="2"/>
+            <a:r>
+              <a:rPr lang="en-US" sz="3800" i="1" dirty="0"/>
+              <a:t>Drawing Instructions</a:t>
+            </a:r>
           </a:p>
         </p:txBody>
       </p:sp>
@@ -14875,7 +15289,7 @@
                 <a:tabLst/>
                 <a:defRPr/>
               </a:pPr>
-              <a:t>4/16/2024</a:t>
+              <a:t>5/18/2026</a:t>
             </a:fld>
             <a:endParaRPr kumimoji="0" lang="en-US" sz="900" b="0" i="0" u="none" strike="noStrike" kern="1200" cap="none" spc="0" normalizeH="0" baseline="0" noProof="0" dirty="0">
               <a:ln>
@@ -15048,7 +15462,7 @@
     </p:spTree>
     <p:extLst>
       <p:ext uri="{BB962C8B-B14F-4D97-AF65-F5344CB8AC3E}">
-        <p14:creationId xmlns:p14="http://schemas.microsoft.com/office/powerpoint/2010/main" val="882134422"/>
+        <p14:creationId xmlns:p14="http://schemas.microsoft.com/office/powerpoint/2010/main" val="356512074"/>
       </p:ext>
     </p:extLst>
   </p:cSld>
@@ -15126,6 +15540,10 @@
           </p:nvPr>
         </p:nvSpPr>
         <p:spPr>
+          <a:xfrm>
+            <a:off x="677334" y="277586"/>
+            <a:ext cx="8596668" cy="1012371"/>
+          </a:xfrm>
           <a:noFill/>
         </p:spPr>
         <p:txBody>
@@ -15134,9 +15552,10 @@
           </a:bodyPr>
           <a:lstStyle/>
           <a:p>
+            <a:pPr algn="ctr"/>
             <a:r>
               <a:rPr lang="en-US" sz="4400" dirty="0"/>
-              <a:t>Non-programming view</a:t>
+              <a:t>Example: Draw a square</a:t>
             </a:r>
           </a:p>
         </p:txBody>
@@ -15157,44 +15576,115 @@
             <p:ph idx="1"/>
           </p:nvPr>
         </p:nvSpPr>
-        <p:spPr/>
+        <p:spPr>
+          <a:xfrm>
+            <a:off x="146957" y="1142999"/>
+            <a:ext cx="9846129" cy="5110843"/>
+          </a:xfrm>
+        </p:spPr>
         <p:txBody>
           <a:bodyPr>
-            <a:normAutofit/>
+            <a:normAutofit fontScale="70000" lnSpcReduction="20000"/>
           </a:bodyPr>
           <a:lstStyle/>
           <a:p>
-            <a:pPr lvl="1"/>
+            <a:pPr marL="457200" lvl="1" indent="0">
+              <a:buNone/>
+            </a:pPr>
+            <a:r>
+              <a:rPr lang="en-US" sz="3100" i="1" dirty="0"/>
+              <a:t># show_square_loop_colors_braille.py</a:t>
+            </a:r>
+          </a:p>
+          <a:p>
+            <a:pPr marL="457200" lvl="1" indent="0">
+              <a:buNone/>
+            </a:pPr>
+            <a:r>
+              <a:rPr lang="en-US" sz="3100" i="1" dirty="0"/>
+              <a:t># Display a square with colored sides</a:t>
+            </a:r>
+          </a:p>
+          <a:p>
+            <a:pPr marL="457200" lvl="1" indent="0">
+              <a:buNone/>
+            </a:pPr>
+            <a:endParaRPr lang="en-US" sz="1500" i="1" dirty="0"/>
+          </a:p>
+          <a:p>
+            <a:pPr marL="457200" lvl="1" indent="0">
+              <a:buNone/>
+            </a:pPr>
             <a:r>
               <a:rPr lang="en-US" sz="4000" i="1" dirty="0"/>
-              <a:t>Python program</a:t>
-            </a:r>
-          </a:p>
-          <a:p>
-            <a:pPr lvl="2"/>
-            <a:r>
-              <a:rPr lang="en-US" sz="3800" i="1" dirty="0"/>
-              <a:t>a wordy nerdy "</a:t>
-            </a:r>
-            <a:r>
-              <a:rPr lang="en-US" sz="3800" i="1" dirty="0">
-                <a:solidFill>
-                  <a:schemeClr val="accent1"/>
-                </a:solidFill>
-              </a:rPr>
-              <a:t>Etch A Sketch</a:t>
-            </a:r>
-            <a:r>
-              <a:rPr lang="en-US" sz="3800" i="1" dirty="0"/>
-              <a:t>" drawing tool</a:t>
-            </a:r>
-          </a:p>
-          <a:p>
-            <a:pPr lvl="2"/>
-            <a:r>
-              <a:rPr lang="en-US" sz="3800" i="1" dirty="0"/>
-              <a:t>Drawing Instructions</a:t>
-            </a:r>
+              <a:t>from graphics_braille.wx_turtle_braille import *</a:t>
+            </a:r>
+          </a:p>
+          <a:p>
+            <a:pPr marL="457200" lvl="1" indent="0">
+              <a:buNone/>
+            </a:pPr>
+            <a:endParaRPr lang="en-US" sz="4000" i="1" dirty="0"/>
+          </a:p>
+          <a:p>
+            <a:pPr marL="457200" lvl="1" indent="0">
+              <a:buNone/>
+            </a:pPr>
+            <a:r>
+              <a:rPr lang="en-US" sz="4000" i="1" dirty="0"/>
+              <a:t>for colr in ["red","orange","yellow","green"] :</a:t>
+            </a:r>
+          </a:p>
+          <a:p>
+            <a:pPr marL="457200" lvl="1" indent="0">
+              <a:buNone/>
+            </a:pPr>
+            <a:r>
+              <a:rPr lang="en-US" sz="4000" i="1" dirty="0"/>
+              <a:t>    width(40)</a:t>
+            </a:r>
+          </a:p>
+          <a:p>
+            <a:pPr marL="457200" lvl="1" indent="0">
+              <a:buNone/>
+            </a:pPr>
+            <a:r>
+              <a:rPr lang="en-US" sz="4000" i="1" dirty="0"/>
+              <a:t>    color(colr)</a:t>
+            </a:r>
+          </a:p>
+          <a:p>
+            <a:pPr marL="457200" lvl="1" indent="0">
+              <a:buNone/>
+            </a:pPr>
+            <a:r>
+              <a:rPr lang="en-US" sz="4000" i="1" dirty="0"/>
+              <a:t>    forward(200)</a:t>
+            </a:r>
+          </a:p>
+          <a:p>
+            <a:pPr marL="457200" lvl="1" indent="0">
+              <a:buNone/>
+            </a:pPr>
+            <a:r>
+              <a:rPr lang="en-US" sz="4000" i="1" dirty="0"/>
+              <a:t>    right(90)</a:t>
+            </a:r>
+          </a:p>
+          <a:p>
+            <a:pPr marL="457200" lvl="1" indent="0">
+              <a:buNone/>
+            </a:pPr>
+            <a:r>
+              <a:rPr lang="en-US" sz="4000" i="1" dirty="0"/>
+              <a:t>done()		    # Complete drawings</a:t>
+            </a:r>
+          </a:p>
+          <a:p>
+            <a:pPr marL="457200" lvl="1" indent="0">
+              <a:buNone/>
+            </a:pPr>
+            <a:endParaRPr lang="en-US" sz="4000" i="1" dirty="0"/>
           </a:p>
         </p:txBody>
       </p:sp>
@@ -15270,7 +15760,7 @@
                 <a:tabLst/>
                 <a:defRPr/>
               </a:pPr>
-              <a:t>4/16/2024</a:t>
+              <a:t>5/18/2026</a:t>
             </a:fld>
             <a:endParaRPr kumimoji="0" lang="en-US" sz="900" b="0" i="0" u="none" strike="noStrike" kern="1200" cap="none" spc="0" normalizeH="0" baseline="0" noProof="0" dirty="0">
               <a:ln>
@@ -15443,7 +15933,7 @@
     </p:spTree>
     <p:extLst>
       <p:ext uri="{BB962C8B-B14F-4D97-AF65-F5344CB8AC3E}">
-        <p14:creationId xmlns:p14="http://schemas.microsoft.com/office/powerpoint/2010/main" val="356512074"/>
+        <p14:creationId xmlns:p14="http://schemas.microsoft.com/office/powerpoint/2010/main" val="3801150348"/>
       </p:ext>
     </p:extLst>
   </p:cSld>
@@ -15456,40 +15946,6 @@
 <file path=ppt/slides/slide8.xml><?xml version="1.0" encoding="utf-8"?>
 <p:sld xmlns:a="http://schemas.openxmlformats.org/drawingml/2006/main" xmlns:r="http://schemas.openxmlformats.org/officeDocument/2006/relationships" xmlns:p="http://schemas.openxmlformats.org/presentationml/2006/main">
   <p:cSld>
-    <p:bg>
-      <p:bgPr>
-        <a:gradFill>
-          <a:gsLst>
-            <a:gs pos="0">
-              <a:schemeClr val="accent4">
-                <a:lumMod val="5000"/>
-                <a:lumOff val="95000"/>
-              </a:schemeClr>
-            </a:gs>
-            <a:gs pos="74000">
-              <a:schemeClr val="accent4">
-                <a:lumMod val="45000"/>
-                <a:lumOff val="55000"/>
-              </a:schemeClr>
-            </a:gs>
-            <a:gs pos="83000">
-              <a:schemeClr val="accent4">
-                <a:lumMod val="45000"/>
-                <a:lumOff val="55000"/>
-              </a:schemeClr>
-            </a:gs>
-            <a:gs pos="100000">
-              <a:schemeClr val="accent4">
-                <a:lumMod val="30000"/>
-                <a:lumOff val="70000"/>
-              </a:schemeClr>
-            </a:gs>
-          </a:gsLst>
-          <a:lin ang="5400000" scaled="1"/>
-        </a:gradFill>
-        <a:effectLst/>
-      </p:bgPr>
-    </p:bg>
     <p:spTree>
       <p:nvGrpSpPr>
         <p:cNvPr id="1" name=""/>
@@ -15509,7 +15965,7 @@
           <p:cNvPr id="2" name="Title 1">
             <a:extLst>
               <a:ext uri="{FF2B5EF4-FFF2-40B4-BE49-F238E27FC236}">
-                <a16:creationId xmlns:a16="http://schemas.microsoft.com/office/drawing/2014/main" id="{F7E90694-AA7F-451B-A875-1D23D1FDBA32}"/>
+                <a16:creationId xmlns:a16="http://schemas.microsoft.com/office/drawing/2014/main" id="{C9F3EE02-B153-C542-E232-A6A2C8645654}"/>
               </a:ext>
             </a:extLst>
           </p:cNvPr>
@@ -15520,18 +15976,18 @@
             <p:ph type="title"/>
           </p:nvPr>
         </p:nvSpPr>
-        <p:spPr>
-          <a:noFill/>
-        </p:spPr>
-        <p:txBody>
-          <a:bodyPr>
-            <a:noAutofit/>
-          </a:bodyPr>
-          <a:lstStyle/>
-          <a:p>
-            <a:r>
-              <a:rPr lang="en-US" sz="4400" dirty="0"/>
-              <a:t>Draw a square</a:t>
+        <p:spPr/>
+        <p:txBody>
+          <a:bodyPr/>
+          <a:lstStyle/>
+          <a:p>
+            <a:r>
+              <a:rPr lang="en-US" sz="4000" dirty="0"/>
+              <a:t>A Demo </a:t>
+            </a:r>
+            <a:r>
+              <a:rPr lang="en-US" sz="2400" dirty="0"/>
+              <a:t>– Hopefully Live</a:t>
             </a:r>
           </a:p>
         </p:txBody>
@@ -15541,7 +15997,7 @@
           <p:cNvPr id="3" name="Content Placeholder 2">
             <a:extLst>
               <a:ext uri="{FF2B5EF4-FFF2-40B4-BE49-F238E27FC236}">
-                <a16:creationId xmlns:a16="http://schemas.microsoft.com/office/drawing/2014/main" id="{B25115FD-141E-48C6-A3F1-61C4558CC9C7}"/>
+                <a16:creationId xmlns:a16="http://schemas.microsoft.com/office/drawing/2014/main" id="{254E99A9-3DB4-D3CE-BC4F-B39AA4A88426}"/>
               </a:ext>
             </a:extLst>
           </p:cNvPr>
@@ -15552,39 +16008,55 @@
             <p:ph idx="1"/>
           </p:nvPr>
         </p:nvSpPr>
-        <p:spPr>
-          <a:xfrm>
-            <a:off x="349857" y="1407381"/>
-            <a:ext cx="9835763" cy="4633981"/>
-          </a:xfrm>
-        </p:spPr>
+        <p:spPr/>
         <p:txBody>
           <a:bodyPr>
-            <a:normAutofit fontScale="70000" lnSpcReduction="20000"/>
+            <a:normAutofit lnSpcReduction="10000"/>
           </a:bodyPr>
           <a:lstStyle/>
           <a:p>
+            <a:r>
+              <a:rPr lang="en-US" sz="3600" dirty="0"/>
+              <a:t>Following slides are backup</a:t>
+            </a:r>
+          </a:p>
+          <a:p>
+            <a:pPr lvl="1"/>
+            <a:r>
+              <a:rPr lang="en-US" sz="3400" dirty="0"/>
+              <a:t>offline viewing</a:t>
+            </a:r>
+          </a:p>
+          <a:p>
+            <a:pPr lvl="1"/>
+            <a:r>
+              <a:rPr lang="en-US" sz="3400" dirty="0"/>
+              <a:t>If computer problems</a:t>
+            </a:r>
+          </a:p>
+          <a:p>
+            <a:r>
+              <a:rPr lang="en-US" sz="3600" dirty="0"/>
+              <a:t>Demo V/I usage…</a:t>
+            </a:r>
+          </a:p>
+          <a:p>
             <a:pPr marL="457200" lvl="1" indent="0">
               <a:buNone/>
             </a:pPr>
             <a:r>
-              <a:rPr lang="en-US" sz="4000" i="1" dirty="0">
+              <a:rPr lang="en-US" sz="3400" b="1" dirty="0">
                 <a:latin typeface="Courier New" panose="02070309020205020404" pitchFamily="49" charset="0"/>
                 <a:cs typeface="Courier New" panose="02070309020205020404" pitchFamily="49" charset="0"/>
               </a:rPr>
-              <a:t># square_loop.py</a:t>
-            </a:r>
-          </a:p>
-          <a:p>
-            <a:pPr marL="457200" lvl="1" indent="0">
-              <a:buNone/>
-            </a:pPr>
-            <a:r>
-              <a:rPr lang="en-US" sz="4000" i="1" dirty="0">
+              <a:t>cmd&gt;</a:t>
+            </a:r>
+            <a:r>
+              <a:rPr lang="en-US" sz="3400" dirty="0">
                 <a:latin typeface="Courier New" panose="02070309020205020404" pitchFamily="49" charset="0"/>
                 <a:cs typeface="Courier New" panose="02070309020205020404" pitchFamily="49" charset="0"/>
               </a:rPr>
-              <a:t># Display a square</a:t>
+              <a:t> cd Desktop\...\01_intro</a:t>
             </a:r>
           </a:p>
           <a:p>
@@ -15592,94 +16064,22 @@
               <a:buNone/>
             </a:pPr>
             <a:r>
-              <a:rPr lang="en-US" sz="4000" i="1" dirty="0">
+              <a:rPr lang="en-US" sz="3400" b="1" dirty="0">
                 <a:latin typeface="Courier New" panose="02070309020205020404" pitchFamily="49" charset="0"/>
                 <a:cs typeface="Courier New" panose="02070309020205020404" pitchFamily="49" charset="0"/>
               </a:rPr>
-              <a:t>from turtle_braille_link import * # </a:t>
-            </a:r>
-            <a:r>
-              <a:rPr lang="en-US" sz="2900" i="1" dirty="0">
+              <a:t>cmd&gt;</a:t>
+            </a:r>
+            <a:r>
+              <a:rPr lang="en-US" sz="3400" dirty="0">
                 <a:latin typeface="Courier New" panose="02070309020205020404" pitchFamily="49" charset="0"/>
                 <a:cs typeface="Courier New" panose="02070309020205020404" pitchFamily="49" charset="0"/>
               </a:rPr>
-              <a:t>graphics</a:t>
-            </a:r>
-          </a:p>
-          <a:p>
-            <a:pPr marL="457200" lvl="1" indent="0">
-              <a:buNone/>
-            </a:pPr>
-            <a:endParaRPr lang="en-US" sz="4000" i="1" dirty="0">
-              <a:latin typeface="Courier New" panose="02070309020205020404" pitchFamily="49" charset="0"/>
-              <a:cs typeface="Courier New" panose="02070309020205020404" pitchFamily="49" charset="0"/>
-            </a:endParaRPr>
-          </a:p>
-          <a:p>
-            <a:pPr marL="457200" lvl="1" indent="0">
-              <a:buNone/>
-            </a:pPr>
-            <a:r>
-              <a:rPr lang="en-US" sz="4000" i="1" dirty="0">
-                <a:latin typeface="Courier New" panose="02070309020205020404" pitchFamily="49" charset="0"/>
-                <a:cs typeface="Courier New" panose="02070309020205020404" pitchFamily="49" charset="0"/>
-              </a:rPr>
-              <a:t>color("green")</a:t>
-            </a:r>
-          </a:p>
-          <a:p>
-            <a:pPr marL="457200" lvl="1" indent="0">
-              <a:buNone/>
-            </a:pPr>
-            <a:r>
-              <a:rPr lang="en-US" sz="4000" i="1" dirty="0">
-                <a:latin typeface="Courier New" panose="02070309020205020404" pitchFamily="49" charset="0"/>
-                <a:cs typeface="Courier New" panose="02070309020205020404" pitchFamily="49" charset="0"/>
-              </a:rPr>
-              <a:t>for i in range(4):  # Do 4 times</a:t>
-            </a:r>
-          </a:p>
-          <a:p>
-            <a:pPr marL="457200" lvl="1" indent="0">
-              <a:buNone/>
-            </a:pPr>
-            <a:r>
-              <a:rPr lang="en-US" sz="4000" i="1" dirty="0">
-                <a:latin typeface="Courier New" panose="02070309020205020404" pitchFamily="49" charset="0"/>
-                <a:cs typeface="Courier New" panose="02070309020205020404" pitchFamily="49" charset="0"/>
-              </a:rPr>
-              <a:t>    forward(200)</a:t>
-            </a:r>
-          </a:p>
-          <a:p>
-            <a:pPr marL="457200" lvl="1" indent="0">
-              <a:buNone/>
-            </a:pPr>
-            <a:r>
-              <a:rPr lang="en-US" sz="4000" i="1" dirty="0">
-                <a:latin typeface="Courier New" panose="02070309020205020404" pitchFamily="49" charset="0"/>
-                <a:cs typeface="Courier New" panose="02070309020205020404" pitchFamily="49" charset="0"/>
-              </a:rPr>
-              <a:t>    right(90)</a:t>
-            </a:r>
-          </a:p>
-          <a:p>
-            <a:pPr marL="457200" lvl="1" indent="0">
-              <a:buNone/>
-            </a:pPr>
-            <a:r>
-              <a:rPr lang="en-US" sz="4000" i="1" dirty="0">
-                <a:latin typeface="Courier New" panose="02070309020205020404" pitchFamily="49" charset="0"/>
-                <a:cs typeface="Courier New" panose="02070309020205020404" pitchFamily="49" charset="0"/>
-              </a:rPr>
-              <a:t>done()		    # Complete drawing</a:t>
-            </a:r>
-          </a:p>
-          <a:p>
-            <a:pPr marL="457200" lvl="1" indent="0">
-              <a:buNone/>
-            </a:pPr>
-            <a:endParaRPr lang="en-US" sz="4000" i="1" dirty="0"/>
+              <a:t> python square_loop.py</a:t>
+            </a:r>
+          </a:p>
+          <a:p>
+            <a:endParaRPr lang="en-US" sz="3600" dirty="0"/>
           </a:p>
         </p:txBody>
       </p:sp>
@@ -15688,7 +16088,7 @@
           <p:cNvPr id="4" name="Date Placeholder 3">
             <a:extLst>
               <a:ext uri="{FF2B5EF4-FFF2-40B4-BE49-F238E27FC236}">
-                <a16:creationId xmlns:a16="http://schemas.microsoft.com/office/drawing/2014/main" id="{B623EE2F-E3E9-437B-AFAE-1E0C5C94A5F8}"/>
+                <a16:creationId xmlns:a16="http://schemas.microsoft.com/office/drawing/2014/main" id="{9BEE1906-2E6B-9099-3D08-8463B414FF7B}"/>
               </a:ext>
             </a:extLst>
           </p:cNvPr>
@@ -15704,75 +16104,11 @@
           <a:bodyPr/>
           <a:lstStyle/>
           <a:p>
-            <a:pPr marL="0" marR="0" lvl="0" indent="0" algn="r" defTabSz="457200" rtl="0" eaLnBrk="1" fontAlgn="auto" latinLnBrk="0" hangingPunct="1">
-              <a:lnSpc>
-                <a:spcPct val="100000"/>
-              </a:lnSpc>
-              <a:spcBef>
-                <a:spcPts val="0"/>
-              </a:spcBef>
-              <a:spcAft>
-                <a:spcPts val="0"/>
-              </a:spcAft>
-              <a:buClrTx/>
-              <a:buSzTx/>
-              <a:buFontTx/>
-              <a:buNone/>
-              <a:tabLst/>
-              <a:defRPr/>
-            </a:pPr>
             <a:fld id="{A7119916-CD40-456D-ABE3-55F8822671F7}" type="datetime1">
-              <a:rPr kumimoji="0" lang="en-US" sz="900" b="0" i="0" u="none" strike="noStrike" kern="1200" cap="none" spc="0" normalizeH="0" baseline="0" noProof="0" smtClean="0">
-                <a:ln>
-                  <a:noFill/>
-                </a:ln>
-                <a:solidFill>
-                  <a:prstClr val="black">
-                    <a:tint val="75000"/>
-                  </a:prstClr>
-                </a:solidFill>
-                <a:effectLst/>
-                <a:uLnTx/>
-                <a:uFillTx/>
-                <a:latin typeface="Trebuchet MS" panose="020B0603020202020204"/>
-                <a:ea typeface="+mn-ea"/>
-                <a:cs typeface="+mn-cs"/>
-              </a:rPr>
-              <a:pPr marL="0" marR="0" lvl="0" indent="0" algn="r" defTabSz="457200" rtl="0" eaLnBrk="1" fontAlgn="auto" latinLnBrk="0" hangingPunct="1">
-                <a:lnSpc>
-                  <a:spcPct val="100000"/>
-                </a:lnSpc>
-                <a:spcBef>
-                  <a:spcPts val="0"/>
-                </a:spcBef>
-                <a:spcAft>
-                  <a:spcPts val="0"/>
-                </a:spcAft>
-                <a:buClrTx/>
-                <a:buSzTx/>
-                <a:buFontTx/>
-                <a:buNone/>
-                <a:tabLst/>
-                <a:defRPr/>
-              </a:pPr>
-              <a:t>4/16/2024</a:t>
+              <a:rPr lang="en-US" smtClean="0"/>
+              <a:t>5/18/2026</a:t>
             </a:fld>
-            <a:endParaRPr kumimoji="0" lang="en-US" sz="900" b="0" i="0" u="none" strike="noStrike" kern="1200" cap="none" spc="0" normalizeH="0" baseline="0" noProof="0" dirty="0">
-              <a:ln>
-                <a:noFill/>
-              </a:ln>
-              <a:solidFill>
-                <a:prstClr val="black">
-                  <a:tint val="75000"/>
-                </a:prstClr>
-              </a:solidFill>
-              <a:effectLst/>
-              <a:uLnTx/>
-              <a:uFillTx/>
-              <a:latin typeface="Trebuchet MS" panose="020B0603020202020204"/>
-              <a:ea typeface="+mn-ea"/>
-              <a:cs typeface="+mn-cs"/>
-            </a:endParaRPr>
+            <a:endParaRPr lang="en-US" dirty="0"/>
           </a:p>
         </p:txBody>
       </p:sp>
@@ -15781,7 +16117,7 @@
           <p:cNvPr id="5" name="Footer Placeholder 4">
             <a:extLst>
               <a:ext uri="{FF2B5EF4-FFF2-40B4-BE49-F238E27FC236}">
-                <a16:creationId xmlns:a16="http://schemas.microsoft.com/office/drawing/2014/main" id="{4E4D04EE-5AD0-4A57-A42E-AE62E411ACEA}"/>
+                <a16:creationId xmlns:a16="http://schemas.microsoft.com/office/drawing/2014/main" id="{FA12DD91-9F70-8D13-B15B-52E638841235}"/>
               </a:ext>
             </a:extLst>
           </p:cNvPr>
@@ -15797,40 +16133,8 @@
           <a:bodyPr/>
           <a:lstStyle/>
           <a:p>
-            <a:pPr marL="0" marR="0" lvl="0" indent="0" algn="l" defTabSz="457200" rtl="0" eaLnBrk="1" fontAlgn="auto" latinLnBrk="0" hangingPunct="1">
-              <a:lnSpc>
-                <a:spcPct val="100000"/>
-              </a:lnSpc>
-              <a:spcBef>
-                <a:spcPts val="0"/>
-              </a:spcBef>
-              <a:spcAft>
-                <a:spcPts val="0"/>
-              </a:spcAft>
-              <a:buClrTx/>
-              <a:buSzTx/>
-              <a:buFontTx/>
-              <a:buNone/>
-              <a:tabLst/>
-              <a:defRPr/>
-            </a:pPr>
-            <a:r>
-              <a:rPr kumimoji="0" lang="en-US" sz="900" b="0" i="0" u="none" strike="noStrike" kern="1200" cap="none" spc="0" normalizeH="0" baseline="0" noProof="0" dirty="0">
-                <a:ln>
-                  <a:noFill/>
-                </a:ln>
-                <a:solidFill>
-                  <a:prstClr val="black">
-                    <a:tint val="75000"/>
-                  </a:prstClr>
-                </a:solidFill>
-                <a:effectLst/>
-                <a:uLnTx/>
-                <a:uFillTx/>
-                <a:latin typeface="Trebuchet MS" panose="020B0603020202020204"/>
-                <a:ea typeface="+mn-ea"/>
-                <a:cs typeface="+mn-cs"/>
-              </a:rPr>
+            <a:r>
+              <a:rPr lang="en-US" dirty="0"/>
               <a:t>raysmith@alum.mit.edu</a:t>
             </a:r>
           </a:p>
@@ -15841,7 +16145,7 @@
           <p:cNvPr id="6" name="Slide Number Placeholder 5">
             <a:extLst>
               <a:ext uri="{FF2B5EF4-FFF2-40B4-BE49-F238E27FC236}">
-                <a16:creationId xmlns:a16="http://schemas.microsoft.com/office/drawing/2014/main" id="{9711C448-36A8-43E6-A891-6E42F22D1185}"/>
+                <a16:creationId xmlns:a16="http://schemas.microsoft.com/office/drawing/2014/main" id="{80A4F1DC-D685-1FD4-6949-809ECE9574B0}"/>
               </a:ext>
             </a:extLst>
           </p:cNvPr>
@@ -15857,78 +16161,18 @@
           <a:bodyPr/>
           <a:lstStyle/>
           <a:p>
-            <a:pPr marL="0" marR="0" lvl="0" indent="0" algn="r" defTabSz="457200" rtl="0" eaLnBrk="1" fontAlgn="auto" latinLnBrk="0" hangingPunct="1">
-              <a:lnSpc>
-                <a:spcPct val="100000"/>
-              </a:lnSpc>
-              <a:spcBef>
-                <a:spcPts val="0"/>
-              </a:spcBef>
-              <a:spcAft>
-                <a:spcPts val="0"/>
-              </a:spcAft>
-              <a:buClrTx/>
-              <a:buSzTx/>
-              <a:buFontTx/>
-              <a:buNone/>
-              <a:tabLst/>
-              <a:defRPr/>
-            </a:pPr>
             <a:fld id="{6D22F896-40B5-4ADD-8801-0D06FADFA095}" type="slidenum">
-              <a:rPr kumimoji="0" lang="en-US" sz="900" b="0" i="0" u="none" strike="noStrike" kern="1200" cap="none" spc="0" normalizeH="0" baseline="0" noProof="0" smtClean="0">
-                <a:ln>
-                  <a:noFill/>
-                </a:ln>
-                <a:solidFill>
-                  <a:srgbClr val="90C226"/>
-                </a:solidFill>
-                <a:effectLst/>
-                <a:uLnTx/>
-                <a:uFillTx/>
-                <a:latin typeface="Trebuchet MS" panose="020B0603020202020204"/>
-                <a:ea typeface="+mn-ea"/>
-                <a:cs typeface="+mn-cs"/>
-              </a:rPr>
-              <a:pPr marL="0" marR="0" lvl="0" indent="0" algn="r" defTabSz="457200" rtl="0" eaLnBrk="1" fontAlgn="auto" latinLnBrk="0" hangingPunct="1">
-                <a:lnSpc>
-                  <a:spcPct val="100000"/>
-                </a:lnSpc>
-                <a:spcBef>
-                  <a:spcPts val="0"/>
-                </a:spcBef>
-                <a:spcAft>
-                  <a:spcPts val="0"/>
-                </a:spcAft>
-                <a:buClrTx/>
-                <a:buSzTx/>
-                <a:buFontTx/>
-                <a:buNone/>
-                <a:tabLst/>
-                <a:defRPr/>
-              </a:pPr>
+              <a:rPr lang="en-US" smtClean="0"/>
               <a:t>8</a:t>
             </a:fld>
-            <a:endParaRPr kumimoji="0" lang="en-US" sz="900" b="0" i="0" u="none" strike="noStrike" kern="1200" cap="none" spc="0" normalizeH="0" baseline="0" noProof="0" dirty="0">
-              <a:ln>
-                <a:noFill/>
-              </a:ln>
-              <a:solidFill>
-                <a:srgbClr val="90C226"/>
-              </a:solidFill>
-              <a:effectLst/>
-              <a:uLnTx/>
-              <a:uFillTx/>
-              <a:latin typeface="Trebuchet MS" panose="020B0603020202020204"/>
-              <a:ea typeface="+mn-ea"/>
-              <a:cs typeface="+mn-cs"/>
-            </a:endParaRPr>
+            <a:endParaRPr lang="en-US" dirty="0"/>
           </a:p>
         </p:txBody>
       </p:sp>
     </p:spTree>
     <p:extLst>
       <p:ext uri="{BB962C8B-B14F-4D97-AF65-F5344CB8AC3E}">
-        <p14:creationId xmlns:p14="http://schemas.microsoft.com/office/powerpoint/2010/main" val="3801150348"/>
+        <p14:creationId xmlns:p14="http://schemas.microsoft.com/office/powerpoint/2010/main" val="430928130"/>
       </p:ext>
     </p:extLst>
   </p:cSld>
@@ -15960,7 +16204,7 @@
           <p:cNvPr id="2" name="Title 1">
             <a:extLst>
               <a:ext uri="{FF2B5EF4-FFF2-40B4-BE49-F238E27FC236}">
-                <a16:creationId xmlns:a16="http://schemas.microsoft.com/office/drawing/2014/main" id="{C9F3EE02-B153-C542-E232-A6A2C8645654}"/>
+                <a16:creationId xmlns:a16="http://schemas.microsoft.com/office/drawing/2014/main" id="{FC423A4E-F16B-EA79-5B13-E9A4FF68619C}"/>
               </a:ext>
             </a:extLst>
           </p:cNvPr>
@@ -15978,17 +16222,17 @@
           <a:p>
             <a:r>
               <a:rPr lang="en-US" dirty="0"/>
-              <a:t>A Demo – Hopefully Live</a:t>
-            </a:r>
-          </a:p>
-        </p:txBody>
-      </p:sp>
-      <p:sp>
-        <p:nvSpPr>
-          <p:cNvPr id="3" name="Content Placeholder 2">
+              <a:t>Standard turtle graphical output</a:t>
+            </a:r>
+          </a:p>
+        </p:txBody>
+      </p:sp>
+      <p:sp>
+        <p:nvSpPr>
+          <p:cNvPr id="4" name="Date Placeholder 3">
             <a:extLst>
               <a:ext uri="{FF2B5EF4-FFF2-40B4-BE49-F238E27FC236}">
-                <a16:creationId xmlns:a16="http://schemas.microsoft.com/office/drawing/2014/main" id="{254E99A9-3DB4-D3CE-BC4F-B39AA4A88426}"/>
+                <a16:creationId xmlns:a16="http://schemas.microsoft.com/office/drawing/2014/main" id="{6ECDE496-13D9-1842-3FA3-4BA241CA6373}"/>
               </a:ext>
             </a:extLst>
           </p:cNvPr>
@@ -15996,90 +16240,28 @@
             <a:spLocks noGrp="1"/>
           </p:cNvSpPr>
           <p:nvPr>
-            <p:ph idx="1"/>
-          </p:nvPr>
-        </p:nvSpPr>
-        <p:spPr/>
-        <p:txBody>
-          <a:bodyPr>
-            <a:normAutofit lnSpcReduction="10000"/>
-          </a:bodyPr>
-          <a:lstStyle/>
-          <a:p>
-            <a:r>
-              <a:rPr lang="en-US" sz="3600" dirty="0"/>
-              <a:t>Following slides are reminders</a:t>
-            </a:r>
-          </a:p>
-          <a:p>
-            <a:pPr lvl="1"/>
-            <a:r>
-              <a:rPr lang="en-US" sz="3400" dirty="0"/>
-              <a:t>offline viewing</a:t>
-            </a:r>
-          </a:p>
-          <a:p>
-            <a:pPr lvl="1"/>
-            <a:r>
-              <a:rPr lang="en-US" sz="3400" dirty="0"/>
-              <a:t>If computer problems</a:t>
-            </a:r>
-          </a:p>
-          <a:p>
-            <a:r>
-              <a:rPr lang="en-US" sz="3600" dirty="0"/>
-              <a:t>Demo V/I usage…</a:t>
-            </a:r>
-          </a:p>
-          <a:p>
-            <a:pPr marL="457200" lvl="1" indent="0">
-              <a:buNone/>
-            </a:pPr>
-            <a:r>
-              <a:rPr lang="en-US" sz="3400" b="1" dirty="0">
-                <a:latin typeface="Courier New" panose="02070309020205020404" pitchFamily="49" charset="0"/>
-                <a:cs typeface="Courier New" panose="02070309020205020404" pitchFamily="49" charset="0"/>
-              </a:rPr>
-              <a:t>cmd&gt;</a:t>
-            </a:r>
-            <a:r>
-              <a:rPr lang="en-US" sz="3400" dirty="0">
-                <a:latin typeface="Courier New" panose="02070309020205020404" pitchFamily="49" charset="0"/>
-                <a:cs typeface="Courier New" panose="02070309020205020404" pitchFamily="49" charset="0"/>
-              </a:rPr>
-              <a:t> cd Desktop\...\01_intro</a:t>
-            </a:r>
-          </a:p>
-          <a:p>
-            <a:pPr marL="457200" lvl="1" indent="0">
-              <a:buNone/>
-            </a:pPr>
-            <a:r>
-              <a:rPr lang="en-US" sz="3400" b="1" dirty="0">
-                <a:latin typeface="Courier New" panose="02070309020205020404" pitchFamily="49" charset="0"/>
-                <a:cs typeface="Courier New" panose="02070309020205020404" pitchFamily="49" charset="0"/>
-              </a:rPr>
-              <a:t>cmd&gt;</a:t>
-            </a:r>
-            <a:r>
-              <a:rPr lang="en-US" sz="3400" dirty="0">
-                <a:latin typeface="Courier New" panose="02070309020205020404" pitchFamily="49" charset="0"/>
-                <a:cs typeface="Courier New" panose="02070309020205020404" pitchFamily="49" charset="0"/>
-              </a:rPr>
-              <a:t> python square_loop.py</a:t>
-            </a:r>
-          </a:p>
-          <a:p>
-            <a:endParaRPr lang="en-US" sz="3600" dirty="0"/>
-          </a:p>
-        </p:txBody>
-      </p:sp>
-      <p:sp>
-        <p:nvSpPr>
-          <p:cNvPr id="4" name="Date Placeholder 3">
+            <p:ph type="dt" sz="half" idx="10"/>
+          </p:nvPr>
+        </p:nvSpPr>
+        <p:spPr/>
+        <p:txBody>
+          <a:bodyPr/>
+          <a:lstStyle/>
+          <a:p>
+            <a:fld id="{A7119916-CD40-456D-ABE3-55F8822671F7}" type="datetime1">
+              <a:rPr lang="en-US" smtClean="0"/>
+              <a:t>5/18/2026</a:t>
+            </a:fld>
+            <a:endParaRPr lang="en-US" dirty="0"/>
+          </a:p>
+        </p:txBody>
+      </p:sp>
+      <p:sp>
+        <p:nvSpPr>
+          <p:cNvPr id="5" name="Footer Placeholder 4">
             <a:extLst>
               <a:ext uri="{FF2B5EF4-FFF2-40B4-BE49-F238E27FC236}">
-                <a16:creationId xmlns:a16="http://schemas.microsoft.com/office/drawing/2014/main" id="{9BEE1906-2E6B-9099-3D08-8463B414FF7B}"/>
+                <a16:creationId xmlns:a16="http://schemas.microsoft.com/office/drawing/2014/main" id="{FEA64794-899A-6AA3-482D-A65536BC6F6B}"/>
               </a:ext>
             </a:extLst>
           </p:cNvPr>
@@ -16087,35 +16269,6 @@
             <a:spLocks noGrp="1"/>
           </p:cNvSpPr>
           <p:nvPr>
-            <p:ph type="dt" sz="half" idx="10"/>
-          </p:nvPr>
-        </p:nvSpPr>
-        <p:spPr/>
-        <p:txBody>
-          <a:bodyPr/>
-          <a:lstStyle/>
-          <a:p>
-            <a:fld id="{A7119916-CD40-456D-ABE3-55F8822671F7}" type="datetime1">
-              <a:rPr lang="en-US" smtClean="0"/>
-              <a:t>4/16/2024</a:t>
-            </a:fld>
-            <a:endParaRPr lang="en-US" dirty="0"/>
-          </a:p>
-        </p:txBody>
-      </p:sp>
-      <p:sp>
-        <p:nvSpPr>
-          <p:cNvPr id="5" name="Footer Placeholder 4">
-            <a:extLst>
-              <a:ext uri="{FF2B5EF4-FFF2-40B4-BE49-F238E27FC236}">
-                <a16:creationId xmlns:a16="http://schemas.microsoft.com/office/drawing/2014/main" id="{FA12DD91-9F70-8D13-B15B-52E638841235}"/>
-              </a:ext>
-            </a:extLst>
-          </p:cNvPr>
-          <p:cNvSpPr>
-            <a:spLocks noGrp="1"/>
-          </p:cNvSpPr>
-          <p:nvPr>
             <p:ph type="ftr" sz="quarter" idx="11"/>
           </p:nvPr>
         </p:nvSpPr>
@@ -16136,7 +16289,7 @@
           <p:cNvPr id="6" name="Slide Number Placeholder 5">
             <a:extLst>
               <a:ext uri="{FF2B5EF4-FFF2-40B4-BE49-F238E27FC236}">
-                <a16:creationId xmlns:a16="http://schemas.microsoft.com/office/drawing/2014/main" id="{80A4F1DC-D685-1FD4-6949-809ECE9574B0}"/>
+                <a16:creationId xmlns:a16="http://schemas.microsoft.com/office/drawing/2014/main" id="{E0F2AE74-CBEA-82D2-3DA2-56AF7339BFBC}"/>
               </a:ext>
             </a:extLst>
           </p:cNvPr>
@@ -16160,10 +16313,40 @@
           </a:p>
         </p:txBody>
       </p:sp>
+      <p:pic>
+        <p:nvPicPr>
+          <p:cNvPr id="7" name="Picture 6">
+            <a:extLst>
+              <a:ext uri="{FF2B5EF4-FFF2-40B4-BE49-F238E27FC236}">
+                <a16:creationId xmlns:a16="http://schemas.microsoft.com/office/drawing/2014/main" id="{839F0618-2850-EFD1-3432-567A547756A5}"/>
+              </a:ext>
+            </a:extLst>
+          </p:cNvPr>
+          <p:cNvPicPr>
+            <a:picLocks noChangeAspect="1"/>
+          </p:cNvPicPr>
+          <p:nvPr/>
+        </p:nvPicPr>
+        <p:blipFill>
+          <a:blip r:embed="rId2"/>
+          <a:stretch>
+            <a:fillRect/>
+          </a:stretch>
+        </p:blipFill>
+        <p:spPr>
+          <a:xfrm>
+            <a:off x="1941705" y="1518899"/>
+            <a:ext cx="4736680" cy="4023533"/>
+          </a:xfrm>
+          <a:prstGeom prst="rect">
+            <a:avLst/>
+          </a:prstGeom>
+        </p:spPr>
+      </p:pic>
     </p:spTree>
     <p:extLst>
       <p:ext uri="{BB962C8B-B14F-4D97-AF65-F5344CB8AC3E}">
-        <p14:creationId xmlns:p14="http://schemas.microsoft.com/office/powerpoint/2010/main" val="430928130"/>
+        <p14:creationId xmlns:p14="http://schemas.microsoft.com/office/powerpoint/2010/main" val="1432343688"/>
       </p:ext>
     </p:extLst>
   </p:cSld>
